--- a/data-eng/decks/w5d3s3.pptx
+++ b/data-eng/decks/w5d3s3.pptx
@@ -3100,7 +3100,7 @@
       <p:grpSpPr/>
       <p:sp>
         <p:nvSpPr>
-          <p:cNvPr id="2" name="Oval 1"/>
+          <p:cNvPr id="2" name="deckgen:decor"/>
           <p:cNvSpPr/>
           <p:nvPr/>
         </p:nvSpPr>
@@ -3130,7 +3130,7 @@
       </p:sp>
       <p:sp>
         <p:nvSpPr>
-          <p:cNvPr id="3" name="Oval 2"/>
+          <p:cNvPr id="3" name="deckgen:decor"/>
           <p:cNvSpPr/>
           <p:nvPr/>
         </p:nvSpPr>
@@ -3160,7 +3160,7 @@
       </p:sp>
       <p:sp>
         <p:nvSpPr>
-          <p:cNvPr id="4" name="Oval 3"/>
+          <p:cNvPr id="4" name="deckgen:decor"/>
           <p:cNvSpPr/>
           <p:nvPr/>
         </p:nvSpPr>
@@ -3190,7 +3190,7 @@
       </p:sp>
       <p:sp>
         <p:nvSpPr>
-          <p:cNvPr id="5" name="Rectangle 4"/>
+          <p:cNvPr id="5" name="deckgen:decor"/>
           <p:cNvSpPr/>
           <p:nvPr/>
         </p:nvSpPr>
@@ -3220,7 +3220,7 @@
       </p:sp>
       <p:sp>
         <p:nvSpPr>
-          <p:cNvPr id="6" name="Oval 5"/>
+          <p:cNvPr id="6" name="deckgen:decor"/>
           <p:cNvSpPr/>
           <p:nvPr/>
         </p:nvSpPr>
@@ -3250,7 +3250,7 @@
       </p:sp>
       <p:sp>
         <p:nvSpPr>
-          <p:cNvPr id="7" name="Oval 6"/>
+          <p:cNvPr id="7" name="deckgen:decor"/>
           <p:cNvSpPr/>
           <p:nvPr/>
         </p:nvSpPr>
@@ -3280,7 +3280,7 @@
       </p:sp>
       <p:sp>
         <p:nvSpPr>
-          <p:cNvPr id="8" name="Oval 7"/>
+          <p:cNvPr id="8" name="deckgen:decor"/>
           <p:cNvSpPr/>
           <p:nvPr/>
         </p:nvSpPr>
@@ -3310,7 +3310,7 @@
       </p:sp>
       <p:sp>
         <p:nvSpPr>
-          <p:cNvPr id="9" name="Oval 8"/>
+          <p:cNvPr id="9" name="deckgen:decor"/>
           <p:cNvSpPr/>
           <p:nvPr/>
         </p:nvSpPr>
@@ -3340,7 +3340,7 @@
       </p:sp>
       <p:sp>
         <p:nvSpPr>
-          <p:cNvPr id="10" name="Rectangle 9"/>
+          <p:cNvPr id="10" name="deckgen:decor"/>
           <p:cNvSpPr/>
           <p:nvPr/>
         </p:nvSpPr>
@@ -3434,7 +3434,7 @@
                 <a:ea typeface="Pretendard"/>
                 <a:cs typeface="Pretendard"/>
               </a:rPr>
-              <a:t>5-3 · Iceberg · MinIO 연결과 대용량 분석 준비 · 실습 1H</a:t>
+              <a:t>5-3 · Iceberg · MinIO 연결 · 실습 1H</a:t>
             </a:r>
           </a:p>
         </p:txBody>
@@ -3516,7 +3516,7 @@
                 <a:ea typeface="Pretendard"/>
                 <a:cs typeface="Pretendard"/>
               </a:rPr>
-              <a:t>SQL 로 테이블을 만들고, 저장소에 생긴 파일을 확인</a:t>
+              <a:t>SQL 로 테이블을 만들고, 생긴 파일 확인</a:t>
             </a:r>
           </a:p>
         </p:txBody>
@@ -3600,7 +3600,7 @@
       <p:grpSpPr/>
       <p:sp>
         <p:nvSpPr>
-          <p:cNvPr id="2" name="Oval 1"/>
+          <p:cNvPr id="2" name="deckgen:decor"/>
           <p:cNvSpPr/>
           <p:nvPr/>
         </p:nvSpPr>
@@ -3630,7 +3630,7 @@
       </p:sp>
       <p:sp>
         <p:nvSpPr>
-          <p:cNvPr id="3" name="Oval 2"/>
+          <p:cNvPr id="3" name="deckgen:decor"/>
           <p:cNvSpPr/>
           <p:nvPr/>
         </p:nvSpPr>
@@ -3660,7 +3660,7 @@
       </p:sp>
       <p:sp>
         <p:nvSpPr>
-          <p:cNvPr id="4" name="Oval 3"/>
+          <p:cNvPr id="4" name="deckgen:decor"/>
           <p:cNvSpPr/>
           <p:nvPr/>
         </p:nvSpPr>
@@ -3941,7 +3941,7 @@
                 <a:ea typeface="Pretendard"/>
                 <a:cs typeface="Pretendard"/>
               </a:rPr>
-              <a:t>SHOW CATALOGS 에 lake 가 보인다</a:t>
+              <a:t>처음엔 spark_catalog 하나, CREATE NAMESPACE 뒤 lake 가 보인다</a:t>
             </a:r>
           </a:p>
         </p:txBody>
@@ -4087,7 +4087,7 @@
                 <a:ea typeface="Pretendard"/>
                 <a:cs typeface="Pretendard"/>
               </a:rPr>
-              <a:t>SELECT 결과 3행 · 콘솔에 metadata/ 와 data/ 폴더</a:t>
+              <a:t>SELECT 3행 · files 3개 · file_path 가 warehouse/lake/db/orders</a:t>
             </a:r>
           </a:p>
         </p:txBody>
@@ -4233,7 +4233,7 @@
                 <a:ea typeface="Pretendard"/>
                 <a:cs typeface="Pretendard"/>
               </a:rPr>
-              <a:t>files 의 file_path 가 s3a://warehouse/db/orders/data/ 로 시작</a:t>
+              <a:t>콘솔 metadata/ 에 v1~v4.metadata.json · version-hint.text</a:t>
             </a:r>
           </a:p>
         </p:txBody>
@@ -4379,7 +4379,7 @@
                 <a:ea typeface="Pretendard"/>
                 <a:cs typeface="Pretendard"/>
               </a:rPr>
-              <a:t>snapshots 3행(append·append·overwrite) · id 1 의 price 47000</a:t>
+              <a:t>snapshots append·append·overwrite · keyboard 47000.0</a:t>
             </a:r>
           </a:p>
         </p:txBody>
@@ -4525,7 +4525,7 @@
                 <a:ea typeface="Pretendard"/>
                 <a:cs typeface="Pretendard"/>
               </a:rPr>
-              <a:t>첫 스냅샷 VERSION AS OF 에서 price 45000 · master 가 7077</a:t>
+              <a:t>첫 스냅샷 VERSION AS OF 는 45000.0 · master 가 7077</a:t>
             </a:r>
           </a:p>
         </p:txBody>
@@ -4662,7 +4662,7 @@
       <p:grpSpPr/>
       <p:sp>
         <p:nvSpPr>
-          <p:cNvPr id="2" name="Oval 1"/>
+          <p:cNvPr id="2" name="deckgen:decor"/>
           <p:cNvSpPr/>
           <p:nvPr/>
         </p:nvSpPr>
@@ -4692,7 +4692,7 @@
       </p:sp>
       <p:sp>
         <p:nvSpPr>
-          <p:cNvPr id="3" name="Oval 2"/>
+          <p:cNvPr id="3" name="deckgen:decor"/>
           <p:cNvSpPr/>
           <p:nvPr/>
         </p:nvSpPr>
@@ -4868,7 +4868,7 @@
                 <a:ea typeface="Pretendard"/>
                 <a:cs typeface="Pretendard"/>
               </a:rPr>
-              <a:t>설정 아홉 줄을 「없으면 무슨 오류」로 한 장에 정리하고, 5-4 데이터 가공을 위한 상태를 확인합니다</a:t>
+              <a:t>설정을 「없으면 무슨 오류」로 한 장에 정리하고, 5-4 를 위해 멈춰 둡니다</a:t>
             </a:r>
           </a:p>
         </p:txBody>
@@ -5216,7 +5216,7 @@
                 <a:ea typeface="Pretendard"/>
                 <a:cs typeface="Pretendard"/>
               </a:rPr>
-              <a:t>자주 겪는 오류 네 가지</a:t>
+              <a:t>자주 겪는 오류</a:t>
             </a:r>
           </a:p>
         </p:txBody>
@@ -5332,7 +5332,7 @@
                 <a:ea typeface="Pretendard"/>
                 <a:cs typeface="Pretendard"/>
               </a:rPr>
-              <a:t>5-4 예고와 준비물</a:t>
+              <a:t>exit() 뒤 docker compose stop</a:t>
             </a:r>
           </a:p>
         </p:txBody>
@@ -5444,7 +5444,7 @@
                 <a:ea typeface="Pretendard"/>
                 <a:cs typeface="Pretendard"/>
               </a:rPr>
-              <a:t>셸은 나가지 말고 그대로 두기</a:t>
+              <a:t>셸(&gt;&gt;&gt;)은 그대로 두기</a:t>
             </a:r>
           </a:p>
         </p:txBody>
@@ -5469,7 +5469,7 @@
       <p:grpSpPr/>
       <p:sp>
         <p:nvSpPr>
-          <p:cNvPr id="2" name="Oval 1"/>
+          <p:cNvPr id="2" name="deckgen:decor"/>
           <p:cNvSpPr/>
           <p:nvPr/>
         </p:nvSpPr>
@@ -5499,7 +5499,7 @@
       </p:sp>
       <p:sp>
         <p:nvSpPr>
-          <p:cNvPr id="3" name="Oval 2"/>
+          <p:cNvPr id="3" name="deckgen:decor"/>
           <p:cNvSpPr/>
           <p:nvPr/>
         </p:nvSpPr>
@@ -5529,7 +5529,7 @@
       </p:sp>
       <p:sp>
         <p:nvSpPr>
-          <p:cNvPr id="4" name="Oval 3"/>
+          <p:cNvPr id="4" name="deckgen:decor"/>
           <p:cNvSpPr/>
           <p:nvPr/>
         </p:nvSpPr>
@@ -5810,7 +5810,7 @@
                 <a:ea typeface="Pretendard"/>
                 <a:cs typeface="Pretendard"/>
               </a:rPr>
-              <a:t>SHOW CATALOGS 로 lake 카탈로그가 등록됐는지 확인한다</a:t>
+              <a:t>CREATE NAMESPACE 뒤 SHOW CATALOGS 에 lake 가 생기는 것을 본다</a:t>
             </a:r>
           </a:p>
         </p:txBody>
@@ -5956,7 +5956,7 @@
                 <a:ea typeface="Pretendard"/>
                 <a:cs typeface="Pretendard"/>
               </a:rPr>
-              <a:t>CREATE TABLE … USING iceberg 로 lake.db.orders 를 만들고 3행을 넣는다</a:t>
+              <a:t>lake.db.orders 를 USING iceberg 로 만들고 3행을 넣는다</a:t>
             </a:r>
           </a:p>
         </p:txBody>
@@ -6102,7 +6102,7 @@
                 <a:ea typeface="Pretendard"/>
                 <a:cs typeface="Pretendard"/>
               </a:rPr>
-              <a:t>MinIO 콘솔에서 metadata/ 와 data/ 폴더를 눈으로 확인한다</a:t>
+              <a:t>콘솔에서 warehouse/lake/db/orders 의 metadata/ · data/ 확인</a:t>
             </a:r>
           </a:p>
         </p:txBody>
@@ -6248,7 +6248,7 @@
                 <a:ea typeface="Pretendard"/>
                 <a:cs typeface="Pretendard"/>
               </a:rPr>
-              <a:t>INSERT·UPDATE 뒤 snapshots 가 쌓이고 타임 트래블이 되는 것을 본다</a:t>
+              <a:t>INSERT·UPDATE 로 스냅샷을 쌓고 첫 판으로 되돌려 본다</a:t>
             </a:r>
           </a:p>
         </p:txBody>
@@ -6323,7 +6323,7 @@
                 <a:ea typeface="Pretendard"/>
                 <a:cs typeface="Pretendard"/>
               </a:rPr>
-              <a:t>카탈로그 타입이 달라도 Iceberg 기능은 그대로 — 4주차와 같은 결과가 나와야 합니다</a:t>
+              <a:t>카탈로그 타입이 달라도 Iceberg 기능은 그대로 — 4주차와 같은 결과</a:t>
             </a:r>
           </a:p>
         </p:txBody>
@@ -6460,7 +6460,7 @@
       <p:grpSpPr/>
       <p:sp>
         <p:nvSpPr>
-          <p:cNvPr id="2" name="Oval 1"/>
+          <p:cNvPr id="2" name="deckgen:decor"/>
           <p:cNvSpPr/>
           <p:nvPr/>
         </p:nvSpPr>
@@ -6490,7 +6490,7 @@
       </p:sp>
       <p:sp>
         <p:nvSpPr>
-          <p:cNvPr id="3" name="Oval 2"/>
+          <p:cNvPr id="3" name="deckgen:decor"/>
           <p:cNvSpPr/>
           <p:nvPr/>
         </p:nvSpPr>
@@ -6520,7 +6520,7 @@
       </p:sp>
       <p:sp>
         <p:nvSpPr>
-          <p:cNvPr id="4" name="Oval 3"/>
+          <p:cNvPr id="4" name="deckgen:decor"/>
           <p:cNvSpPr/>
           <p:nvPr/>
         </p:nvSpPr>
@@ -6625,7 +6625,7 @@
                 <a:ea typeface="Pretendard"/>
                 <a:cs typeface="Pretendard"/>
               </a:rPr>
-              <a:t>다섯 단계 — 앞 시간에 띄워 둔 PySpark 셸에서</a:t>
+              <a:t>다섯 단계 — 앞 시간에 띄운 PySpark 셸에서</a:t>
             </a:r>
           </a:p>
         </p:txBody>
@@ -6696,7 +6696,7 @@
                 <a:ea typeface="Pretendard"/>
                 <a:cs typeface="Pretendard"/>
               </a:rPr>
-              <a:t>셸을 나갔다면 3단계 명령(--packages · --conf)으로 다시 띄우고 시작합니다</a:t>
+              <a:t>셸을 나갔다면 ~/data-eng/week5 에서 bash lake-pyspark.sh 로 다시 띄웁니다</a:t>
             </a:r>
           </a:p>
         </p:txBody>
@@ -6860,7 +6860,7 @@
                 <a:ea typeface="Pretendard"/>
                 <a:cs typeface="Pretendard"/>
               </a:rPr>
-              <a:t>lake 보이나</a:t>
+              <a:t>CREATE NAMESPACE</a:t>
             </a:r>
           </a:p>
         </p:txBody>
@@ -7170,7 +7170,7 @@
                 <a:ea typeface="Pretendard"/>
                 <a:cs typeface="Pretendard"/>
               </a:rPr>
-              <a:t>콘솔 · 메타테이블</a:t>
+              <a:t>메타테이블</a:t>
             </a:r>
           </a:p>
           <a:p>
@@ -7653,7 +7653,7 @@
       <p:grpSpPr/>
       <p:sp>
         <p:nvSpPr>
-          <p:cNvPr id="2" name="Oval 1"/>
+          <p:cNvPr id="2" name="deckgen:decor"/>
           <p:cNvSpPr/>
           <p:nvPr/>
         </p:nvSpPr>
@@ -7683,7 +7683,7 @@
       </p:sp>
       <p:sp>
         <p:nvSpPr>
-          <p:cNvPr id="3" name="Oval 2"/>
+          <p:cNvPr id="3" name="deckgen:decor"/>
           <p:cNvSpPr/>
           <p:nvPr/>
         </p:nvSpPr>
@@ -7713,7 +7713,7 @@
       </p:sp>
       <p:sp>
         <p:nvSpPr>
-          <p:cNvPr id="4" name="Oval 3"/>
+          <p:cNvPr id="4" name="deckgen:decor"/>
           <p:cNvSpPr/>
           <p:nvPr/>
         </p:nvSpPr>
@@ -7777,7 +7777,7 @@
                 <a:ea typeface="Pretendard"/>
                 <a:cs typeface="Pretendard"/>
               </a:rPr>
-              <a:t>1·2단계</a:t>
+              <a:t>1단계</a:t>
             </a:r>
           </a:p>
         </p:txBody>
@@ -7818,7 +7818,7 @@
                 <a:ea typeface="Pretendard"/>
                 <a:cs typeface="Pretendard"/>
               </a:rPr>
-              <a:t>핵심 명령 — spark.sql("…") 로 실행</a:t>
+              <a:t>카탈로그는 처음 쓸 때 등록된다</a:t>
             </a:r>
           </a:p>
         </p:txBody>
@@ -7855,88 +7855,19 @@
       </p:sp>
       <p:sp>
         <p:nvSpPr>
-          <p:cNvPr id="8" name="Rectangle 7"/>
-          <p:cNvSpPr/>
-          <p:nvPr/>
-        </p:nvSpPr>
-        <p:spPr>
-          <a:xfrm>
-            <a:off x="1143000" y="2781300"/>
-            <a:ext cx="1133142" cy="571500"/>
-          </a:xfrm>
-          <a:prstGeom prst="rect">
-            <a:avLst/>
-          </a:prstGeom>
-          <a:solidFill>
-            <a:srgbClr val="0D2B5E"/>
-          </a:solidFill>
-          <a:ln>
-            <a:noFill/>
-          </a:ln>
-          <a:effectLst/>
-        </p:spPr>
-        <p:txBody>
-          <a:bodyPr rtlCol="0" anchor="ctr" wrap="square"/>
-          <a:lstStyle/>
-          <a:p>
-            <a:pPr algn="ctr"/>
-          </a:p>
-        </p:txBody>
-      </p:sp>
-      <p:sp>
-        <p:nvSpPr>
-          <p:cNvPr id="9" name="TextBox 8"/>
-          <p:cNvSpPr txBox="1"/>
-          <p:nvPr/>
-        </p:nvSpPr>
-        <p:spPr>
-          <a:xfrm>
-            <a:off x="1143000" y="2781300"/>
-            <a:ext cx="1133142" cy="571500"/>
-          </a:xfrm>
-          <a:prstGeom prst="rect">
-            <a:avLst/>
-          </a:prstGeom>
-          <a:noFill/>
-        </p:spPr>
-        <p:txBody>
-          <a:bodyPr wrap="square" lIns="0" rIns="0" tIns="0" bIns="0" anchor="ctr">
-            <a:spAutoFit/>
-          </a:bodyPr>
-          <a:lstStyle/>
-          <a:p>
-            <a:pPr algn="ctr">
-              <a:lnSpc>
-                <a:spcPct val="100000"/>
-              </a:lnSpc>
-            </a:pPr>
-            <a:r>
-              <a:rPr sz="1800" b="1">
-                <a:solidFill>
-                  <a:srgbClr val="FFFFFF"/>
-                </a:solidFill>
-                <a:latin typeface="Pretendard"/>
-                <a:ea typeface="Pretendard"/>
-                <a:cs typeface="Pretendard"/>
-              </a:rPr>
-              <a:t>카탈로그</a:t>
-            </a:r>
-          </a:p>
-        </p:txBody>
-      </p:sp>
-      <p:sp>
-        <p:nvSpPr>
-          <p:cNvPr id="10" name="Rectangle 9"/>
-          <p:cNvSpPr/>
-          <p:nvPr/>
-        </p:nvSpPr>
-        <p:spPr>
-          <a:xfrm>
-            <a:off x="2276142" y="2781300"/>
-            <a:ext cx="14868858" cy="571500"/>
-          </a:xfrm>
-          <a:prstGeom prst="rect">
-            <a:avLst/>
+          <p:cNvPr id="8" name="Rounded Rectangle 7"/>
+          <p:cNvSpPr/>
+          <p:nvPr/>
+        </p:nvSpPr>
+        <p:spPr>
+          <a:xfrm>
+            <a:off x="1143000" y="2933700"/>
+            <a:ext cx="11430000" cy="1095375"/>
+          </a:xfrm>
+          <a:prstGeom prst="roundRect">
+            <a:avLst>
+              <a:gd name="adj" fmla="val 4347"/>
+            </a:avLst>
           </a:prstGeom>
           <a:solidFill>
             <a:srgbClr val="FAFBFD"/>
@@ -7958,57 +7889,16 @@
       </p:sp>
       <p:sp>
         <p:nvSpPr>
-          <p:cNvPr id="11" name="TextBox 10"/>
-          <p:cNvSpPr txBox="1"/>
-          <p:nvPr/>
-        </p:nvSpPr>
-        <p:spPr>
-          <a:xfrm>
-            <a:off x="2428542" y="2781300"/>
-            <a:ext cx="14564058" cy="571500"/>
-          </a:xfrm>
-          <a:prstGeom prst="rect">
-            <a:avLst/>
-          </a:prstGeom>
-          <a:noFill/>
-        </p:spPr>
-        <p:txBody>
-          <a:bodyPr wrap="square" lIns="0" rIns="0" tIns="0" bIns="0" anchor="ctr">
-            <a:spAutoFit/>
-          </a:bodyPr>
-          <a:lstStyle/>
-          <a:p>
-            <a:pPr algn="l">
-              <a:lnSpc>
-                <a:spcPct val="115000"/>
-              </a:lnSpc>
-            </a:pPr>
-            <a:r>
-              <a:rPr sz="1800" b="0">
-                <a:solidFill>
-                  <a:srgbClr val="3D3D3D"/>
-                </a:solidFill>
-                <a:latin typeface="Pretendard"/>
-                <a:ea typeface="Pretendard"/>
-                <a:cs typeface="Pretendard"/>
-              </a:rPr>
-              <a:t>SHOW CATALOGS</a:t>
-            </a:r>
-          </a:p>
-        </p:txBody>
-      </p:sp>
-      <p:sp>
-        <p:nvSpPr>
-          <p:cNvPr id="12" name="Rectangle 11"/>
-          <p:cNvSpPr/>
-          <p:nvPr/>
-        </p:nvSpPr>
-        <p:spPr>
-          <a:xfrm>
-            <a:off x="1143000" y="3429000"/>
-            <a:ext cx="1133142" cy="571500"/>
-          </a:xfrm>
-          <a:prstGeom prst="rect">
+          <p:cNvPr id="9" name="Oval 8"/>
+          <p:cNvSpPr/>
+          <p:nvPr/>
+        </p:nvSpPr>
+        <p:spPr>
+          <a:xfrm>
+            <a:off x="1447800" y="3181350"/>
+            <a:ext cx="590550" cy="590550"/>
+          </a:xfrm>
+          <a:prstGeom prst="ellipse">
             <a:avLst/>
           </a:prstGeom>
           <a:solidFill>
@@ -8029,22 +7919,22 @@
       </p:sp>
       <p:sp>
         <p:nvSpPr>
-          <p:cNvPr id="13" name="TextBox 12"/>
-          <p:cNvSpPr txBox="1"/>
-          <p:nvPr/>
-        </p:nvSpPr>
-        <p:spPr>
-          <a:xfrm>
-            <a:off x="1143000" y="3429000"/>
-            <a:ext cx="1133142" cy="571500"/>
-          </a:xfrm>
-          <a:prstGeom prst="rect">
-            <a:avLst/>
-          </a:prstGeom>
-          <a:noFill/>
-        </p:spPr>
-        <p:txBody>
-          <a:bodyPr wrap="square" lIns="0" rIns="0" tIns="0" bIns="0" anchor="ctr">
+          <p:cNvPr id="10" name="TextBox 9"/>
+          <p:cNvSpPr txBox="1"/>
+          <p:nvPr/>
+        </p:nvSpPr>
+        <p:spPr>
+          <a:xfrm>
+            <a:off x="1447800" y="3333750"/>
+            <a:ext cx="590550" cy="323850"/>
+          </a:xfrm>
+          <a:prstGeom prst="rect">
+            <a:avLst/>
+          </a:prstGeom>
+          <a:noFill/>
+        </p:spPr>
+        <p:txBody>
+          <a:bodyPr wrap="square" lIns="0" rIns="0" tIns="0" bIns="0" anchor="t">
             <a:spAutoFit/>
           </a:bodyPr>
           <a:lstStyle/>
@@ -8055,7 +7945,7 @@
               </a:lnSpc>
             </a:pPr>
             <a:r>
-              <a:rPr sz="1800" b="1">
+              <a:rPr sz="2250" b="1">
                 <a:solidFill>
                   <a:srgbClr val="FFFFFF"/>
                 </a:solidFill>
@@ -8063,24 +7953,108 @@
                 <a:ea typeface="Pretendard"/>
                 <a:cs typeface="Pretendard"/>
               </a:rPr>
-              <a:t>DB 목록</a:t>
-            </a:r>
-          </a:p>
-        </p:txBody>
-      </p:sp>
-      <p:sp>
-        <p:nvSpPr>
-          <p:cNvPr id="14" name="Rectangle 13"/>
-          <p:cNvSpPr/>
-          <p:nvPr/>
-        </p:nvSpPr>
-        <p:spPr>
-          <a:xfrm>
-            <a:off x="2276142" y="3429000"/>
-            <a:ext cx="14868858" cy="571500"/>
-          </a:xfrm>
-          <a:prstGeom prst="rect">
-            <a:avLst/>
+              <a:t>1</a:t>
+            </a:r>
+          </a:p>
+        </p:txBody>
+      </p:sp>
+      <p:sp>
+        <p:nvSpPr>
+          <p:cNvPr id="11" name="TextBox 10"/>
+          <p:cNvSpPr txBox="1"/>
+          <p:nvPr/>
+        </p:nvSpPr>
+        <p:spPr>
+          <a:xfrm>
+            <a:off x="2324100" y="3143250"/>
+            <a:ext cx="9906000" cy="400050"/>
+          </a:xfrm>
+          <a:prstGeom prst="rect">
+            <a:avLst/>
+          </a:prstGeom>
+          <a:noFill/>
+        </p:spPr>
+        <p:txBody>
+          <a:bodyPr wrap="square" lIns="0" rIns="0" tIns="0" bIns="0" anchor="t">
+            <a:spAutoFit/>
+          </a:bodyPr>
+          <a:lstStyle/>
+          <a:p>
+            <a:pPr algn="l">
+              <a:lnSpc>
+                <a:spcPct val="110000"/>
+              </a:lnSpc>
+            </a:pPr>
+            <a:r>
+              <a:rPr sz="2475" b="1">
+                <a:solidFill>
+                  <a:srgbClr val="0D2B5E"/>
+                </a:solidFill>
+                <a:latin typeface="Pretendard"/>
+                <a:ea typeface="Pretendard"/>
+                <a:cs typeface="Pretendard"/>
+              </a:rPr>
+              <a:t>SHOW CATALOGS</a:t>
+            </a:r>
+          </a:p>
+        </p:txBody>
+      </p:sp>
+      <p:sp>
+        <p:nvSpPr>
+          <p:cNvPr id="12" name="TextBox 11"/>
+          <p:cNvSpPr txBox="1"/>
+          <p:nvPr/>
+        </p:nvSpPr>
+        <p:spPr>
+          <a:xfrm>
+            <a:off x="2324100" y="3543300"/>
+            <a:ext cx="9906000" cy="361950"/>
+          </a:xfrm>
+          <a:prstGeom prst="rect">
+            <a:avLst/>
+          </a:prstGeom>
+          <a:noFill/>
+        </p:spPr>
+        <p:txBody>
+          <a:bodyPr wrap="square" lIns="0" rIns="0" tIns="0" bIns="0" anchor="t">
+            <a:spAutoFit/>
+          </a:bodyPr>
+          <a:lstStyle/>
+          <a:p>
+            <a:pPr algn="l">
+              <a:lnSpc>
+                <a:spcPct val="120000"/>
+              </a:lnSpc>
+            </a:pPr>
+            <a:r>
+              <a:rPr sz="2025" b="0">
+                <a:solidFill>
+                  <a:srgbClr val="3D3D3D"/>
+                </a:solidFill>
+                <a:latin typeface="Pretendard"/>
+                <a:ea typeface="Pretendard"/>
+                <a:cs typeface="Pretendard"/>
+              </a:rPr>
+              <a:t>spark_catalog 한 줄뿐 — 아직 lake 가 없는 것이 정상</a:t>
+            </a:r>
+          </a:p>
+        </p:txBody>
+      </p:sp>
+      <p:sp>
+        <p:nvSpPr>
+          <p:cNvPr id="13" name="Rounded Rectangle 12"/>
+          <p:cNvSpPr/>
+          <p:nvPr/>
+        </p:nvSpPr>
+        <p:spPr>
+          <a:xfrm>
+            <a:off x="1143000" y="4200525"/>
+            <a:ext cx="11430000" cy="1095375"/>
+          </a:xfrm>
+          <a:prstGeom prst="roundRect">
+            <a:avLst>
+              <a:gd name="adj" fmla="val 4347"/>
+            </a:avLst>
           </a:prstGeom>
           <a:solidFill>
             <a:srgbClr val="FAFBFD"/>
@@ -8102,57 +8076,16 @@
       </p:sp>
       <p:sp>
         <p:nvSpPr>
-          <p:cNvPr id="15" name="TextBox 14"/>
-          <p:cNvSpPr txBox="1"/>
-          <p:nvPr/>
-        </p:nvSpPr>
-        <p:spPr>
-          <a:xfrm>
-            <a:off x="2428542" y="3429000"/>
-            <a:ext cx="14564058" cy="571500"/>
-          </a:xfrm>
-          <a:prstGeom prst="rect">
-            <a:avLst/>
-          </a:prstGeom>
-          <a:noFill/>
-        </p:spPr>
-        <p:txBody>
-          <a:bodyPr wrap="square" lIns="0" rIns="0" tIns="0" bIns="0" anchor="ctr">
-            <a:spAutoFit/>
-          </a:bodyPr>
-          <a:lstStyle/>
-          <a:p>
-            <a:pPr algn="l">
-              <a:lnSpc>
-                <a:spcPct val="115000"/>
-              </a:lnSpc>
-            </a:pPr>
-            <a:r>
-              <a:rPr sz="1800" b="0">
-                <a:solidFill>
-                  <a:srgbClr val="3D3D3D"/>
-                </a:solidFill>
-                <a:latin typeface="Pretendard"/>
-                <a:ea typeface="Pretendard"/>
-                <a:cs typeface="Pretendard"/>
-              </a:rPr>
-              <a:t>SHOW DATABASES IN lake — 아직 비어 있다</a:t>
-            </a:r>
-          </a:p>
-        </p:txBody>
-      </p:sp>
-      <p:sp>
-        <p:nvSpPr>
-          <p:cNvPr id="16" name="Rectangle 15"/>
-          <p:cNvSpPr/>
-          <p:nvPr/>
-        </p:nvSpPr>
-        <p:spPr>
-          <a:xfrm>
-            <a:off x="1143000" y="4076700"/>
-            <a:ext cx="1133142" cy="571500"/>
-          </a:xfrm>
-          <a:prstGeom prst="rect">
+          <p:cNvPr id="14" name="Oval 13"/>
+          <p:cNvSpPr/>
+          <p:nvPr/>
+        </p:nvSpPr>
+        <p:spPr>
+          <a:xfrm>
+            <a:off x="1447800" y="4448175"/>
+            <a:ext cx="590550" cy="590550"/>
+          </a:xfrm>
+          <a:prstGeom prst="ellipse">
             <a:avLst/>
           </a:prstGeom>
           <a:solidFill>
@@ -8173,58 +8106,142 @@
       </p:sp>
       <p:sp>
         <p:nvSpPr>
+          <p:cNvPr id="15" name="TextBox 14"/>
+          <p:cNvSpPr txBox="1"/>
+          <p:nvPr/>
+        </p:nvSpPr>
+        <p:spPr>
+          <a:xfrm>
+            <a:off x="1447800" y="4600575"/>
+            <a:ext cx="590550" cy="323850"/>
+          </a:xfrm>
+          <a:prstGeom prst="rect">
+            <a:avLst/>
+          </a:prstGeom>
+          <a:noFill/>
+        </p:spPr>
+        <p:txBody>
+          <a:bodyPr wrap="square" lIns="0" rIns="0" tIns="0" bIns="0" anchor="t">
+            <a:spAutoFit/>
+          </a:bodyPr>
+          <a:lstStyle/>
+          <a:p>
+            <a:pPr algn="ctr">
+              <a:lnSpc>
+                <a:spcPct val="100000"/>
+              </a:lnSpc>
+            </a:pPr>
+            <a:r>
+              <a:rPr sz="2250" b="1">
+                <a:solidFill>
+                  <a:srgbClr val="FFFFFF"/>
+                </a:solidFill>
+                <a:latin typeface="Pretendard"/>
+                <a:ea typeface="Pretendard"/>
+                <a:cs typeface="Pretendard"/>
+              </a:rPr>
+              <a:t>2</a:t>
+            </a:r>
+          </a:p>
+        </p:txBody>
+      </p:sp>
+      <p:sp>
+        <p:nvSpPr>
+          <p:cNvPr id="16" name="TextBox 15"/>
+          <p:cNvSpPr txBox="1"/>
+          <p:nvPr/>
+        </p:nvSpPr>
+        <p:spPr>
+          <a:xfrm>
+            <a:off x="2324100" y="4410075"/>
+            <a:ext cx="9906000" cy="400050"/>
+          </a:xfrm>
+          <a:prstGeom prst="rect">
+            <a:avLst/>
+          </a:prstGeom>
+          <a:noFill/>
+        </p:spPr>
+        <p:txBody>
+          <a:bodyPr wrap="square" lIns="0" rIns="0" tIns="0" bIns="0" anchor="t">
+            <a:spAutoFit/>
+          </a:bodyPr>
+          <a:lstStyle/>
+          <a:p>
+            <a:pPr algn="l">
+              <a:lnSpc>
+                <a:spcPct val="110000"/>
+              </a:lnSpc>
+            </a:pPr>
+            <a:r>
+              <a:rPr sz="2475" b="1">
+                <a:solidFill>
+                  <a:srgbClr val="0D2B5E"/>
+                </a:solidFill>
+                <a:latin typeface="Pretendard"/>
+                <a:ea typeface="Pretendard"/>
+                <a:cs typeface="Pretendard"/>
+              </a:rPr>
+              <a:t>일부러: SHOW NAMESPACES IN lake</a:t>
+            </a:r>
+          </a:p>
+        </p:txBody>
+      </p:sp>
+      <p:sp>
+        <p:nvSpPr>
           <p:cNvPr id="17" name="TextBox 16"/>
           <p:cNvSpPr txBox="1"/>
           <p:nvPr/>
         </p:nvSpPr>
         <p:spPr>
           <a:xfrm>
-            <a:off x="1143000" y="4076700"/>
-            <a:ext cx="1133142" cy="571500"/>
-          </a:xfrm>
-          <a:prstGeom prst="rect">
-            <a:avLst/>
-          </a:prstGeom>
-          <a:noFill/>
-        </p:spPr>
-        <p:txBody>
-          <a:bodyPr wrap="square" lIns="0" rIns="0" tIns="0" bIns="0" anchor="ctr">
-            <a:spAutoFit/>
-          </a:bodyPr>
-          <a:lstStyle/>
-          <a:p>
-            <a:pPr algn="ctr">
-              <a:lnSpc>
-                <a:spcPct val="100000"/>
-              </a:lnSpc>
-            </a:pPr>
-            <a:r>
-              <a:rPr sz="1800" b="1">
-                <a:solidFill>
-                  <a:srgbClr val="FFFFFF"/>
-                </a:solidFill>
-                <a:latin typeface="Pretendard"/>
-                <a:ea typeface="Pretendard"/>
-                <a:cs typeface="Pretendard"/>
-              </a:rPr>
-              <a:t>테이블</a:t>
-            </a:r>
-          </a:p>
-        </p:txBody>
-      </p:sp>
-      <p:sp>
-        <p:nvSpPr>
-          <p:cNvPr id="18" name="Rectangle 17"/>
-          <p:cNvSpPr/>
-          <p:nvPr/>
-        </p:nvSpPr>
-        <p:spPr>
-          <a:xfrm>
-            <a:off x="2276142" y="4076700"/>
-            <a:ext cx="14868858" cy="571500"/>
-          </a:xfrm>
-          <a:prstGeom prst="rect">
-            <a:avLst/>
+            <a:off x="2324100" y="4810125"/>
+            <a:ext cx="9906000" cy="361950"/>
+          </a:xfrm>
+          <a:prstGeom prst="rect">
+            <a:avLst/>
+          </a:prstGeom>
+          <a:noFill/>
+        </p:spPr>
+        <p:txBody>
+          <a:bodyPr wrap="square" lIns="0" rIns="0" tIns="0" bIns="0" anchor="t">
+            <a:spAutoFit/>
+          </a:bodyPr>
+          <a:lstStyle/>
+          <a:p>
+            <a:pPr algn="l">
+              <a:lnSpc>
+                <a:spcPct val="120000"/>
+              </a:lnSpc>
+            </a:pPr>
+            <a:r>
+              <a:rPr sz="2025" b="0">
+                <a:solidFill>
+                  <a:srgbClr val="3D3D3D"/>
+                </a:solidFill>
+                <a:latin typeface="Pretendard"/>
+                <a:ea typeface="Pretendard"/>
+                <a:cs typeface="Pretendard"/>
+              </a:rPr>
+              <a:t>NoSuchNamespaceException — 빈 warehouse 라 폴더가 없다</a:t>
+            </a:r>
+          </a:p>
+        </p:txBody>
+      </p:sp>
+      <p:sp>
+        <p:nvSpPr>
+          <p:cNvPr id="18" name="Rounded Rectangle 17"/>
+          <p:cNvSpPr/>
+          <p:nvPr/>
+        </p:nvSpPr>
+        <p:spPr>
+          <a:xfrm>
+            <a:off x="1143000" y="5467350"/>
+            <a:ext cx="11430000" cy="1095375"/>
+          </a:xfrm>
+          <a:prstGeom prst="roundRect">
+            <a:avLst>
+              <a:gd name="adj" fmla="val 4347"/>
+            </a:avLst>
           </a:prstGeom>
           <a:solidFill>
             <a:srgbClr val="FAFBFD"/>
@@ -8246,57 +8263,16 @@
       </p:sp>
       <p:sp>
         <p:nvSpPr>
-          <p:cNvPr id="19" name="TextBox 18"/>
-          <p:cNvSpPr txBox="1"/>
-          <p:nvPr/>
-        </p:nvSpPr>
-        <p:spPr>
-          <a:xfrm>
-            <a:off x="2428542" y="4076700"/>
-            <a:ext cx="14564058" cy="571500"/>
-          </a:xfrm>
-          <a:prstGeom prst="rect">
-            <a:avLst/>
-          </a:prstGeom>
-          <a:noFill/>
-        </p:spPr>
-        <p:txBody>
-          <a:bodyPr wrap="square" lIns="0" rIns="0" tIns="0" bIns="0" anchor="ctr">
-            <a:spAutoFit/>
-          </a:bodyPr>
-          <a:lstStyle/>
-          <a:p>
-            <a:pPr algn="l">
-              <a:lnSpc>
-                <a:spcPct val="115000"/>
-              </a:lnSpc>
-            </a:pPr>
-            <a:r>
-              <a:rPr sz="1800" b="0">
-                <a:solidFill>
-                  <a:srgbClr val="3D3D3D"/>
-                </a:solidFill>
-                <a:latin typeface="Pretendard"/>
-                <a:ea typeface="Pretendard"/>
-                <a:cs typeface="Pretendard"/>
-              </a:rPr>
-              <a:t>CREATE TABLE lake.db.orders (id, item, price) USING iceberg</a:t>
-            </a:r>
-          </a:p>
-        </p:txBody>
-      </p:sp>
-      <p:sp>
-        <p:nvSpPr>
-          <p:cNvPr id="20" name="Rectangle 19"/>
-          <p:cNvSpPr/>
-          <p:nvPr/>
-        </p:nvSpPr>
-        <p:spPr>
-          <a:xfrm>
-            <a:off x="1143000" y="4724400"/>
-            <a:ext cx="1133142" cy="571500"/>
-          </a:xfrm>
-          <a:prstGeom prst="rect">
+          <p:cNvPr id="19" name="Oval 18"/>
+          <p:cNvSpPr/>
+          <p:nvPr/>
+        </p:nvSpPr>
+        <p:spPr>
+          <a:xfrm>
+            <a:off x="1447800" y="5715000"/>
+            <a:ext cx="590550" cy="590550"/>
+          </a:xfrm>
+          <a:prstGeom prst="ellipse">
             <a:avLst/>
           </a:prstGeom>
           <a:solidFill>
@@ -8317,58 +8293,142 @@
       </p:sp>
       <p:sp>
         <p:nvSpPr>
+          <p:cNvPr id="20" name="TextBox 19"/>
+          <p:cNvSpPr txBox="1"/>
+          <p:nvPr/>
+        </p:nvSpPr>
+        <p:spPr>
+          <a:xfrm>
+            <a:off x="1447800" y="5867400"/>
+            <a:ext cx="590550" cy="323850"/>
+          </a:xfrm>
+          <a:prstGeom prst="rect">
+            <a:avLst/>
+          </a:prstGeom>
+          <a:noFill/>
+        </p:spPr>
+        <p:txBody>
+          <a:bodyPr wrap="square" lIns="0" rIns="0" tIns="0" bIns="0" anchor="t">
+            <a:spAutoFit/>
+          </a:bodyPr>
+          <a:lstStyle/>
+          <a:p>
+            <a:pPr algn="ctr">
+              <a:lnSpc>
+                <a:spcPct val="100000"/>
+              </a:lnSpc>
+            </a:pPr>
+            <a:r>
+              <a:rPr sz="2250" b="1">
+                <a:solidFill>
+                  <a:srgbClr val="FFFFFF"/>
+                </a:solidFill>
+                <a:latin typeface="Pretendard"/>
+                <a:ea typeface="Pretendard"/>
+                <a:cs typeface="Pretendard"/>
+              </a:rPr>
+              <a:t>3</a:t>
+            </a:r>
+          </a:p>
+        </p:txBody>
+      </p:sp>
+      <p:sp>
+        <p:nvSpPr>
           <p:cNvPr id="21" name="TextBox 20"/>
           <p:cNvSpPr txBox="1"/>
           <p:nvPr/>
         </p:nvSpPr>
         <p:spPr>
           <a:xfrm>
-            <a:off x="1143000" y="4724400"/>
-            <a:ext cx="1133142" cy="571500"/>
-          </a:xfrm>
-          <a:prstGeom prst="rect">
-            <a:avLst/>
-          </a:prstGeom>
-          <a:noFill/>
-        </p:spPr>
-        <p:txBody>
-          <a:bodyPr wrap="square" lIns="0" rIns="0" tIns="0" bIns="0" anchor="ctr">
-            <a:spAutoFit/>
-          </a:bodyPr>
-          <a:lstStyle/>
-          <a:p>
-            <a:pPr algn="ctr">
-              <a:lnSpc>
-                <a:spcPct val="100000"/>
-              </a:lnSpc>
-            </a:pPr>
-            <a:r>
-              <a:rPr sz="1800" b="1">
-                <a:solidFill>
-                  <a:srgbClr val="FFFFFF"/>
-                </a:solidFill>
-                <a:latin typeface="Pretendard"/>
-                <a:ea typeface="Pretendard"/>
-                <a:cs typeface="Pretendard"/>
-              </a:rPr>
-              <a:t>넣기</a:t>
-            </a:r>
-          </a:p>
-        </p:txBody>
-      </p:sp>
-      <p:sp>
-        <p:nvSpPr>
-          <p:cNvPr id="22" name="Rectangle 21"/>
-          <p:cNvSpPr/>
-          <p:nvPr/>
-        </p:nvSpPr>
-        <p:spPr>
-          <a:xfrm>
-            <a:off x="2276142" y="4724400"/>
-            <a:ext cx="14868858" cy="571500"/>
-          </a:xfrm>
-          <a:prstGeom prst="rect">
-            <a:avLst/>
+            <a:off x="2324100" y="5676900"/>
+            <a:ext cx="9906000" cy="400050"/>
+          </a:xfrm>
+          <a:prstGeom prst="rect">
+            <a:avLst/>
+          </a:prstGeom>
+          <a:noFill/>
+        </p:spPr>
+        <p:txBody>
+          <a:bodyPr wrap="square" lIns="0" rIns="0" tIns="0" bIns="0" anchor="t">
+            <a:spAutoFit/>
+          </a:bodyPr>
+          <a:lstStyle/>
+          <a:p>
+            <a:pPr algn="l">
+              <a:lnSpc>
+                <a:spcPct val="110000"/>
+              </a:lnSpc>
+            </a:pPr>
+            <a:r>
+              <a:rPr sz="2475" b="1">
+                <a:solidFill>
+                  <a:srgbClr val="0D2B5E"/>
+                </a:solidFill>
+                <a:latin typeface="Pretendard"/>
+                <a:ea typeface="Pretendard"/>
+                <a:cs typeface="Pretendard"/>
+              </a:rPr>
+              <a:t>CREATE NAMESPACE IF NOT EXISTS lake.db</a:t>
+            </a:r>
+          </a:p>
+        </p:txBody>
+      </p:sp>
+      <p:sp>
+        <p:nvSpPr>
+          <p:cNvPr id="22" name="TextBox 21"/>
+          <p:cNvSpPr txBox="1"/>
+          <p:nvPr/>
+        </p:nvSpPr>
+        <p:spPr>
+          <a:xfrm>
+            <a:off x="2324100" y="6076950"/>
+            <a:ext cx="9906000" cy="361950"/>
+          </a:xfrm>
+          <a:prstGeom prst="rect">
+            <a:avLst/>
+          </a:prstGeom>
+          <a:noFill/>
+        </p:spPr>
+        <p:txBody>
+          <a:bodyPr wrap="square" lIns="0" rIns="0" tIns="0" bIns="0" anchor="t">
+            <a:spAutoFit/>
+          </a:bodyPr>
+          <a:lstStyle/>
+          <a:p>
+            <a:pPr algn="l">
+              <a:lnSpc>
+                <a:spcPct val="120000"/>
+              </a:lnSpc>
+            </a:pPr>
+            <a:r>
+              <a:rPr sz="2025" b="0">
+                <a:solidFill>
+                  <a:srgbClr val="3D3D3D"/>
+                </a:solidFill>
+                <a:latin typeface="Pretendard"/>
+                <a:ea typeface="Pretendard"/>
+                <a:cs typeface="Pretendard"/>
+              </a:rPr>
+              <a:t>warehouse/lake 아래에 db 가 생긴다</a:t>
+            </a:r>
+          </a:p>
+        </p:txBody>
+      </p:sp>
+      <p:sp>
+        <p:nvSpPr>
+          <p:cNvPr id="23" name="Rounded Rectangle 22"/>
+          <p:cNvSpPr/>
+          <p:nvPr/>
+        </p:nvSpPr>
+        <p:spPr>
+          <a:xfrm>
+            <a:off x="1143000" y="6734175"/>
+            <a:ext cx="11430000" cy="1095375"/>
+          </a:xfrm>
+          <a:prstGeom prst="roundRect">
+            <a:avLst>
+              <a:gd name="adj" fmla="val 4347"/>
+            </a:avLst>
           </a:prstGeom>
           <a:solidFill>
             <a:srgbClr val="FAFBFD"/>
@@ -8390,57 +8450,16 @@
       </p:sp>
       <p:sp>
         <p:nvSpPr>
-          <p:cNvPr id="23" name="TextBox 22"/>
-          <p:cNvSpPr txBox="1"/>
-          <p:nvPr/>
-        </p:nvSpPr>
-        <p:spPr>
-          <a:xfrm>
-            <a:off x="2428542" y="4724400"/>
-            <a:ext cx="14564058" cy="571500"/>
-          </a:xfrm>
-          <a:prstGeom prst="rect">
-            <a:avLst/>
-          </a:prstGeom>
-          <a:noFill/>
-        </p:spPr>
-        <p:txBody>
-          <a:bodyPr wrap="square" lIns="0" rIns="0" tIns="0" bIns="0" anchor="ctr">
-            <a:spAutoFit/>
-          </a:bodyPr>
-          <a:lstStyle/>
-          <a:p>
-            <a:pPr algn="l">
-              <a:lnSpc>
-                <a:spcPct val="115000"/>
-              </a:lnSpc>
-            </a:pPr>
-            <a:r>
-              <a:rPr sz="1800" b="0">
-                <a:solidFill>
-                  <a:srgbClr val="3D3D3D"/>
-                </a:solidFill>
-                <a:latin typeface="Pretendard"/>
-                <a:ea typeface="Pretendard"/>
-                <a:cs typeface="Pretendard"/>
-              </a:rPr>
-              <a:t>INSERT INTO lake.db.orders VALUES (1, 'keyboard', 45000) …</a:t>
-            </a:r>
-          </a:p>
-        </p:txBody>
-      </p:sp>
-      <p:sp>
-        <p:nvSpPr>
-          <p:cNvPr id="24" name="Rectangle 23"/>
-          <p:cNvSpPr/>
-          <p:nvPr/>
-        </p:nvSpPr>
-        <p:spPr>
-          <a:xfrm>
-            <a:off x="1143000" y="5372100"/>
-            <a:ext cx="1133142" cy="571500"/>
-          </a:xfrm>
-          <a:prstGeom prst="rect">
+          <p:cNvPr id="24" name="Oval 23"/>
+          <p:cNvSpPr/>
+          <p:nvPr/>
+        </p:nvSpPr>
+        <p:spPr>
+          <a:xfrm>
+            <a:off x="1447800" y="6981825"/>
+            <a:ext cx="590550" cy="590550"/>
+          </a:xfrm>
+          <a:prstGeom prst="ellipse">
             <a:avLst/>
           </a:prstGeom>
           <a:solidFill>
@@ -8467,16 +8486,16 @@
         </p:nvSpPr>
         <p:spPr>
           <a:xfrm>
-            <a:off x="1143000" y="5372100"/>
-            <a:ext cx="1133142" cy="571500"/>
-          </a:xfrm>
-          <a:prstGeom prst="rect">
-            <a:avLst/>
-          </a:prstGeom>
-          <a:noFill/>
-        </p:spPr>
-        <p:txBody>
-          <a:bodyPr wrap="square" lIns="0" rIns="0" tIns="0" bIns="0" anchor="ctr">
+            <a:off x="1447800" y="7134225"/>
+            <a:ext cx="590550" cy="323850"/>
+          </a:xfrm>
+          <a:prstGeom prst="rect">
+            <a:avLst/>
+          </a:prstGeom>
+          <a:noFill/>
+        </p:spPr>
+        <p:txBody>
+          <a:bodyPr wrap="square" lIns="0" rIns="0" tIns="0" bIns="0" anchor="t">
             <a:spAutoFit/>
           </a:bodyPr>
           <a:lstStyle/>
@@ -8487,7 +8506,7 @@
               </a:lnSpc>
             </a:pPr>
             <a:r>
-              <a:rPr sz="1800" b="1">
+              <a:rPr sz="2250" b="1">
                 <a:solidFill>
                   <a:srgbClr val="FFFFFF"/>
                 </a:solidFill>
@@ -8495,31 +8514,115 @@
                 <a:ea typeface="Pretendard"/>
                 <a:cs typeface="Pretendard"/>
               </a:rPr>
-              <a:t>확인</a:t>
-            </a:r>
-          </a:p>
-        </p:txBody>
-      </p:sp>
-      <p:sp>
-        <p:nvSpPr>
-          <p:cNvPr id="26" name="Rectangle 25"/>
-          <p:cNvSpPr/>
-          <p:nvPr/>
-        </p:nvSpPr>
-        <p:spPr>
-          <a:xfrm>
-            <a:off x="2276142" y="5372100"/>
-            <a:ext cx="14868858" cy="571500"/>
-          </a:xfrm>
-          <a:prstGeom prst="rect">
-            <a:avLst/>
-          </a:prstGeom>
-          <a:solidFill>
-            <a:srgbClr val="FAFBFD"/>
+              <a:t>4</a:t>
+            </a:r>
+          </a:p>
+        </p:txBody>
+      </p:sp>
+      <p:sp>
+        <p:nvSpPr>
+          <p:cNvPr id="26" name="TextBox 25"/>
+          <p:cNvSpPr txBox="1"/>
+          <p:nvPr/>
+        </p:nvSpPr>
+        <p:spPr>
+          <a:xfrm>
+            <a:off x="2324100" y="6943725"/>
+            <a:ext cx="9906000" cy="400050"/>
+          </a:xfrm>
+          <a:prstGeom prst="rect">
+            <a:avLst/>
+          </a:prstGeom>
+          <a:noFill/>
+        </p:spPr>
+        <p:txBody>
+          <a:bodyPr wrap="square" lIns="0" rIns="0" tIns="0" bIns="0" anchor="t">
+            <a:spAutoFit/>
+          </a:bodyPr>
+          <a:lstStyle/>
+          <a:p>
+            <a:pPr algn="l">
+              <a:lnSpc>
+                <a:spcPct val="110000"/>
+              </a:lnSpc>
+            </a:pPr>
+            <a:r>
+              <a:rPr sz="2475" b="1">
+                <a:solidFill>
+                  <a:srgbClr val="0D2B5E"/>
+                </a:solidFill>
+                <a:latin typeface="Pretendard"/>
+                <a:ea typeface="Pretendard"/>
+                <a:cs typeface="Pretendard"/>
+              </a:rPr>
+              <a:t>SHOW CATALOGS · SHOW NAMESPACES IN lake</a:t>
+            </a:r>
+          </a:p>
+        </p:txBody>
+      </p:sp>
+      <p:sp>
+        <p:nvSpPr>
+          <p:cNvPr id="27" name="TextBox 26"/>
+          <p:cNvSpPr txBox="1"/>
+          <p:nvPr/>
+        </p:nvSpPr>
+        <p:spPr>
+          <a:xfrm>
+            <a:off x="2324100" y="7343775"/>
+            <a:ext cx="9906000" cy="361950"/>
+          </a:xfrm>
+          <a:prstGeom prst="rect">
+            <a:avLst/>
+          </a:prstGeom>
+          <a:noFill/>
+        </p:spPr>
+        <p:txBody>
+          <a:bodyPr wrap="square" lIns="0" rIns="0" tIns="0" bIns="0" anchor="t">
+            <a:spAutoFit/>
+          </a:bodyPr>
+          <a:lstStyle/>
+          <a:p>
+            <a:pPr algn="l">
+              <a:lnSpc>
+                <a:spcPct val="120000"/>
+              </a:lnSpc>
+            </a:pPr>
+            <a:r>
+              <a:rPr sz="2025" b="0">
+                <a:solidFill>
+                  <a:srgbClr val="3D3D3D"/>
+                </a:solidFill>
+                <a:latin typeface="Pretendard"/>
+                <a:ea typeface="Pretendard"/>
+                <a:cs typeface="Pretendard"/>
+              </a:rPr>
+              <a:t>lake · spark_catalog 두 줄, 네임스페이스는 db 한 줄</a:t>
+            </a:r>
+          </a:p>
+        </p:txBody>
+      </p:sp>
+      <p:sp>
+        <p:nvSpPr>
+          <p:cNvPr id="28" name="Rounded Rectangle 27"/>
+          <p:cNvSpPr/>
+          <p:nvPr/>
+        </p:nvSpPr>
+        <p:spPr>
+          <a:xfrm>
+            <a:off x="13144500" y="2933700"/>
+            <a:ext cx="4000500" cy="4895850"/>
+          </a:xfrm>
+          <a:prstGeom prst="roundRect">
+            <a:avLst>
+              <a:gd name="adj" fmla="val 1190"/>
+            </a:avLst>
+          </a:prstGeom>
+          <a:solidFill>
+            <a:srgbClr val="EDF3FD"/>
           </a:solidFill>
           <a:ln w="9525">
             <a:solidFill>
-              <a:srgbClr val="DCE1E8"/>
+              <a:srgbClr val="BFD3F5"/>
             </a:solidFill>
           </a:ln>
           <a:effectLst/>
@@ -8534,55 +8637,55 @@
       </p:sp>
       <p:sp>
         <p:nvSpPr>
-          <p:cNvPr id="27" name="TextBox 26"/>
-          <p:cNvSpPr txBox="1"/>
-          <p:nvPr/>
-        </p:nvSpPr>
-        <p:spPr>
-          <a:xfrm>
-            <a:off x="2428542" y="5372100"/>
-            <a:ext cx="14564058" cy="571500"/>
-          </a:xfrm>
-          <a:prstGeom prst="rect">
-            <a:avLst/>
-          </a:prstGeom>
-          <a:noFill/>
-        </p:spPr>
-        <p:txBody>
-          <a:bodyPr wrap="square" lIns="0" rIns="0" tIns="0" bIns="0" anchor="ctr">
+          <p:cNvPr id="29" name="TextBox 28"/>
+          <p:cNvSpPr txBox="1"/>
+          <p:nvPr/>
+        </p:nvSpPr>
+        <p:spPr>
+          <a:xfrm>
+            <a:off x="13487400" y="4562475"/>
+            <a:ext cx="3314700" cy="304800"/>
+          </a:xfrm>
+          <a:prstGeom prst="rect">
+            <a:avLst/>
+          </a:prstGeom>
+          <a:noFill/>
+        </p:spPr>
+        <p:txBody>
+          <a:bodyPr wrap="square" lIns="0" rIns="0" tIns="0" bIns="0" anchor="t">
             <a:spAutoFit/>
           </a:bodyPr>
           <a:lstStyle/>
           <a:p>
             <a:pPr algn="l">
               <a:lnSpc>
-                <a:spcPct val="115000"/>
-              </a:lnSpc>
-            </a:pPr>
-            <a:r>
-              <a:rPr sz="1800" b="0">
-                <a:solidFill>
-                  <a:srgbClr val="3D3D3D"/>
-                </a:solidFill>
-                <a:latin typeface="Pretendard"/>
-                <a:ea typeface="Pretendard"/>
-                <a:cs typeface="Pretendard"/>
-              </a:rPr>
-              <a:t>SELECT * FROM lake.db.orders ORDER BY id — 3행</a:t>
-            </a:r>
-          </a:p>
-        </p:txBody>
-      </p:sp>
-      <p:sp>
-        <p:nvSpPr>
-          <p:cNvPr id="28" name="TextBox 27"/>
-          <p:cNvSpPr txBox="1"/>
-          <p:nvPr/>
-        </p:nvSpPr>
-        <p:spPr>
-          <a:xfrm>
-            <a:off x="1143000" y="7620000"/>
-            <a:ext cx="16002000" cy="342900"/>
+                <a:spcPct val="100000"/>
+              </a:lnSpc>
+            </a:pPr>
+            <a:r>
+              <a:rPr sz="1800" b="1" spc="190">
+                <a:solidFill>
+                  <a:srgbClr val="1E5BC6"/>
+                </a:solidFill>
+                <a:latin typeface="Pretendard"/>
+                <a:ea typeface="Pretendard"/>
+                <a:cs typeface="Pretendard"/>
+              </a:rPr>
+              <a:t>모두</a:t>
+            </a:r>
+          </a:p>
+        </p:txBody>
+      </p:sp>
+      <p:sp>
+        <p:nvSpPr>
+          <p:cNvPr id="30" name="TextBox 29"/>
+          <p:cNvSpPr txBox="1"/>
+          <p:nvPr/>
+        </p:nvSpPr>
+        <p:spPr>
+          <a:xfrm>
+            <a:off x="13487400" y="4962525"/>
+            <a:ext cx="3314700" cy="1238250"/>
           </a:xfrm>
           <a:prstGeom prst="rect">
             <a:avLst/>
@@ -8597,26 +8700,44 @@
           <a:p>
             <a:pPr algn="l">
               <a:lnSpc>
-                <a:spcPct val="100000"/>
-              </a:lnSpc>
-            </a:pPr>
-            <a:r>
-              <a:rPr sz="1875" b="1">
-                <a:solidFill>
-                  <a:srgbClr val="7D7D7D"/>
-                </a:solidFill>
-                <a:latin typeface="Pretendard"/>
-                <a:ea typeface="Pretendard"/>
-                <a:cs typeface="Pretendard"/>
-              </a:rPr>
-              <a:t>lake 가 안 보이면 --conf 의 spark.sql.catalog.lake 세 줄부터 다시 확인</a:t>
-            </a:r>
-          </a:p>
-        </p:txBody>
-      </p:sp>
-      <p:sp>
-        <p:nvSpPr>
-          <p:cNvPr id="29" name="Rectangle 28"/>
+                <a:spcPct val="138000"/>
+              </a:lnSpc>
+            </a:pPr>
+            <a:r>
+              <a:rPr sz="2700" b="1">
+                <a:solidFill>
+                  <a:srgbClr val="0D2B5E"/>
+                </a:solidFill>
+                <a:latin typeface="Pretendard"/>
+                <a:ea typeface="Pretendard"/>
+                <a:cs typeface="Pretendard"/>
+              </a:rPr>
+              <a:t>spark.sql("…")</a:t>
+            </a:r>
+          </a:p>
+          <a:p>
+            <a:pPr algn="l">
+              <a:lnSpc>
+                <a:spcPct val="138000"/>
+              </a:lnSpc>
+            </a:pPr>
+            <a:r>
+              <a:rPr sz="2700" b="1">
+                <a:solidFill>
+                  <a:srgbClr val="0D2B5E"/>
+                </a:solidFill>
+                <a:latin typeface="Pretendard"/>
+                <a:ea typeface="Pretendard"/>
+                <a:cs typeface="Pretendard"/>
+              </a:rPr>
+              <a:t>.show()</a:t>
+            </a:r>
+          </a:p>
+        </p:txBody>
+      </p:sp>
+      <p:sp>
+        <p:nvSpPr>
+          <p:cNvPr id="31" name="Rectangle 30"/>
           <p:cNvSpPr/>
           <p:nvPr/>
         </p:nvSpPr>
@@ -8646,7 +8767,7 @@
       </p:sp>
       <p:sp>
         <p:nvSpPr>
-          <p:cNvPr id="30" name="TextBox 29"/>
+          <p:cNvPr id="32" name="TextBox 31"/>
           <p:cNvSpPr txBox="1"/>
           <p:nvPr/>
         </p:nvSpPr>
@@ -8687,7 +8808,7 @@
       </p:sp>
       <p:sp>
         <p:nvSpPr>
-          <p:cNvPr id="31" name="TextBox 30"/>
+          <p:cNvPr id="33" name="TextBox 32"/>
           <p:cNvSpPr txBox="1"/>
           <p:nvPr/>
         </p:nvSpPr>
@@ -8746,7 +8867,7 @@
       <p:grpSpPr/>
       <p:sp>
         <p:nvSpPr>
-          <p:cNvPr id="2" name="Oval 1"/>
+          <p:cNvPr id="2" name="deckgen:decor"/>
           <p:cNvSpPr/>
           <p:nvPr/>
         </p:nvSpPr>
@@ -8776,7 +8897,7 @@
       </p:sp>
       <p:sp>
         <p:nvSpPr>
-          <p:cNvPr id="3" name="Oval 2"/>
+          <p:cNvPr id="3" name="deckgen:decor"/>
           <p:cNvSpPr/>
           <p:nvPr/>
         </p:nvSpPr>
@@ -8806,7 +8927,7 @@
       </p:sp>
       <p:sp>
         <p:nvSpPr>
-          <p:cNvPr id="4" name="Oval 3"/>
+          <p:cNvPr id="4" name="deckgen:decor"/>
           <p:cNvSpPr/>
           <p:nvPr/>
         </p:nvSpPr>
@@ -8911,7 +9032,7 @@
                 <a:ea typeface="Pretendard"/>
                 <a:cs typeface="Pretendard"/>
               </a:rPr>
-              <a:t>테이블의 실체 — MinIO 의 두 폴더</a:t>
+              <a:t>만들고, 넣고, 뜯어본다</a:t>
             </a:r>
           </a:p>
         </p:txBody>
@@ -8955,7 +9076,7 @@
         <p:spPr>
           <a:xfrm>
             <a:off x="1143000" y="2781300"/>
-            <a:ext cx="3814762" cy="704850"/>
+            <a:ext cx="7962900" cy="590550"/>
           </a:xfrm>
           <a:prstGeom prst="rect">
             <a:avLst/>
@@ -8985,7 +9106,7 @@
         <p:spPr>
           <a:xfrm>
             <a:off x="1143000" y="2781300"/>
-            <a:ext cx="3814762" cy="704850"/>
+            <a:ext cx="7962900" cy="590550"/>
           </a:xfrm>
           <a:prstGeom prst="rect">
             <a:avLst/>
@@ -9004,7 +9125,7 @@
               </a:lnSpc>
             </a:pPr>
             <a:r>
-              <a:rPr sz="2400" b="1">
+              <a:rPr sz="2025" b="1">
                 <a:solidFill>
                   <a:srgbClr val="FFFFFF"/>
                 </a:solidFill>
@@ -9012,25 +9133,171 @@
                 <a:ea typeface="Pretendard"/>
                 <a:cs typeface="Pretendard"/>
               </a:rPr>
-              <a:t>lake.db.orders</a:t>
-            </a:r>
-          </a:p>
-        </p:txBody>
-      </p:sp>
-      <p:sp>
-        <p:nvSpPr>
-          <p:cNvPr id="10" name="Rounded Rectangle 9"/>
-          <p:cNvSpPr/>
-          <p:nvPr/>
-        </p:nvSpPr>
-        <p:spPr>
-          <a:xfrm>
-            <a:off x="1143000" y="3657600"/>
-            <a:ext cx="3814762" cy="1428750"/>
+              <a:t>spark.sql("…")</a:t>
+            </a:r>
+          </a:p>
+        </p:txBody>
+      </p:sp>
+      <p:sp>
+        <p:nvSpPr>
+          <p:cNvPr id="10" name="Rectangle 9"/>
+          <p:cNvSpPr/>
+          <p:nvPr/>
+        </p:nvSpPr>
+        <p:spPr>
+          <a:xfrm>
+            <a:off x="9144000" y="2781300"/>
+            <a:ext cx="8001000" cy="590550"/>
+          </a:xfrm>
+          <a:prstGeom prst="rect">
+            <a:avLst/>
+          </a:prstGeom>
+          <a:solidFill>
+            <a:srgbClr val="1E5BC6"/>
+          </a:solidFill>
+          <a:ln>
+            <a:noFill/>
+          </a:ln>
+          <a:effectLst/>
+        </p:spPr>
+        <p:txBody>
+          <a:bodyPr rtlCol="0" anchor="ctr" wrap="square"/>
+          <a:lstStyle/>
+          <a:p>
+            <a:pPr algn="ctr"/>
+          </a:p>
+        </p:txBody>
+      </p:sp>
+      <p:sp>
+        <p:nvSpPr>
+          <p:cNvPr id="11" name="TextBox 10"/>
+          <p:cNvSpPr txBox="1"/>
+          <p:nvPr/>
+        </p:nvSpPr>
+        <p:spPr>
+          <a:xfrm>
+            <a:off x="9144000" y="2781300"/>
+            <a:ext cx="8001000" cy="590550"/>
+          </a:xfrm>
+          <a:prstGeom prst="rect">
+            <a:avLst/>
+          </a:prstGeom>
+          <a:noFill/>
+        </p:spPr>
+        <p:txBody>
+          <a:bodyPr wrap="square" lIns="0" rIns="0" tIns="0" bIns="0" anchor="ctr">
+            <a:spAutoFit/>
+          </a:bodyPr>
+          <a:lstStyle/>
+          <a:p>
+            <a:pPr algn="ctr">
+              <a:lnSpc>
+                <a:spcPct val="100000"/>
+              </a:lnSpc>
+            </a:pPr>
+            <a:r>
+              <a:rPr sz="2025" b="1">
+                <a:solidFill>
+                  <a:srgbClr val="FFFFFF"/>
+                </a:solidFill>
+                <a:latin typeface="Pretendard"/>
+                <a:ea typeface="Pretendard"/>
+                <a:cs typeface="Pretendard"/>
+              </a:rPr>
+              <a:t>결과(실측)</a:t>
+            </a:r>
+          </a:p>
+        </p:txBody>
+      </p:sp>
+      <p:sp>
+        <p:nvSpPr>
+          <p:cNvPr id="12" name="Rounded Rectangle 11"/>
+          <p:cNvSpPr/>
+          <p:nvPr/>
+        </p:nvSpPr>
+        <p:spPr>
+          <a:xfrm>
+            <a:off x="1143000" y="3448050"/>
+            <a:ext cx="7962900" cy="519793"/>
           </a:xfrm>
           <a:prstGeom prst="roundRect">
             <a:avLst>
-              <a:gd name="adj" fmla="val 3333"/>
+              <a:gd name="adj" fmla="val 7329"/>
+            </a:avLst>
+          </a:prstGeom>
+          <a:solidFill>
+            <a:srgbClr val="EDF3FD"/>
+          </a:solidFill>
+          <a:ln w="9525">
+            <a:solidFill>
+              <a:srgbClr val="BFD3F5"/>
+            </a:solidFill>
+          </a:ln>
+          <a:effectLst/>
+        </p:spPr>
+        <p:txBody>
+          <a:bodyPr rtlCol="0" anchor="ctr" wrap="square"/>
+          <a:lstStyle/>
+          <a:p>
+            <a:pPr algn="ctr"/>
+          </a:p>
+        </p:txBody>
+      </p:sp>
+      <p:sp>
+        <p:nvSpPr>
+          <p:cNvPr id="13" name="TextBox 12"/>
+          <p:cNvSpPr txBox="1"/>
+          <p:nvPr/>
+        </p:nvSpPr>
+        <p:spPr>
+          <a:xfrm>
+            <a:off x="1238250" y="3448050"/>
+            <a:ext cx="7772400" cy="519793"/>
+          </a:xfrm>
+          <a:prstGeom prst="rect">
+            <a:avLst/>
+          </a:prstGeom>
+          <a:noFill/>
+        </p:spPr>
+        <p:txBody>
+          <a:bodyPr wrap="square" lIns="0" rIns="0" tIns="0" bIns="0" anchor="ctr">
+            <a:spAutoFit/>
+          </a:bodyPr>
+          <a:lstStyle/>
+          <a:p>
+            <a:pPr algn="l">
+              <a:lnSpc>
+                <a:spcPct val="115000"/>
+              </a:lnSpc>
+            </a:pPr>
+            <a:r>
+              <a:rPr sz="1875" b="1">
+                <a:solidFill>
+                  <a:srgbClr val="0D2B5E"/>
+                </a:solidFill>
+                <a:latin typeface="Pretendard"/>
+                <a:ea typeface="Pretendard"/>
+                <a:cs typeface="Pretendard"/>
+              </a:rPr>
+              <a:t>CREATE TABLE lake.db.orders</a:t>
+            </a:r>
+          </a:p>
+        </p:txBody>
+      </p:sp>
+      <p:sp>
+        <p:nvSpPr>
+          <p:cNvPr id="14" name="Rounded Rectangle 13"/>
+          <p:cNvSpPr/>
+          <p:nvPr/>
+        </p:nvSpPr>
+        <p:spPr>
+          <a:xfrm>
+            <a:off x="9144000" y="3448050"/>
+            <a:ext cx="8001000" cy="519793"/>
+          </a:xfrm>
+          <a:prstGeom prst="roundRect">
+            <a:avLst>
+              <a:gd name="adj" fmla="val 7329"/>
             </a:avLst>
           </a:prstGeom>
           <a:solidFill>
@@ -9053,14 +9320,14 @@
       </p:sp>
       <p:sp>
         <p:nvSpPr>
-          <p:cNvPr id="11" name="TextBox 10"/>
-          <p:cNvSpPr txBox="1"/>
-          <p:nvPr/>
-        </p:nvSpPr>
-        <p:spPr>
-          <a:xfrm>
-            <a:off x="1276350" y="3657600"/>
-            <a:ext cx="3548062" cy="1428750"/>
+          <p:cNvPr id="15" name="TextBox 14"/>
+          <p:cNvSpPr txBox="1"/>
+          <p:nvPr/>
+        </p:nvSpPr>
+        <p:spPr>
+          <a:xfrm>
+            <a:off x="9239250" y="3448050"/>
+            <a:ext cx="7810500" cy="519793"/>
           </a:xfrm>
           <a:prstGeom prst="rect">
             <a:avLst/>
@@ -9075,11 +9342,11 @@
           <a:p>
             <a:pPr algn="ctr">
               <a:lnSpc>
-                <a:spcPct val="135000"/>
-              </a:lnSpc>
-            </a:pPr>
-            <a:r>
-              <a:rPr sz="1800" b="0">
+                <a:spcPct val="115000"/>
+              </a:lnSpc>
+            </a:pPr>
+            <a:r>
+              <a:rPr sz="1875" b="0">
                 <a:solidFill>
                   <a:srgbClr val="3D3D3D"/>
                 </a:solidFill>
@@ -9087,144 +9354,100 @@
                 <a:ea typeface="Pretendard"/>
                 <a:cs typeface="Pretendard"/>
               </a:rPr>
-              <a:t>SQL 에서</a:t>
-            </a:r>
-          </a:p>
-          <a:p>
-            <a:pPr algn="ctr">
-              <a:lnSpc>
-                <a:spcPct val="135000"/>
-              </a:lnSpc>
-            </a:pPr>
-            <a:r>
-              <a:rPr sz="1800" b="0">
-                <a:solidFill>
-                  <a:srgbClr val="3D3D3D"/>
-                </a:solidFill>
-                <a:latin typeface="Pretendard"/>
-                <a:ea typeface="Pretendard"/>
-                <a:cs typeface="Pretendard"/>
-              </a:rPr>
-              <a:t>부르는 이름</a:t>
-            </a:r>
-          </a:p>
-        </p:txBody>
-      </p:sp>
-      <p:sp>
-        <p:nvSpPr>
-          <p:cNvPr id="12" name="Right Arrow 11"/>
-          <p:cNvSpPr/>
-          <p:nvPr/>
-        </p:nvSpPr>
-        <p:spPr>
-          <a:xfrm>
-            <a:off x="4976812" y="3028950"/>
-            <a:ext cx="209550" cy="209550"/>
-          </a:xfrm>
-          <a:prstGeom prst="rightArrow">
-            <a:avLst/>
-          </a:prstGeom>
-          <a:solidFill>
-            <a:srgbClr val="1E5BC6"/>
-          </a:solidFill>
-          <a:ln>
-            <a:noFill/>
-          </a:ln>
-          <a:effectLst/>
-        </p:spPr>
-        <p:txBody>
-          <a:bodyPr rtlCol="0" anchor="ctr" wrap="square"/>
-          <a:lstStyle/>
-          <a:p>
-            <a:pPr algn="ctr"/>
-          </a:p>
-        </p:txBody>
-      </p:sp>
-      <p:sp>
-        <p:nvSpPr>
-          <p:cNvPr id="13" name="Rectangle 12"/>
-          <p:cNvSpPr/>
-          <p:nvPr/>
-        </p:nvSpPr>
-        <p:spPr>
-          <a:xfrm>
-            <a:off x="5205412" y="2781300"/>
-            <a:ext cx="3814762" cy="704850"/>
-          </a:xfrm>
-          <a:prstGeom prst="rect">
-            <a:avLst/>
-          </a:prstGeom>
-          <a:solidFill>
-            <a:srgbClr val="1E5BC6"/>
-          </a:solidFill>
-          <a:ln>
-            <a:noFill/>
-          </a:ln>
-          <a:effectLst/>
-        </p:spPr>
-        <p:txBody>
-          <a:bodyPr rtlCol="0" anchor="ctr" wrap="square"/>
-          <a:lstStyle/>
-          <a:p>
-            <a:pPr algn="ctr"/>
-          </a:p>
-        </p:txBody>
-      </p:sp>
-      <p:sp>
-        <p:nvSpPr>
-          <p:cNvPr id="14" name="TextBox 13"/>
-          <p:cNvSpPr txBox="1"/>
-          <p:nvPr/>
-        </p:nvSpPr>
-        <p:spPr>
-          <a:xfrm>
-            <a:off x="5205412" y="2781300"/>
-            <a:ext cx="3814762" cy="704850"/>
-          </a:xfrm>
-          <a:prstGeom prst="rect">
-            <a:avLst/>
-          </a:prstGeom>
-          <a:noFill/>
-        </p:spPr>
-        <p:txBody>
-          <a:bodyPr wrap="square" lIns="0" rIns="0" tIns="0" bIns="0" anchor="ctr">
-            <a:spAutoFit/>
-          </a:bodyPr>
-          <a:lstStyle/>
-          <a:p>
-            <a:pPr algn="ctr">
-              <a:lnSpc>
-                <a:spcPct val="100000"/>
-              </a:lnSpc>
-            </a:pPr>
-            <a:r>
-              <a:rPr sz="2400" b="1">
-                <a:solidFill>
-                  <a:srgbClr val="FFFFFF"/>
-                </a:solidFill>
-                <a:latin typeface="Pretendard"/>
-                <a:ea typeface="Pretendard"/>
-                <a:cs typeface="Pretendard"/>
-              </a:rPr>
-              <a:t>warehouse/db/orders/</a:t>
-            </a:r>
-          </a:p>
-        </p:txBody>
-      </p:sp>
-      <p:sp>
-        <p:nvSpPr>
-          <p:cNvPr id="15" name="Rounded Rectangle 14"/>
-          <p:cNvSpPr/>
-          <p:nvPr/>
-        </p:nvSpPr>
-        <p:spPr>
-          <a:xfrm>
-            <a:off x="5205412" y="3657600"/>
-            <a:ext cx="3814762" cy="1428750"/>
+              <a:t>DataFrame[] 한 줄</a:t>
+            </a:r>
+          </a:p>
+        </p:txBody>
+      </p:sp>
+      <p:sp>
+        <p:nvSpPr>
+          <p:cNvPr id="16" name="Rounded Rectangle 15"/>
+          <p:cNvSpPr/>
+          <p:nvPr/>
+        </p:nvSpPr>
+        <p:spPr>
+          <a:xfrm>
+            <a:off x="1143000" y="4044043"/>
+            <a:ext cx="7962900" cy="519793"/>
           </a:xfrm>
           <a:prstGeom prst="roundRect">
             <a:avLst>
-              <a:gd name="adj" fmla="val 3333"/>
+              <a:gd name="adj" fmla="val 7329"/>
+            </a:avLst>
+          </a:prstGeom>
+          <a:solidFill>
+            <a:srgbClr val="EDF3FD"/>
+          </a:solidFill>
+          <a:ln w="9525">
+            <a:solidFill>
+              <a:srgbClr val="BFD3F5"/>
+            </a:solidFill>
+          </a:ln>
+          <a:effectLst/>
+        </p:spPr>
+        <p:txBody>
+          <a:bodyPr rtlCol="0" anchor="ctr" wrap="square"/>
+          <a:lstStyle/>
+          <a:p>
+            <a:pPr algn="ctr"/>
+          </a:p>
+        </p:txBody>
+      </p:sp>
+      <p:sp>
+        <p:nvSpPr>
+          <p:cNvPr id="17" name="TextBox 16"/>
+          <p:cNvSpPr txBox="1"/>
+          <p:nvPr/>
+        </p:nvSpPr>
+        <p:spPr>
+          <a:xfrm>
+            <a:off x="1238250" y="4044043"/>
+            <a:ext cx="7772400" cy="519793"/>
+          </a:xfrm>
+          <a:prstGeom prst="rect">
+            <a:avLst/>
+          </a:prstGeom>
+          <a:noFill/>
+        </p:spPr>
+        <p:txBody>
+          <a:bodyPr wrap="square" lIns="0" rIns="0" tIns="0" bIns="0" anchor="ctr">
+            <a:spAutoFit/>
+          </a:bodyPr>
+          <a:lstStyle/>
+          <a:p>
+            <a:pPr algn="l">
+              <a:lnSpc>
+                <a:spcPct val="115000"/>
+              </a:lnSpc>
+            </a:pPr>
+            <a:r>
+              <a:rPr sz="1875" b="1">
+                <a:solidFill>
+                  <a:srgbClr val="0D2B5E"/>
+                </a:solidFill>
+                <a:latin typeface="Pretendard"/>
+                <a:ea typeface="Pretendard"/>
+                <a:cs typeface="Pretendard"/>
+              </a:rPr>
+              <a:t>INSERT 3행</a:t>
+            </a:r>
+          </a:p>
+        </p:txBody>
+      </p:sp>
+      <p:sp>
+        <p:nvSpPr>
+          <p:cNvPr id="18" name="Rounded Rectangle 17"/>
+          <p:cNvSpPr/>
+          <p:nvPr/>
+        </p:nvSpPr>
+        <p:spPr>
+          <a:xfrm>
+            <a:off x="9144000" y="4044043"/>
+            <a:ext cx="8001000" cy="519793"/>
+          </a:xfrm>
+          <a:prstGeom prst="roundRect">
+            <a:avLst>
+              <a:gd name="adj" fmla="val 7329"/>
             </a:avLst>
           </a:prstGeom>
           <a:solidFill>
@@ -9247,14 +9470,14 @@
       </p:sp>
       <p:sp>
         <p:nvSpPr>
-          <p:cNvPr id="16" name="TextBox 15"/>
-          <p:cNvSpPr txBox="1"/>
-          <p:nvPr/>
-        </p:nvSpPr>
-        <p:spPr>
-          <a:xfrm>
-            <a:off x="5338762" y="3657600"/>
-            <a:ext cx="3548062" cy="1428750"/>
+          <p:cNvPr id="19" name="TextBox 18"/>
+          <p:cNvSpPr txBox="1"/>
+          <p:nvPr/>
+        </p:nvSpPr>
+        <p:spPr>
+          <a:xfrm>
+            <a:off x="9239250" y="4044043"/>
+            <a:ext cx="7810500" cy="519793"/>
           </a:xfrm>
           <a:prstGeom prst="rect">
             <a:avLst/>
@@ -9269,11 +9492,11 @@
           <a:p>
             <a:pPr algn="ctr">
               <a:lnSpc>
-                <a:spcPct val="135000"/>
-              </a:lnSpc>
-            </a:pPr>
-            <a:r>
-              <a:rPr sz="1800" b="0">
+                <a:spcPct val="115000"/>
+              </a:lnSpc>
+            </a:pPr>
+            <a:r>
+              <a:rPr sz="1875" b="0">
                 <a:solidFill>
                   <a:srgbClr val="3D3D3D"/>
                 </a:solidFill>
@@ -9281,126 +9504,7 @@
                 <a:ea typeface="Pretendard"/>
                 <a:cs typeface="Pretendard"/>
               </a:rPr>
-              <a:t>경로 자체가</a:t>
-            </a:r>
-          </a:p>
-          <a:p>
-            <a:pPr algn="ctr">
-              <a:lnSpc>
-                <a:spcPct val="135000"/>
-              </a:lnSpc>
-            </a:pPr>
-            <a:r>
-              <a:rPr sz="1800" b="0">
-                <a:solidFill>
-                  <a:srgbClr val="3D3D3D"/>
-                </a:solidFill>
-                <a:latin typeface="Pretendard"/>
-                <a:ea typeface="Pretendard"/>
-                <a:cs typeface="Pretendard"/>
-              </a:rPr>
-              <a:t>카탈로그</a:t>
-            </a:r>
-          </a:p>
-        </p:txBody>
-      </p:sp>
-      <p:sp>
-        <p:nvSpPr>
-          <p:cNvPr id="17" name="Right Arrow 16"/>
-          <p:cNvSpPr/>
-          <p:nvPr/>
-        </p:nvSpPr>
-        <p:spPr>
-          <a:xfrm>
-            <a:off x="9039225" y="3028950"/>
-            <a:ext cx="209550" cy="209550"/>
-          </a:xfrm>
-          <a:prstGeom prst="rightArrow">
-            <a:avLst/>
-          </a:prstGeom>
-          <a:solidFill>
-            <a:srgbClr val="1E5BC6"/>
-          </a:solidFill>
-          <a:ln>
-            <a:noFill/>
-          </a:ln>
-          <a:effectLst/>
-        </p:spPr>
-        <p:txBody>
-          <a:bodyPr rtlCol="0" anchor="ctr" wrap="square"/>
-          <a:lstStyle/>
-          <a:p>
-            <a:pPr algn="ctr"/>
-          </a:p>
-        </p:txBody>
-      </p:sp>
-      <p:sp>
-        <p:nvSpPr>
-          <p:cNvPr id="18" name="Rectangle 17"/>
-          <p:cNvSpPr/>
-          <p:nvPr/>
-        </p:nvSpPr>
-        <p:spPr>
-          <a:xfrm>
-            <a:off x="9267825" y="2781300"/>
-            <a:ext cx="3814762" cy="704850"/>
-          </a:xfrm>
-          <a:prstGeom prst="rect">
-            <a:avLst/>
-          </a:prstGeom>
-          <a:solidFill>
-            <a:srgbClr val="0D2B5E"/>
-          </a:solidFill>
-          <a:ln>
-            <a:noFill/>
-          </a:ln>
-          <a:effectLst/>
-        </p:spPr>
-        <p:txBody>
-          <a:bodyPr rtlCol="0" anchor="ctr" wrap="square"/>
-          <a:lstStyle/>
-          <a:p>
-            <a:pPr algn="ctr"/>
-          </a:p>
-        </p:txBody>
-      </p:sp>
-      <p:sp>
-        <p:nvSpPr>
-          <p:cNvPr id="19" name="TextBox 18"/>
-          <p:cNvSpPr txBox="1"/>
-          <p:nvPr/>
-        </p:nvSpPr>
-        <p:spPr>
-          <a:xfrm>
-            <a:off x="9267825" y="2781300"/>
-            <a:ext cx="3814762" cy="704850"/>
-          </a:xfrm>
-          <a:prstGeom prst="rect">
-            <a:avLst/>
-          </a:prstGeom>
-          <a:noFill/>
-        </p:spPr>
-        <p:txBody>
-          <a:bodyPr wrap="square" lIns="0" rIns="0" tIns="0" bIns="0" anchor="ctr">
-            <a:spAutoFit/>
-          </a:bodyPr>
-          <a:lstStyle/>
-          <a:p>
-            <a:pPr algn="ctr">
-              <a:lnSpc>
-                <a:spcPct val="100000"/>
-              </a:lnSpc>
-            </a:pPr>
-            <a:r>
-              <a:rPr sz="2400" b="1">
-                <a:solidFill>
-                  <a:srgbClr val="FFFFFF"/>
-                </a:solidFill>
-                <a:latin typeface="Pretendard"/>
-                <a:ea typeface="Pretendard"/>
-                <a:cs typeface="Pretendard"/>
-              </a:rPr>
-              <a:t>metadata/</a:t>
+              <a:t>DataFrame[] 한 줄</a:t>
             </a:r>
           </a:p>
         </p:txBody>
@@ -9413,12 +9517,87 @@
         </p:nvSpPr>
         <p:spPr>
           <a:xfrm>
-            <a:off x="9267825" y="3657600"/>
-            <a:ext cx="3814762" cy="1428750"/>
+            <a:off x="1143000" y="4640036"/>
+            <a:ext cx="7962900" cy="519793"/>
           </a:xfrm>
           <a:prstGeom prst="roundRect">
             <a:avLst>
-              <a:gd name="adj" fmla="val 3333"/>
+              <a:gd name="adj" fmla="val 7329"/>
+            </a:avLst>
+          </a:prstGeom>
+          <a:solidFill>
+            <a:srgbClr val="EDF3FD"/>
+          </a:solidFill>
+          <a:ln w="9525">
+            <a:solidFill>
+              <a:srgbClr val="BFD3F5"/>
+            </a:solidFill>
+          </a:ln>
+          <a:effectLst/>
+        </p:spPr>
+        <p:txBody>
+          <a:bodyPr rtlCol="0" anchor="ctr" wrap="square"/>
+          <a:lstStyle/>
+          <a:p>
+            <a:pPr algn="ctr"/>
+          </a:p>
+        </p:txBody>
+      </p:sp>
+      <p:sp>
+        <p:nvSpPr>
+          <p:cNvPr id="21" name="TextBox 20"/>
+          <p:cNvSpPr txBox="1"/>
+          <p:nvPr/>
+        </p:nvSpPr>
+        <p:spPr>
+          <a:xfrm>
+            <a:off x="1238250" y="4640036"/>
+            <a:ext cx="7772400" cy="519793"/>
+          </a:xfrm>
+          <a:prstGeom prst="rect">
+            <a:avLst/>
+          </a:prstGeom>
+          <a:noFill/>
+        </p:spPr>
+        <p:txBody>
+          <a:bodyPr wrap="square" lIns="0" rIns="0" tIns="0" bIns="0" anchor="ctr">
+            <a:spAutoFit/>
+          </a:bodyPr>
+          <a:lstStyle/>
+          <a:p>
+            <a:pPr algn="l">
+              <a:lnSpc>
+                <a:spcPct val="115000"/>
+              </a:lnSpc>
+            </a:pPr>
+            <a:r>
+              <a:rPr sz="1875" b="1">
+                <a:solidFill>
+                  <a:srgbClr val="0D2B5E"/>
+                </a:solidFill>
+                <a:latin typeface="Pretendard"/>
+                <a:ea typeface="Pretendard"/>
+                <a:cs typeface="Pretendard"/>
+              </a:rPr>
+              <a:t>SELECT … ORDER BY id</a:t>
+            </a:r>
+          </a:p>
+        </p:txBody>
+      </p:sp>
+      <p:sp>
+        <p:nvSpPr>
+          <p:cNvPr id="22" name="Rounded Rectangle 21"/>
+          <p:cNvSpPr/>
+          <p:nvPr/>
+        </p:nvSpPr>
+        <p:spPr>
+          <a:xfrm>
+            <a:off x="9144000" y="4640036"/>
+            <a:ext cx="8001000" cy="519793"/>
+          </a:xfrm>
+          <a:prstGeom prst="roundRect">
+            <a:avLst>
+              <a:gd name="adj" fmla="val 7329"/>
             </a:avLst>
           </a:prstGeom>
           <a:solidFill>
@@ -9441,14 +9620,14 @@
       </p:sp>
       <p:sp>
         <p:nvSpPr>
-          <p:cNvPr id="21" name="TextBox 20"/>
-          <p:cNvSpPr txBox="1"/>
-          <p:nvPr/>
-        </p:nvSpPr>
-        <p:spPr>
-          <a:xfrm>
-            <a:off x="9401175" y="3657600"/>
-            <a:ext cx="3548062" cy="1428750"/>
+          <p:cNvPr id="23" name="TextBox 22"/>
+          <p:cNvSpPr txBox="1"/>
+          <p:nvPr/>
+        </p:nvSpPr>
+        <p:spPr>
+          <a:xfrm>
+            <a:off x="9239250" y="4640036"/>
+            <a:ext cx="7810500" cy="519793"/>
           </a:xfrm>
           <a:prstGeom prst="rect">
             <a:avLst/>
@@ -9463,11 +9642,11 @@
           <a:p>
             <a:pPr algn="ctr">
               <a:lnSpc>
-                <a:spcPct val="135000"/>
-              </a:lnSpc>
-            </a:pPr>
-            <a:r>
-              <a:rPr sz="1800" b="0">
+                <a:spcPct val="115000"/>
+              </a:lnSpc>
+            </a:pPr>
+            <a:r>
+              <a:rPr sz="1875" b="0">
                 <a:solidFill>
                   <a:srgbClr val="3D3D3D"/>
                 </a:solidFill>
@@ -9475,144 +9654,100 @@
                 <a:ea typeface="Pretendard"/>
                 <a:cs typeface="Pretendard"/>
               </a:rPr>
-              <a:t>JSON · avro</a:t>
-            </a:r>
-          </a:p>
-          <a:p>
-            <a:pPr algn="ctr">
-              <a:lnSpc>
-                <a:spcPct val="135000"/>
-              </a:lnSpc>
-            </a:pPr>
-            <a:r>
-              <a:rPr sz="1800" b="0">
-                <a:solidFill>
-                  <a:srgbClr val="3D3D3D"/>
-                </a:solidFill>
-                <a:latin typeface="Pretendard"/>
-                <a:ea typeface="Pretendard"/>
-                <a:cs typeface="Pretendard"/>
-              </a:rPr>
-              <a:t>스키마·스냅샷</a:t>
-            </a:r>
-          </a:p>
-        </p:txBody>
-      </p:sp>
-      <p:sp>
-        <p:nvSpPr>
-          <p:cNvPr id="22" name="Right Arrow 21"/>
-          <p:cNvSpPr/>
-          <p:nvPr/>
-        </p:nvSpPr>
-        <p:spPr>
-          <a:xfrm>
-            <a:off x="13101638" y="3028950"/>
-            <a:ext cx="209550" cy="209550"/>
-          </a:xfrm>
-          <a:prstGeom prst="rightArrow">
-            <a:avLst/>
-          </a:prstGeom>
-          <a:solidFill>
-            <a:srgbClr val="1E5BC6"/>
-          </a:solidFill>
-          <a:ln>
-            <a:noFill/>
-          </a:ln>
-          <a:effectLst/>
-        </p:spPr>
-        <p:txBody>
-          <a:bodyPr rtlCol="0" anchor="ctr" wrap="square"/>
-          <a:lstStyle/>
-          <a:p>
-            <a:pPr algn="ctr"/>
-          </a:p>
-        </p:txBody>
-      </p:sp>
-      <p:sp>
-        <p:nvSpPr>
-          <p:cNvPr id="23" name="Rectangle 22"/>
-          <p:cNvSpPr/>
-          <p:nvPr/>
-        </p:nvSpPr>
-        <p:spPr>
-          <a:xfrm>
-            <a:off x="13330238" y="2781300"/>
-            <a:ext cx="3814762" cy="704850"/>
-          </a:xfrm>
-          <a:prstGeom prst="rect">
-            <a:avLst/>
-          </a:prstGeom>
-          <a:solidFill>
-            <a:srgbClr val="1E5BC6"/>
-          </a:solidFill>
-          <a:ln>
-            <a:noFill/>
-          </a:ln>
-          <a:effectLst/>
-        </p:spPr>
-        <p:txBody>
-          <a:bodyPr rtlCol="0" anchor="ctr" wrap="square"/>
-          <a:lstStyle/>
-          <a:p>
-            <a:pPr algn="ctr"/>
-          </a:p>
-        </p:txBody>
-      </p:sp>
-      <p:sp>
-        <p:nvSpPr>
-          <p:cNvPr id="24" name="TextBox 23"/>
-          <p:cNvSpPr txBox="1"/>
-          <p:nvPr/>
-        </p:nvSpPr>
-        <p:spPr>
-          <a:xfrm>
-            <a:off x="13330238" y="2781300"/>
-            <a:ext cx="3814762" cy="704850"/>
-          </a:xfrm>
-          <a:prstGeom prst="rect">
-            <a:avLst/>
-          </a:prstGeom>
-          <a:noFill/>
-        </p:spPr>
-        <p:txBody>
-          <a:bodyPr wrap="square" lIns="0" rIns="0" tIns="0" bIns="0" anchor="ctr">
-            <a:spAutoFit/>
-          </a:bodyPr>
-          <a:lstStyle/>
-          <a:p>
-            <a:pPr algn="ctr">
-              <a:lnSpc>
-                <a:spcPct val="100000"/>
-              </a:lnSpc>
-            </a:pPr>
-            <a:r>
-              <a:rPr sz="2400" b="1">
-                <a:solidFill>
-                  <a:srgbClr val="FFFFFF"/>
-                </a:solidFill>
-                <a:latin typeface="Pretendard"/>
-                <a:ea typeface="Pretendard"/>
-                <a:cs typeface="Pretendard"/>
-              </a:rPr>
-              <a:t>data/</a:t>
-            </a:r>
-          </a:p>
-        </p:txBody>
-      </p:sp>
-      <p:sp>
-        <p:nvSpPr>
-          <p:cNvPr id="25" name="Rounded Rectangle 24"/>
-          <p:cNvSpPr/>
-          <p:nvPr/>
-        </p:nvSpPr>
-        <p:spPr>
-          <a:xfrm>
-            <a:off x="13330238" y="3657600"/>
-            <a:ext cx="3814762" cy="1428750"/>
+              <a:t>45000.0 · 23000.0 · 310000.0</a:t>
+            </a:r>
+          </a:p>
+        </p:txBody>
+      </p:sp>
+      <p:sp>
+        <p:nvSpPr>
+          <p:cNvPr id="24" name="Rounded Rectangle 23"/>
+          <p:cNvSpPr/>
+          <p:nvPr/>
+        </p:nvSpPr>
+        <p:spPr>
+          <a:xfrm>
+            <a:off x="1143000" y="5236029"/>
+            <a:ext cx="7962900" cy="519793"/>
           </a:xfrm>
           <a:prstGeom prst="roundRect">
             <a:avLst>
-              <a:gd name="adj" fmla="val 3333"/>
+              <a:gd name="adj" fmla="val 7329"/>
+            </a:avLst>
+          </a:prstGeom>
+          <a:solidFill>
+            <a:srgbClr val="EDF3FD"/>
+          </a:solidFill>
+          <a:ln w="9525">
+            <a:solidFill>
+              <a:srgbClr val="BFD3F5"/>
+            </a:solidFill>
+          </a:ln>
+          <a:effectLst/>
+        </p:spPr>
+        <p:txBody>
+          <a:bodyPr rtlCol="0" anchor="ctr" wrap="square"/>
+          <a:lstStyle/>
+          <a:p>
+            <a:pPr algn="ctr"/>
+          </a:p>
+        </p:txBody>
+      </p:sp>
+      <p:sp>
+        <p:nvSpPr>
+          <p:cNvPr id="25" name="TextBox 24"/>
+          <p:cNvSpPr txBox="1"/>
+          <p:nvPr/>
+        </p:nvSpPr>
+        <p:spPr>
+          <a:xfrm>
+            <a:off x="1238250" y="5236029"/>
+            <a:ext cx="7772400" cy="519793"/>
+          </a:xfrm>
+          <a:prstGeom prst="rect">
+            <a:avLst/>
+          </a:prstGeom>
+          <a:noFill/>
+        </p:spPr>
+        <p:txBody>
+          <a:bodyPr wrap="square" lIns="0" rIns="0" tIns="0" bIns="0" anchor="ctr">
+            <a:spAutoFit/>
+          </a:bodyPr>
+          <a:lstStyle/>
+          <a:p>
+            <a:pPr algn="l">
+              <a:lnSpc>
+                <a:spcPct val="115000"/>
+              </a:lnSpc>
+            </a:pPr>
+            <a:r>
+              <a:rPr sz="1875" b="1">
+                <a:solidFill>
+                  <a:srgbClr val="0D2B5E"/>
+                </a:solidFill>
+                <a:latin typeface="Pretendard"/>
+                <a:ea typeface="Pretendard"/>
+                <a:cs typeface="Pretendard"/>
+              </a:rPr>
+              <a:t>SHOW TABLES IN lake.db</a:t>
+            </a:r>
+          </a:p>
+        </p:txBody>
+      </p:sp>
+      <p:sp>
+        <p:nvSpPr>
+          <p:cNvPr id="26" name="Rounded Rectangle 25"/>
+          <p:cNvSpPr/>
+          <p:nvPr/>
+        </p:nvSpPr>
+        <p:spPr>
+          <a:xfrm>
+            <a:off x="9144000" y="5236029"/>
+            <a:ext cx="8001000" cy="519793"/>
+          </a:xfrm>
+          <a:prstGeom prst="roundRect">
+            <a:avLst>
+              <a:gd name="adj" fmla="val 7329"/>
             </a:avLst>
           </a:prstGeom>
           <a:solidFill>
@@ -9635,14 +9770,14 @@
       </p:sp>
       <p:sp>
         <p:nvSpPr>
-          <p:cNvPr id="26" name="TextBox 25"/>
-          <p:cNvSpPr txBox="1"/>
-          <p:nvPr/>
-        </p:nvSpPr>
-        <p:spPr>
-          <a:xfrm>
-            <a:off x="13463588" y="3657600"/>
-            <a:ext cx="3548062" cy="1428750"/>
+          <p:cNvPr id="27" name="TextBox 26"/>
+          <p:cNvSpPr txBox="1"/>
+          <p:nvPr/>
+        </p:nvSpPr>
+        <p:spPr>
+          <a:xfrm>
+            <a:off x="9239250" y="5236029"/>
+            <a:ext cx="7810500" cy="519793"/>
           </a:xfrm>
           <a:prstGeom prst="rect">
             <a:avLst/>
@@ -9657,11 +9792,11 @@
           <a:p>
             <a:pPr algn="ctr">
               <a:lnSpc>
-                <a:spcPct val="135000"/>
-              </a:lnSpc>
-            </a:pPr>
-            <a:r>
-              <a:rPr sz="1800" b="0">
+                <a:spcPct val="115000"/>
+              </a:lnSpc>
+            </a:pPr>
+            <a:r>
+              <a:rPr sz="1875" b="0">
                 <a:solidFill>
                   <a:srgbClr val="3D3D3D"/>
                 </a:solidFill>
@@ -9669,43 +9804,25 @@
                 <a:ea typeface="Pretendard"/>
                 <a:cs typeface="Pretendard"/>
               </a:rPr>
-              <a:t>Parquet</a:t>
-            </a:r>
-          </a:p>
-          <a:p>
-            <a:pPr algn="ctr">
-              <a:lnSpc>
-                <a:spcPct val="135000"/>
-              </a:lnSpc>
-            </a:pPr>
-            <a:r>
-              <a:rPr sz="1800" b="0">
-                <a:solidFill>
-                  <a:srgbClr val="3D3D3D"/>
-                </a:solidFill>
-                <a:latin typeface="Pretendard"/>
-                <a:ea typeface="Pretendard"/>
-                <a:cs typeface="Pretendard"/>
-              </a:rPr>
-              <a:t>실제 데이터</a:t>
-            </a:r>
-          </a:p>
-        </p:txBody>
-      </p:sp>
-      <p:sp>
-        <p:nvSpPr>
-          <p:cNvPr id="27" name="Rounded Rectangle 26"/>
-          <p:cNvSpPr/>
-          <p:nvPr/>
-        </p:nvSpPr>
-        <p:spPr>
-          <a:xfrm>
-            <a:off x="1143000" y="5467350"/>
-            <a:ext cx="16002000" cy="742950"/>
+              <a:t>orders</a:t>
+            </a:r>
+          </a:p>
+        </p:txBody>
+      </p:sp>
+      <p:sp>
+        <p:nvSpPr>
+          <p:cNvPr id="28" name="Rounded Rectangle 27"/>
+          <p:cNvSpPr/>
+          <p:nvPr/>
+        </p:nvSpPr>
+        <p:spPr>
+          <a:xfrm>
+            <a:off x="1143000" y="5832021"/>
+            <a:ext cx="7962900" cy="519793"/>
           </a:xfrm>
           <a:prstGeom prst="roundRect">
             <a:avLst>
-              <a:gd name="adj" fmla="val 6410"/>
+              <a:gd name="adj" fmla="val 7329"/>
             </a:avLst>
           </a:prstGeom>
           <a:solidFill>
@@ -9728,14 +9845,14 @@
       </p:sp>
       <p:sp>
         <p:nvSpPr>
-          <p:cNvPr id="28" name="TextBox 27"/>
-          <p:cNvSpPr txBox="1"/>
-          <p:nvPr/>
-        </p:nvSpPr>
-        <p:spPr>
-          <a:xfrm>
-            <a:off x="1143000" y="5467350"/>
-            <a:ext cx="16002000" cy="742950"/>
+          <p:cNvPr id="29" name="TextBox 28"/>
+          <p:cNvSpPr txBox="1"/>
+          <p:nvPr/>
+        </p:nvSpPr>
+        <p:spPr>
+          <a:xfrm>
+            <a:off x="1238250" y="5832021"/>
+            <a:ext cx="7772400" cy="519793"/>
           </a:xfrm>
           <a:prstGeom prst="rect">
             <a:avLst/>
@@ -9748,13 +9865,163 @@
           </a:bodyPr>
           <a:lstStyle/>
           <a:p>
+            <a:pPr algn="l">
+              <a:lnSpc>
+                <a:spcPct val="115000"/>
+              </a:lnSpc>
+            </a:pPr>
+            <a:r>
+              <a:rPr sz="1875" b="1">
+                <a:solidFill>
+                  <a:srgbClr val="0D2B5E"/>
+                </a:solidFill>
+                <a:latin typeface="Pretendard"/>
+                <a:ea typeface="Pretendard"/>
+                <a:cs typeface="Pretendard"/>
+              </a:rPr>
+              <a:t>DESCRIBE TABLE</a:t>
+            </a:r>
+          </a:p>
+        </p:txBody>
+      </p:sp>
+      <p:sp>
+        <p:nvSpPr>
+          <p:cNvPr id="30" name="Rounded Rectangle 29"/>
+          <p:cNvSpPr/>
+          <p:nvPr/>
+        </p:nvSpPr>
+        <p:spPr>
+          <a:xfrm>
+            <a:off x="9144000" y="5832021"/>
+            <a:ext cx="8001000" cy="519793"/>
+          </a:xfrm>
+          <a:prstGeom prst="roundRect">
+            <a:avLst>
+              <a:gd name="adj" fmla="val 7329"/>
+            </a:avLst>
+          </a:prstGeom>
+          <a:solidFill>
+            <a:srgbClr val="FAFBFD"/>
+          </a:solidFill>
+          <a:ln w="9525">
+            <a:solidFill>
+              <a:srgbClr val="DCE1E8"/>
+            </a:solidFill>
+          </a:ln>
+          <a:effectLst/>
+        </p:spPr>
+        <p:txBody>
+          <a:bodyPr rtlCol="0" anchor="ctr" wrap="square"/>
+          <a:lstStyle/>
+          <a:p>
+            <a:pPr algn="ctr"/>
+          </a:p>
+        </p:txBody>
+      </p:sp>
+      <p:sp>
+        <p:nvSpPr>
+          <p:cNvPr id="31" name="TextBox 30"/>
+          <p:cNvSpPr txBox="1"/>
+          <p:nvPr/>
+        </p:nvSpPr>
+        <p:spPr>
+          <a:xfrm>
+            <a:off x="9239250" y="5832021"/>
+            <a:ext cx="7810500" cy="519793"/>
+          </a:xfrm>
+          <a:prstGeom prst="rect">
+            <a:avLst/>
+          </a:prstGeom>
+          <a:noFill/>
+        </p:spPr>
+        <p:txBody>
+          <a:bodyPr wrap="square" lIns="0" rIns="0" tIns="0" bIns="0" anchor="ctr">
+            <a:spAutoFit/>
+          </a:bodyPr>
+          <a:lstStyle/>
+          <a:p>
             <a:pPr algn="ctr">
               <a:lnSpc>
-                <a:spcPct val="100000"/>
-              </a:lnSpc>
-            </a:pPr>
-            <a:r>
-              <a:rPr sz="2250" b="1">
+                <a:spcPct val="115000"/>
+              </a:lnSpc>
+            </a:pPr>
+            <a:r>
+              <a:rPr sz="1875" b="0">
+                <a:solidFill>
+                  <a:srgbClr val="3D3D3D"/>
+                </a:solidFill>
+                <a:latin typeface="Pretendard"/>
+                <a:ea typeface="Pretendard"/>
+                <a:cs typeface="Pretendard"/>
+              </a:rPr>
+              <a:t>id · item · price</a:t>
+            </a:r>
+          </a:p>
+        </p:txBody>
+      </p:sp>
+      <p:sp>
+        <p:nvSpPr>
+          <p:cNvPr id="32" name="Rounded Rectangle 31"/>
+          <p:cNvSpPr/>
+          <p:nvPr/>
+        </p:nvSpPr>
+        <p:spPr>
+          <a:xfrm>
+            <a:off x="1143000" y="6428014"/>
+            <a:ext cx="7962900" cy="519793"/>
+          </a:xfrm>
+          <a:prstGeom prst="roundRect">
+            <a:avLst>
+              <a:gd name="adj" fmla="val 7329"/>
+            </a:avLst>
+          </a:prstGeom>
+          <a:solidFill>
+            <a:srgbClr val="EDF3FD"/>
+          </a:solidFill>
+          <a:ln w="9525">
+            <a:solidFill>
+              <a:srgbClr val="BFD3F5"/>
+            </a:solidFill>
+          </a:ln>
+          <a:effectLst/>
+        </p:spPr>
+        <p:txBody>
+          <a:bodyPr rtlCol="0" anchor="ctr" wrap="square"/>
+          <a:lstStyle/>
+          <a:p>
+            <a:pPr algn="ctr"/>
+          </a:p>
+        </p:txBody>
+      </p:sp>
+      <p:sp>
+        <p:nvSpPr>
+          <p:cNvPr id="33" name="TextBox 32"/>
+          <p:cNvSpPr txBox="1"/>
+          <p:nvPr/>
+        </p:nvSpPr>
+        <p:spPr>
+          <a:xfrm>
+            <a:off x="1238250" y="6428014"/>
+            <a:ext cx="7772400" cy="519793"/>
+          </a:xfrm>
+          <a:prstGeom prst="rect">
+            <a:avLst/>
+          </a:prstGeom>
+          <a:noFill/>
+        </p:spPr>
+        <p:txBody>
+          <a:bodyPr wrap="square" lIns="0" rIns="0" tIns="0" bIns="0" anchor="ctr">
+            <a:spAutoFit/>
+          </a:bodyPr>
+          <a:lstStyle/>
+          <a:p>
+            <a:pPr algn="l">
+              <a:lnSpc>
+                <a:spcPct val="115000"/>
+              </a:lnSpc>
+            </a:pPr>
+            <a:r>
+              <a:rPr sz="1875" b="1">
                 <a:solidFill>
                   <a:srgbClr val="0D2B5E"/>
                 </a:solidFill>
@@ -9762,14 +10029,239 @@
                 <a:ea typeface="Pretendard"/>
                 <a:cs typeface="Pretendard"/>
               </a:rPr>
-              <a:t>콘솔(9001)에서 warehouse/db/orders/ 아래 두 폴더가 생겼는지 확인 — 이것이 Iceberg 테이블의 실체</a:t>
-            </a:r>
-          </a:p>
-        </p:txBody>
-      </p:sp>
-      <p:sp>
-        <p:nvSpPr>
-          <p:cNvPr id="29" name="TextBox 28"/>
+              <a:t>orders.snapshots</a:t>
+            </a:r>
+          </a:p>
+        </p:txBody>
+      </p:sp>
+      <p:sp>
+        <p:nvSpPr>
+          <p:cNvPr id="34" name="Rounded Rectangle 33"/>
+          <p:cNvSpPr/>
+          <p:nvPr/>
+        </p:nvSpPr>
+        <p:spPr>
+          <a:xfrm>
+            <a:off x="9144000" y="6428014"/>
+            <a:ext cx="8001000" cy="519793"/>
+          </a:xfrm>
+          <a:prstGeom prst="roundRect">
+            <a:avLst>
+              <a:gd name="adj" fmla="val 7329"/>
+            </a:avLst>
+          </a:prstGeom>
+          <a:solidFill>
+            <a:srgbClr val="FAFBFD"/>
+          </a:solidFill>
+          <a:ln w="9525">
+            <a:solidFill>
+              <a:srgbClr val="DCE1E8"/>
+            </a:solidFill>
+          </a:ln>
+          <a:effectLst/>
+        </p:spPr>
+        <p:txBody>
+          <a:bodyPr rtlCol="0" anchor="ctr" wrap="square"/>
+          <a:lstStyle/>
+          <a:p>
+            <a:pPr algn="ctr"/>
+          </a:p>
+        </p:txBody>
+      </p:sp>
+      <p:sp>
+        <p:nvSpPr>
+          <p:cNvPr id="35" name="TextBox 34"/>
+          <p:cNvSpPr txBox="1"/>
+          <p:nvPr/>
+        </p:nvSpPr>
+        <p:spPr>
+          <a:xfrm>
+            <a:off x="9239250" y="6428014"/>
+            <a:ext cx="7810500" cy="519793"/>
+          </a:xfrm>
+          <a:prstGeom prst="rect">
+            <a:avLst/>
+          </a:prstGeom>
+          <a:noFill/>
+        </p:spPr>
+        <p:txBody>
+          <a:bodyPr wrap="square" lIns="0" rIns="0" tIns="0" bIns="0" anchor="ctr">
+            <a:spAutoFit/>
+          </a:bodyPr>
+          <a:lstStyle/>
+          <a:p>
+            <a:pPr algn="ctr">
+              <a:lnSpc>
+                <a:spcPct val="115000"/>
+              </a:lnSpc>
+            </a:pPr>
+            <a:r>
+              <a:rPr sz="1875" b="0">
+                <a:solidFill>
+                  <a:srgbClr val="3D3D3D"/>
+                </a:solidFill>
+                <a:latin typeface="Pretendard"/>
+                <a:ea typeface="Pretendard"/>
+                <a:cs typeface="Pretendard"/>
+              </a:rPr>
+              <a:t>append 하나</a:t>
+            </a:r>
+          </a:p>
+        </p:txBody>
+      </p:sp>
+      <p:sp>
+        <p:nvSpPr>
+          <p:cNvPr id="36" name="Rounded Rectangle 35"/>
+          <p:cNvSpPr/>
+          <p:nvPr/>
+        </p:nvSpPr>
+        <p:spPr>
+          <a:xfrm>
+            <a:off x="1143000" y="7024007"/>
+            <a:ext cx="7962900" cy="519793"/>
+          </a:xfrm>
+          <a:prstGeom prst="roundRect">
+            <a:avLst>
+              <a:gd name="adj" fmla="val 7329"/>
+            </a:avLst>
+          </a:prstGeom>
+          <a:solidFill>
+            <a:srgbClr val="EDF3FD"/>
+          </a:solidFill>
+          <a:ln w="9525">
+            <a:solidFill>
+              <a:srgbClr val="BFD3F5"/>
+            </a:solidFill>
+          </a:ln>
+          <a:effectLst/>
+        </p:spPr>
+        <p:txBody>
+          <a:bodyPr rtlCol="0" anchor="ctr" wrap="square"/>
+          <a:lstStyle/>
+          <a:p>
+            <a:pPr algn="ctr"/>
+          </a:p>
+        </p:txBody>
+      </p:sp>
+      <p:sp>
+        <p:nvSpPr>
+          <p:cNvPr id="37" name="TextBox 36"/>
+          <p:cNvSpPr txBox="1"/>
+          <p:nvPr/>
+        </p:nvSpPr>
+        <p:spPr>
+          <a:xfrm>
+            <a:off x="1238250" y="7024007"/>
+            <a:ext cx="7772400" cy="519793"/>
+          </a:xfrm>
+          <a:prstGeom prst="rect">
+            <a:avLst/>
+          </a:prstGeom>
+          <a:noFill/>
+        </p:spPr>
+        <p:txBody>
+          <a:bodyPr wrap="square" lIns="0" rIns="0" tIns="0" bIns="0" anchor="ctr">
+            <a:spAutoFit/>
+          </a:bodyPr>
+          <a:lstStyle/>
+          <a:p>
+            <a:pPr algn="l">
+              <a:lnSpc>
+                <a:spcPct val="115000"/>
+              </a:lnSpc>
+            </a:pPr>
+            <a:r>
+              <a:rPr sz="1875" b="1">
+                <a:solidFill>
+                  <a:srgbClr val="0D2B5E"/>
+                </a:solidFill>
+                <a:latin typeface="Pretendard"/>
+                <a:ea typeface="Pretendard"/>
+                <a:cs typeface="Pretendard"/>
+              </a:rPr>
+              <a:t>orders.files</a:t>
+            </a:r>
+          </a:p>
+        </p:txBody>
+      </p:sp>
+      <p:sp>
+        <p:nvSpPr>
+          <p:cNvPr id="38" name="Rounded Rectangle 37"/>
+          <p:cNvSpPr/>
+          <p:nvPr/>
+        </p:nvSpPr>
+        <p:spPr>
+          <a:xfrm>
+            <a:off x="9144000" y="7024007"/>
+            <a:ext cx="8001000" cy="519793"/>
+          </a:xfrm>
+          <a:prstGeom prst="roundRect">
+            <a:avLst>
+              <a:gd name="adj" fmla="val 7329"/>
+            </a:avLst>
+          </a:prstGeom>
+          <a:solidFill>
+            <a:srgbClr val="FAFBFD"/>
+          </a:solidFill>
+          <a:ln w="9525">
+            <a:solidFill>
+              <a:srgbClr val="DCE1E8"/>
+            </a:solidFill>
+          </a:ln>
+          <a:effectLst/>
+        </p:spPr>
+        <p:txBody>
+          <a:bodyPr rtlCol="0" anchor="ctr" wrap="square"/>
+          <a:lstStyle/>
+          <a:p>
+            <a:pPr algn="ctr"/>
+          </a:p>
+        </p:txBody>
+      </p:sp>
+      <p:sp>
+        <p:nvSpPr>
+          <p:cNvPr id="39" name="TextBox 38"/>
+          <p:cNvSpPr txBox="1"/>
+          <p:nvPr/>
+        </p:nvSpPr>
+        <p:spPr>
+          <a:xfrm>
+            <a:off x="9239250" y="7024007"/>
+            <a:ext cx="7810500" cy="519793"/>
+          </a:xfrm>
+          <a:prstGeom prst="rect">
+            <a:avLst/>
+          </a:prstGeom>
+          <a:noFill/>
+        </p:spPr>
+        <p:txBody>
+          <a:bodyPr wrap="square" lIns="0" rIns="0" tIns="0" bIns="0" anchor="ctr">
+            <a:spAutoFit/>
+          </a:bodyPr>
+          <a:lstStyle/>
+          <a:p>
+            <a:pPr algn="ctr">
+              <a:lnSpc>
+                <a:spcPct val="115000"/>
+              </a:lnSpc>
+            </a:pPr>
+            <a:r>
+              <a:rPr sz="1875" b="0">
+                <a:solidFill>
+                  <a:srgbClr val="3D3D3D"/>
+                </a:solidFill>
+                <a:latin typeface="Pretendard"/>
+                <a:ea typeface="Pretendard"/>
+                <a:cs typeface="Pretendard"/>
+              </a:rPr>
+              <a:t>3개 · record_count 1 씩</a:t>
+            </a:r>
+          </a:p>
+        </p:txBody>
+      </p:sp>
+      <p:sp>
+        <p:nvSpPr>
+          <p:cNvPr id="40" name="TextBox 39"/>
           <p:cNvSpPr txBox="1"/>
           <p:nvPr/>
         </p:nvSpPr>
@@ -9803,14 +10295,14 @@
                 <a:ea typeface="Pretendard"/>
                 <a:cs typeface="Pretendard"/>
               </a:rPr>
-              <a:t>hadoop 타입에서는 폴더 구조가 곧 테이블 목록 — rest 와 달리 별도 서비스가 없는 이유</a:t>
-            </a:r>
-          </a:p>
-        </p:txBody>
-      </p:sp>
-      <p:sp>
-        <p:nvSpPr>
-          <p:cNvPr id="30" name="Rectangle 29"/>
+              <a:t>files 가 3개인 것은 세 행이 태스크 셋으로 나뉘어 각자 파일을 썼기 때문</a:t>
+            </a:r>
+          </a:p>
+        </p:txBody>
+      </p:sp>
+      <p:sp>
+        <p:nvSpPr>
+          <p:cNvPr id="41" name="Rectangle 40"/>
           <p:cNvSpPr/>
           <p:nvPr/>
         </p:nvSpPr>
@@ -9840,7 +10332,7 @@
       </p:sp>
       <p:sp>
         <p:nvSpPr>
-          <p:cNvPr id="31" name="TextBox 30"/>
+          <p:cNvPr id="42" name="TextBox 41"/>
           <p:cNvSpPr txBox="1"/>
           <p:nvPr/>
         </p:nvSpPr>
@@ -9881,7 +10373,7 @@
       </p:sp>
       <p:sp>
         <p:nvSpPr>
-          <p:cNvPr id="32" name="TextBox 31"/>
+          <p:cNvPr id="43" name="TextBox 42"/>
           <p:cNvSpPr txBox="1"/>
           <p:nvPr/>
         </p:nvSpPr>
@@ -9940,7 +10432,7 @@
       <p:grpSpPr/>
       <p:sp>
         <p:nvSpPr>
-          <p:cNvPr id="2" name="Oval 1"/>
+          <p:cNvPr id="2" name="deckgen:decor"/>
           <p:cNvSpPr/>
           <p:nvPr/>
         </p:nvSpPr>
@@ -9970,7 +10462,7 @@
       </p:sp>
       <p:sp>
         <p:nvSpPr>
-          <p:cNvPr id="3" name="Oval 2"/>
+          <p:cNvPr id="3" name="deckgen:decor"/>
           <p:cNvSpPr/>
           <p:nvPr/>
         </p:nvSpPr>
@@ -10000,7 +10492,7 @@
       </p:sp>
       <p:sp>
         <p:nvSpPr>
-          <p:cNvPr id="4" name="Oval 3"/>
+          <p:cNvPr id="4" name="deckgen:decor"/>
           <p:cNvSpPr/>
           <p:nvPr/>
         </p:nvSpPr>
@@ -10105,7 +10597,7 @@
                 <a:ea typeface="Pretendard"/>
                 <a:cs typeface="Pretendard"/>
               </a:rPr>
-              <a:t>카탈로그가 아는 것 · 메타테이블 — 4주차와 같다</a:t>
+              <a:t>테이블의 실체 — MinIO 의 폴더</a:t>
             </a:r>
           </a:p>
         </p:txBody>
@@ -10149,7 +10641,7 @@
         <p:spPr>
           <a:xfrm>
             <a:off x="1143000" y="2781300"/>
-            <a:ext cx="7962900" cy="590550"/>
+            <a:ext cx="3814762" cy="704850"/>
           </a:xfrm>
           <a:prstGeom prst="rect">
             <a:avLst/>
@@ -10179,7 +10671,7 @@
         <p:spPr>
           <a:xfrm>
             <a:off x="1143000" y="2781300"/>
-            <a:ext cx="7962900" cy="590550"/>
+            <a:ext cx="3814762" cy="704850"/>
           </a:xfrm>
           <a:prstGeom prst="rect">
             <a:avLst/>
@@ -10198,7 +10690,7 @@
               </a:lnSpc>
             </a:pPr>
             <a:r>
-              <a:rPr sz="2025" b="1">
+              <a:rPr sz="2400" b="1">
                 <a:solidFill>
                   <a:srgbClr val="FFFFFF"/>
                 </a:solidFill>
@@ -10206,23 +10698,116 @@
                 <a:ea typeface="Pretendard"/>
                 <a:cs typeface="Pretendard"/>
               </a:rPr>
-              <a:t>질의</a:t>
-            </a:r>
-          </a:p>
-        </p:txBody>
-      </p:sp>
-      <p:sp>
-        <p:nvSpPr>
-          <p:cNvPr id="10" name="Rectangle 9"/>
-          <p:cNvSpPr/>
-          <p:nvPr/>
-        </p:nvSpPr>
-        <p:spPr>
-          <a:xfrm>
-            <a:off x="9144000" y="2781300"/>
-            <a:ext cx="8001000" cy="590550"/>
-          </a:xfrm>
-          <a:prstGeom prst="rect">
+              <a:t>lake.db.orders</a:t>
+            </a:r>
+          </a:p>
+        </p:txBody>
+      </p:sp>
+      <p:sp>
+        <p:nvSpPr>
+          <p:cNvPr id="10" name="Rounded Rectangle 9"/>
+          <p:cNvSpPr/>
+          <p:nvPr/>
+        </p:nvSpPr>
+        <p:spPr>
+          <a:xfrm>
+            <a:off x="1143000" y="3657600"/>
+            <a:ext cx="3814762" cy="1428750"/>
+          </a:xfrm>
+          <a:prstGeom prst="roundRect">
+            <a:avLst>
+              <a:gd name="adj" fmla="val 3333"/>
+            </a:avLst>
+          </a:prstGeom>
+          <a:solidFill>
+            <a:srgbClr val="FAFBFD"/>
+          </a:solidFill>
+          <a:ln w="9525">
+            <a:solidFill>
+              <a:srgbClr val="DCE1E8"/>
+            </a:solidFill>
+          </a:ln>
+          <a:effectLst/>
+        </p:spPr>
+        <p:txBody>
+          <a:bodyPr rtlCol="0" anchor="ctr" wrap="square"/>
+          <a:lstStyle/>
+          <a:p>
+            <a:pPr algn="ctr"/>
+          </a:p>
+        </p:txBody>
+      </p:sp>
+      <p:sp>
+        <p:nvSpPr>
+          <p:cNvPr id="11" name="TextBox 10"/>
+          <p:cNvSpPr txBox="1"/>
+          <p:nvPr/>
+        </p:nvSpPr>
+        <p:spPr>
+          <a:xfrm>
+            <a:off x="1276350" y="3657600"/>
+            <a:ext cx="3548062" cy="1428750"/>
+          </a:xfrm>
+          <a:prstGeom prst="rect">
+            <a:avLst/>
+          </a:prstGeom>
+          <a:noFill/>
+        </p:spPr>
+        <p:txBody>
+          <a:bodyPr wrap="square" lIns="0" rIns="0" tIns="0" bIns="0" anchor="ctr">
+            <a:spAutoFit/>
+          </a:bodyPr>
+          <a:lstStyle/>
+          <a:p>
+            <a:pPr algn="ctr">
+              <a:lnSpc>
+                <a:spcPct val="135000"/>
+              </a:lnSpc>
+            </a:pPr>
+            <a:r>
+              <a:rPr sz="1800" b="0">
+                <a:solidFill>
+                  <a:srgbClr val="3D3D3D"/>
+                </a:solidFill>
+                <a:latin typeface="Pretendard"/>
+                <a:ea typeface="Pretendard"/>
+                <a:cs typeface="Pretendard"/>
+              </a:rPr>
+              <a:t>SQL 에서</a:t>
+            </a:r>
+          </a:p>
+          <a:p>
+            <a:pPr algn="ctr">
+              <a:lnSpc>
+                <a:spcPct val="135000"/>
+              </a:lnSpc>
+            </a:pPr>
+            <a:r>
+              <a:rPr sz="1800" b="0">
+                <a:solidFill>
+                  <a:srgbClr val="3D3D3D"/>
+                </a:solidFill>
+                <a:latin typeface="Pretendard"/>
+                <a:ea typeface="Pretendard"/>
+                <a:cs typeface="Pretendard"/>
+              </a:rPr>
+              <a:t>부르는 이름</a:t>
+            </a:r>
+          </a:p>
+        </p:txBody>
+      </p:sp>
+      <p:sp>
+        <p:nvSpPr>
+          <p:cNvPr id="12" name="Right Arrow 11"/>
+          <p:cNvSpPr/>
+          <p:nvPr/>
+        </p:nvSpPr>
+        <p:spPr>
+          <a:xfrm>
+            <a:off x="4976812" y="3028950"/>
+            <a:ext cx="209550" cy="209550"/>
+          </a:xfrm>
+          <a:prstGeom prst="rightArrow">
             <a:avLst/>
           </a:prstGeom>
           <a:solidFill>
@@ -10243,14 +10828,44 @@
       </p:sp>
       <p:sp>
         <p:nvSpPr>
-          <p:cNvPr id="11" name="TextBox 10"/>
-          <p:cNvSpPr txBox="1"/>
-          <p:nvPr/>
-        </p:nvSpPr>
-        <p:spPr>
-          <a:xfrm>
-            <a:off x="9144000" y="2781300"/>
-            <a:ext cx="8001000" cy="590550"/>
+          <p:cNvPr id="13" name="Rectangle 12"/>
+          <p:cNvSpPr/>
+          <p:nvPr/>
+        </p:nvSpPr>
+        <p:spPr>
+          <a:xfrm>
+            <a:off x="5205412" y="2781300"/>
+            <a:ext cx="3814762" cy="704850"/>
+          </a:xfrm>
+          <a:prstGeom prst="rect">
+            <a:avLst/>
+          </a:prstGeom>
+          <a:solidFill>
+            <a:srgbClr val="1E5BC6"/>
+          </a:solidFill>
+          <a:ln>
+            <a:noFill/>
+          </a:ln>
+          <a:effectLst/>
+        </p:spPr>
+        <p:txBody>
+          <a:bodyPr rtlCol="0" anchor="ctr" wrap="square"/>
+          <a:lstStyle/>
+          <a:p>
+            <a:pPr algn="ctr"/>
+          </a:p>
+        </p:txBody>
+      </p:sp>
+      <p:sp>
+        <p:nvSpPr>
+          <p:cNvPr id="14" name="TextBox 13"/>
+          <p:cNvSpPr txBox="1"/>
+          <p:nvPr/>
+        </p:nvSpPr>
+        <p:spPr>
+          <a:xfrm>
+            <a:off x="5205412" y="2781300"/>
+            <a:ext cx="3814762" cy="704850"/>
           </a:xfrm>
           <a:prstGeom prst="rect">
             <a:avLst/>
@@ -10269,7 +10884,7 @@
               </a:lnSpc>
             </a:pPr>
             <a:r>
-              <a:rPr sz="2025" b="1">
+              <a:rPr sz="2400" b="1">
                 <a:solidFill>
                   <a:srgbClr val="FFFFFF"/>
                 </a:solidFill>
@@ -10277,25 +10892,506 @@
                 <a:ea typeface="Pretendard"/>
                 <a:cs typeface="Pretendard"/>
               </a:rPr>
-              <a:t>무엇이 나오나</a:t>
-            </a:r>
-          </a:p>
-        </p:txBody>
-      </p:sp>
-      <p:sp>
-        <p:nvSpPr>
-          <p:cNvPr id="12" name="Rounded Rectangle 11"/>
-          <p:cNvSpPr/>
-          <p:nvPr/>
-        </p:nvSpPr>
-        <p:spPr>
-          <a:xfrm>
-            <a:off x="1143000" y="3448050"/>
-            <a:ext cx="7962900" cy="647700"/>
+              <a:t>warehouse/lake</a:t>
+            </a:r>
+          </a:p>
+        </p:txBody>
+      </p:sp>
+      <p:sp>
+        <p:nvSpPr>
+          <p:cNvPr id="15" name="Rounded Rectangle 14"/>
+          <p:cNvSpPr/>
+          <p:nvPr/>
+        </p:nvSpPr>
+        <p:spPr>
+          <a:xfrm>
+            <a:off x="5205412" y="3657600"/>
+            <a:ext cx="3814762" cy="1428750"/>
           </a:xfrm>
           <a:prstGeom prst="roundRect">
             <a:avLst>
-              <a:gd name="adj" fmla="val 5882"/>
+              <a:gd name="adj" fmla="val 3333"/>
+            </a:avLst>
+          </a:prstGeom>
+          <a:solidFill>
+            <a:srgbClr val="FAFBFD"/>
+          </a:solidFill>
+          <a:ln w="9525">
+            <a:solidFill>
+              <a:srgbClr val="DCE1E8"/>
+            </a:solidFill>
+          </a:ln>
+          <a:effectLst/>
+        </p:spPr>
+        <p:txBody>
+          <a:bodyPr rtlCol="0" anchor="ctr" wrap="square"/>
+          <a:lstStyle/>
+          <a:p>
+            <a:pPr algn="ctr"/>
+          </a:p>
+        </p:txBody>
+      </p:sp>
+      <p:sp>
+        <p:nvSpPr>
+          <p:cNvPr id="16" name="TextBox 15"/>
+          <p:cNvSpPr txBox="1"/>
+          <p:nvPr/>
+        </p:nvSpPr>
+        <p:spPr>
+          <a:xfrm>
+            <a:off x="5338762" y="3657600"/>
+            <a:ext cx="3548062" cy="1428750"/>
+          </a:xfrm>
+          <a:prstGeom prst="rect">
+            <a:avLst/>
+          </a:prstGeom>
+          <a:noFill/>
+        </p:spPr>
+        <p:txBody>
+          <a:bodyPr wrap="square" lIns="0" rIns="0" tIns="0" bIns="0" anchor="ctr">
+            <a:spAutoFit/>
+          </a:bodyPr>
+          <a:lstStyle/>
+          <a:p>
+            <a:pPr algn="ctr">
+              <a:lnSpc>
+                <a:spcPct val="135000"/>
+              </a:lnSpc>
+            </a:pPr>
+            <a:r>
+              <a:rPr sz="1800" b="0">
+                <a:solidFill>
+                  <a:srgbClr val="3D3D3D"/>
+                </a:solidFill>
+                <a:latin typeface="Pretendard"/>
+                <a:ea typeface="Pretendard"/>
+                <a:cs typeface="Pretendard"/>
+              </a:rPr>
+              <a:t>설정의</a:t>
+            </a:r>
+          </a:p>
+          <a:p>
+            <a:pPr algn="ctr">
+              <a:lnSpc>
+                <a:spcPct val="135000"/>
+              </a:lnSpc>
+            </a:pPr>
+            <a:r>
+              <a:rPr sz="1800" b="0">
+                <a:solidFill>
+                  <a:srgbClr val="3D3D3D"/>
+                </a:solidFill>
+                <a:latin typeface="Pretendard"/>
+                <a:ea typeface="Pretendard"/>
+                <a:cs typeface="Pretendard"/>
+              </a:rPr>
+              <a:t>warehouse 값</a:t>
+            </a:r>
+          </a:p>
+        </p:txBody>
+      </p:sp>
+      <p:sp>
+        <p:nvSpPr>
+          <p:cNvPr id="17" name="Right Arrow 16"/>
+          <p:cNvSpPr/>
+          <p:nvPr/>
+        </p:nvSpPr>
+        <p:spPr>
+          <a:xfrm>
+            <a:off x="9039225" y="3028950"/>
+            <a:ext cx="209550" cy="209550"/>
+          </a:xfrm>
+          <a:prstGeom prst="rightArrow">
+            <a:avLst/>
+          </a:prstGeom>
+          <a:solidFill>
+            <a:srgbClr val="1E5BC6"/>
+          </a:solidFill>
+          <a:ln>
+            <a:noFill/>
+          </a:ln>
+          <a:effectLst/>
+        </p:spPr>
+        <p:txBody>
+          <a:bodyPr rtlCol="0" anchor="ctr" wrap="square"/>
+          <a:lstStyle/>
+          <a:p>
+            <a:pPr algn="ctr"/>
+          </a:p>
+        </p:txBody>
+      </p:sp>
+      <p:sp>
+        <p:nvSpPr>
+          <p:cNvPr id="18" name="Rectangle 17"/>
+          <p:cNvSpPr/>
+          <p:nvPr/>
+        </p:nvSpPr>
+        <p:spPr>
+          <a:xfrm>
+            <a:off x="9267825" y="2781300"/>
+            <a:ext cx="3814762" cy="704850"/>
+          </a:xfrm>
+          <a:prstGeom prst="rect">
+            <a:avLst/>
+          </a:prstGeom>
+          <a:solidFill>
+            <a:srgbClr val="0D2B5E"/>
+          </a:solidFill>
+          <a:ln>
+            <a:noFill/>
+          </a:ln>
+          <a:effectLst/>
+        </p:spPr>
+        <p:txBody>
+          <a:bodyPr rtlCol="0" anchor="ctr" wrap="square"/>
+          <a:lstStyle/>
+          <a:p>
+            <a:pPr algn="ctr"/>
+          </a:p>
+        </p:txBody>
+      </p:sp>
+      <p:sp>
+        <p:nvSpPr>
+          <p:cNvPr id="19" name="TextBox 18"/>
+          <p:cNvSpPr txBox="1"/>
+          <p:nvPr/>
+        </p:nvSpPr>
+        <p:spPr>
+          <a:xfrm>
+            <a:off x="9267825" y="2781300"/>
+            <a:ext cx="3814762" cy="704850"/>
+          </a:xfrm>
+          <a:prstGeom prst="rect">
+            <a:avLst/>
+          </a:prstGeom>
+          <a:noFill/>
+        </p:spPr>
+        <p:txBody>
+          <a:bodyPr wrap="square" lIns="0" rIns="0" tIns="0" bIns="0" anchor="ctr">
+            <a:spAutoFit/>
+          </a:bodyPr>
+          <a:lstStyle/>
+          <a:p>
+            <a:pPr algn="ctr">
+              <a:lnSpc>
+                <a:spcPct val="100000"/>
+              </a:lnSpc>
+            </a:pPr>
+            <a:r>
+              <a:rPr sz="2400" b="1">
+                <a:solidFill>
+                  <a:srgbClr val="FFFFFF"/>
+                </a:solidFill>
+                <a:latin typeface="Pretendard"/>
+                <a:ea typeface="Pretendard"/>
+                <a:cs typeface="Pretendard"/>
+              </a:rPr>
+              <a:t>db/orders/</a:t>
+            </a:r>
+          </a:p>
+        </p:txBody>
+      </p:sp>
+      <p:sp>
+        <p:nvSpPr>
+          <p:cNvPr id="20" name="Rounded Rectangle 19"/>
+          <p:cNvSpPr/>
+          <p:nvPr/>
+        </p:nvSpPr>
+        <p:spPr>
+          <a:xfrm>
+            <a:off x="9267825" y="3657600"/>
+            <a:ext cx="3814762" cy="1428750"/>
+          </a:xfrm>
+          <a:prstGeom prst="roundRect">
+            <a:avLst>
+              <a:gd name="adj" fmla="val 3333"/>
+            </a:avLst>
+          </a:prstGeom>
+          <a:solidFill>
+            <a:srgbClr val="FAFBFD"/>
+          </a:solidFill>
+          <a:ln w="9525">
+            <a:solidFill>
+              <a:srgbClr val="DCE1E8"/>
+            </a:solidFill>
+          </a:ln>
+          <a:effectLst/>
+        </p:spPr>
+        <p:txBody>
+          <a:bodyPr rtlCol="0" anchor="ctr" wrap="square"/>
+          <a:lstStyle/>
+          <a:p>
+            <a:pPr algn="ctr"/>
+          </a:p>
+        </p:txBody>
+      </p:sp>
+      <p:sp>
+        <p:nvSpPr>
+          <p:cNvPr id="21" name="TextBox 20"/>
+          <p:cNvSpPr txBox="1"/>
+          <p:nvPr/>
+        </p:nvSpPr>
+        <p:spPr>
+          <a:xfrm>
+            <a:off x="9401175" y="3657600"/>
+            <a:ext cx="3548062" cy="1428750"/>
+          </a:xfrm>
+          <a:prstGeom prst="rect">
+            <a:avLst/>
+          </a:prstGeom>
+          <a:noFill/>
+        </p:spPr>
+        <p:txBody>
+          <a:bodyPr wrap="square" lIns="0" rIns="0" tIns="0" bIns="0" anchor="ctr">
+            <a:spAutoFit/>
+          </a:bodyPr>
+          <a:lstStyle/>
+          <a:p>
+            <a:pPr algn="ctr">
+              <a:lnSpc>
+                <a:spcPct val="135000"/>
+              </a:lnSpc>
+            </a:pPr>
+            <a:r>
+              <a:rPr sz="1800" b="0">
+                <a:solidFill>
+                  <a:srgbClr val="3D3D3D"/>
+                </a:solidFill>
+                <a:latin typeface="Pretendard"/>
+                <a:ea typeface="Pretendard"/>
+                <a:cs typeface="Pretendard"/>
+              </a:rPr>
+              <a:t>db · orders</a:t>
+            </a:r>
+          </a:p>
+          <a:p>
+            <a:pPr algn="ctr">
+              <a:lnSpc>
+                <a:spcPct val="135000"/>
+              </a:lnSpc>
+            </a:pPr>
+            <a:r>
+              <a:rPr sz="1800" b="0">
+                <a:solidFill>
+                  <a:srgbClr val="3D3D3D"/>
+                </a:solidFill>
+                <a:latin typeface="Pretendard"/>
+                <a:ea typeface="Pretendard"/>
+                <a:cs typeface="Pretendard"/>
+              </a:rPr>
+              <a:t>네임스페이스·테이블</a:t>
+            </a:r>
+          </a:p>
+        </p:txBody>
+      </p:sp>
+      <p:sp>
+        <p:nvSpPr>
+          <p:cNvPr id="22" name="Right Arrow 21"/>
+          <p:cNvSpPr/>
+          <p:nvPr/>
+        </p:nvSpPr>
+        <p:spPr>
+          <a:xfrm>
+            <a:off x="13101638" y="3028950"/>
+            <a:ext cx="209550" cy="209550"/>
+          </a:xfrm>
+          <a:prstGeom prst="rightArrow">
+            <a:avLst/>
+          </a:prstGeom>
+          <a:solidFill>
+            <a:srgbClr val="1E5BC6"/>
+          </a:solidFill>
+          <a:ln>
+            <a:noFill/>
+          </a:ln>
+          <a:effectLst/>
+        </p:spPr>
+        <p:txBody>
+          <a:bodyPr rtlCol="0" anchor="ctr" wrap="square"/>
+          <a:lstStyle/>
+          <a:p>
+            <a:pPr algn="ctr"/>
+          </a:p>
+        </p:txBody>
+      </p:sp>
+      <p:sp>
+        <p:nvSpPr>
+          <p:cNvPr id="23" name="Rectangle 22"/>
+          <p:cNvSpPr/>
+          <p:nvPr/>
+        </p:nvSpPr>
+        <p:spPr>
+          <a:xfrm>
+            <a:off x="13330238" y="2781300"/>
+            <a:ext cx="3814762" cy="704850"/>
+          </a:xfrm>
+          <a:prstGeom prst="rect">
+            <a:avLst/>
+          </a:prstGeom>
+          <a:solidFill>
+            <a:srgbClr val="1E5BC6"/>
+          </a:solidFill>
+          <a:ln>
+            <a:noFill/>
+          </a:ln>
+          <a:effectLst/>
+        </p:spPr>
+        <p:txBody>
+          <a:bodyPr rtlCol="0" anchor="ctr" wrap="square"/>
+          <a:lstStyle/>
+          <a:p>
+            <a:pPr algn="ctr"/>
+          </a:p>
+        </p:txBody>
+      </p:sp>
+      <p:sp>
+        <p:nvSpPr>
+          <p:cNvPr id="24" name="TextBox 23"/>
+          <p:cNvSpPr txBox="1"/>
+          <p:nvPr/>
+        </p:nvSpPr>
+        <p:spPr>
+          <a:xfrm>
+            <a:off x="13330238" y="2781300"/>
+            <a:ext cx="3814762" cy="704850"/>
+          </a:xfrm>
+          <a:prstGeom prst="rect">
+            <a:avLst/>
+          </a:prstGeom>
+          <a:noFill/>
+        </p:spPr>
+        <p:txBody>
+          <a:bodyPr wrap="square" lIns="0" rIns="0" tIns="0" bIns="0" anchor="ctr">
+            <a:spAutoFit/>
+          </a:bodyPr>
+          <a:lstStyle/>
+          <a:p>
+            <a:pPr algn="ctr">
+              <a:lnSpc>
+                <a:spcPct val="100000"/>
+              </a:lnSpc>
+            </a:pPr>
+            <a:r>
+              <a:rPr sz="2400" b="1">
+                <a:solidFill>
+                  <a:srgbClr val="FFFFFF"/>
+                </a:solidFill>
+                <a:latin typeface="Pretendard"/>
+                <a:ea typeface="Pretendard"/>
+                <a:cs typeface="Pretendard"/>
+              </a:rPr>
+              <a:t>metadata/ · data/</a:t>
+            </a:r>
+          </a:p>
+        </p:txBody>
+      </p:sp>
+      <p:sp>
+        <p:nvSpPr>
+          <p:cNvPr id="25" name="Rounded Rectangle 24"/>
+          <p:cNvSpPr/>
+          <p:nvPr/>
+        </p:nvSpPr>
+        <p:spPr>
+          <a:xfrm>
+            <a:off x="13330238" y="3657600"/>
+            <a:ext cx="3814762" cy="1428750"/>
+          </a:xfrm>
+          <a:prstGeom prst="roundRect">
+            <a:avLst>
+              <a:gd name="adj" fmla="val 3333"/>
+            </a:avLst>
+          </a:prstGeom>
+          <a:solidFill>
+            <a:srgbClr val="FAFBFD"/>
+          </a:solidFill>
+          <a:ln w="9525">
+            <a:solidFill>
+              <a:srgbClr val="DCE1E8"/>
+            </a:solidFill>
+          </a:ln>
+          <a:effectLst/>
+        </p:spPr>
+        <p:txBody>
+          <a:bodyPr rtlCol="0" anchor="ctr" wrap="square"/>
+          <a:lstStyle/>
+          <a:p>
+            <a:pPr algn="ctr"/>
+          </a:p>
+        </p:txBody>
+      </p:sp>
+      <p:sp>
+        <p:nvSpPr>
+          <p:cNvPr id="26" name="TextBox 25"/>
+          <p:cNvSpPr txBox="1"/>
+          <p:nvPr/>
+        </p:nvSpPr>
+        <p:spPr>
+          <a:xfrm>
+            <a:off x="13463588" y="3657600"/>
+            <a:ext cx="3548062" cy="1428750"/>
+          </a:xfrm>
+          <a:prstGeom prst="rect">
+            <a:avLst/>
+          </a:prstGeom>
+          <a:noFill/>
+        </p:spPr>
+        <p:txBody>
+          <a:bodyPr wrap="square" lIns="0" rIns="0" tIns="0" bIns="0" anchor="ctr">
+            <a:spAutoFit/>
+          </a:bodyPr>
+          <a:lstStyle/>
+          <a:p>
+            <a:pPr algn="ctr">
+              <a:lnSpc>
+                <a:spcPct val="135000"/>
+              </a:lnSpc>
+            </a:pPr>
+            <a:r>
+              <a:rPr sz="1800" b="0">
+                <a:solidFill>
+                  <a:srgbClr val="3D3D3D"/>
+                </a:solidFill>
+                <a:latin typeface="Pretendard"/>
+                <a:ea typeface="Pretendard"/>
+                <a:cs typeface="Pretendard"/>
+              </a:rPr>
+              <a:t>JSON·avro</a:t>
+            </a:r>
+          </a:p>
+          <a:p>
+            <a:pPr algn="ctr">
+              <a:lnSpc>
+                <a:spcPct val="135000"/>
+              </a:lnSpc>
+            </a:pPr>
+            <a:r>
+              <a:rPr sz="1800" b="0">
+                <a:solidFill>
+                  <a:srgbClr val="3D3D3D"/>
+                </a:solidFill>
+                <a:latin typeface="Pretendard"/>
+                <a:ea typeface="Pretendard"/>
+                <a:cs typeface="Pretendard"/>
+              </a:rPr>
+              <a:t>Parquet</a:t>
+            </a:r>
+          </a:p>
+        </p:txBody>
+      </p:sp>
+      <p:sp>
+        <p:nvSpPr>
+          <p:cNvPr id="27" name="Rounded Rectangle 26"/>
+          <p:cNvSpPr/>
+          <p:nvPr/>
+        </p:nvSpPr>
+        <p:spPr>
+          <a:xfrm>
+            <a:off x="1143000" y="5467350"/>
+            <a:ext cx="16002000" cy="742950"/>
+          </a:xfrm>
+          <a:prstGeom prst="roundRect">
+            <a:avLst>
+              <a:gd name="adj" fmla="val 6410"/>
             </a:avLst>
           </a:prstGeom>
           <a:solidFill>
@@ -10318,14 +11414,14 @@
       </p:sp>
       <p:sp>
         <p:nvSpPr>
-          <p:cNvPr id="13" name="TextBox 12"/>
-          <p:cNvSpPr txBox="1"/>
-          <p:nvPr/>
-        </p:nvSpPr>
-        <p:spPr>
-          <a:xfrm>
-            <a:off x="1238250" y="3448050"/>
-            <a:ext cx="7772400" cy="647700"/>
+          <p:cNvPr id="28" name="TextBox 27"/>
+          <p:cNvSpPr txBox="1"/>
+          <p:nvPr/>
+        </p:nvSpPr>
+        <p:spPr>
+          <a:xfrm>
+            <a:off x="1143000" y="5467350"/>
+            <a:ext cx="16002000" cy="742950"/>
           </a:xfrm>
           <a:prstGeom prst="rect">
             <a:avLst/>
@@ -10338,13 +11434,13 @@
           </a:bodyPr>
           <a:lstStyle/>
           <a:p>
-            <a:pPr algn="l">
-              <a:lnSpc>
-                <a:spcPct val="115000"/>
-              </a:lnSpc>
-            </a:pPr>
-            <a:r>
-              <a:rPr sz="1875" b="1">
+            <a:pPr algn="ctr">
+              <a:lnSpc>
+                <a:spcPct val="100000"/>
+              </a:lnSpc>
+            </a:pPr>
+            <a:r>
+              <a:rPr sz="2250" b="1">
                 <a:solidFill>
                   <a:srgbClr val="0D2B5E"/>
                 </a:solidFill>
@@ -10352,539 +11448,14 @@
                 <a:ea typeface="Pretendard"/>
                 <a:cs typeface="Pretendard"/>
               </a:rPr>
-              <a:t>SHOW TABLES IN lake.db</a:t>
-            </a:r>
-          </a:p>
-        </p:txBody>
-      </p:sp>
-      <p:sp>
-        <p:nvSpPr>
-          <p:cNvPr id="14" name="Rounded Rectangle 13"/>
-          <p:cNvSpPr/>
-          <p:nvPr/>
-        </p:nvSpPr>
-        <p:spPr>
-          <a:xfrm>
-            <a:off x="9144000" y="3448050"/>
-            <a:ext cx="8001000" cy="647700"/>
-          </a:xfrm>
-          <a:prstGeom prst="roundRect">
-            <a:avLst>
-              <a:gd name="adj" fmla="val 5882"/>
-            </a:avLst>
-          </a:prstGeom>
-          <a:solidFill>
-            <a:srgbClr val="FAFBFD"/>
-          </a:solidFill>
-          <a:ln w="9525">
-            <a:solidFill>
-              <a:srgbClr val="DCE1E8"/>
-            </a:solidFill>
-          </a:ln>
-          <a:effectLst/>
-        </p:spPr>
-        <p:txBody>
-          <a:bodyPr rtlCol="0" anchor="ctr" wrap="square"/>
-          <a:lstStyle/>
-          <a:p>
-            <a:pPr algn="ctr"/>
-          </a:p>
-        </p:txBody>
-      </p:sp>
-      <p:sp>
-        <p:nvSpPr>
-          <p:cNvPr id="15" name="TextBox 14"/>
-          <p:cNvSpPr txBox="1"/>
-          <p:nvPr/>
-        </p:nvSpPr>
-        <p:spPr>
-          <a:xfrm>
-            <a:off x="9239250" y="3448050"/>
-            <a:ext cx="7810500" cy="647700"/>
-          </a:xfrm>
-          <a:prstGeom prst="rect">
-            <a:avLst/>
-          </a:prstGeom>
-          <a:noFill/>
-        </p:spPr>
-        <p:txBody>
-          <a:bodyPr wrap="square" lIns="0" rIns="0" tIns="0" bIns="0" anchor="ctr">
-            <a:spAutoFit/>
-          </a:bodyPr>
-          <a:lstStyle/>
-          <a:p>
-            <a:pPr algn="ctr">
-              <a:lnSpc>
-                <a:spcPct val="115000"/>
-              </a:lnSpc>
-            </a:pPr>
-            <a:r>
-              <a:rPr sz="1875" b="0">
-                <a:solidFill>
-                  <a:srgbClr val="3D3D3D"/>
-                </a:solidFill>
-                <a:latin typeface="Pretendard"/>
-                <a:ea typeface="Pretendard"/>
-                <a:cs typeface="Pretendard"/>
-              </a:rPr>
-              <a:t>orders</a:t>
-            </a:r>
-          </a:p>
-        </p:txBody>
-      </p:sp>
-      <p:sp>
-        <p:nvSpPr>
-          <p:cNvPr id="16" name="Rounded Rectangle 15"/>
-          <p:cNvSpPr/>
-          <p:nvPr/>
-        </p:nvSpPr>
-        <p:spPr>
-          <a:xfrm>
-            <a:off x="1143000" y="4171950"/>
-            <a:ext cx="7962900" cy="647700"/>
-          </a:xfrm>
-          <a:prstGeom prst="roundRect">
-            <a:avLst>
-              <a:gd name="adj" fmla="val 5882"/>
-            </a:avLst>
-          </a:prstGeom>
-          <a:solidFill>
-            <a:srgbClr val="EDF3FD"/>
-          </a:solidFill>
-          <a:ln w="9525">
-            <a:solidFill>
-              <a:srgbClr val="BFD3F5"/>
-            </a:solidFill>
-          </a:ln>
-          <a:effectLst/>
-        </p:spPr>
-        <p:txBody>
-          <a:bodyPr rtlCol="0" anchor="ctr" wrap="square"/>
-          <a:lstStyle/>
-          <a:p>
-            <a:pPr algn="ctr"/>
-          </a:p>
-        </p:txBody>
-      </p:sp>
-      <p:sp>
-        <p:nvSpPr>
-          <p:cNvPr id="17" name="TextBox 16"/>
-          <p:cNvSpPr txBox="1"/>
-          <p:nvPr/>
-        </p:nvSpPr>
-        <p:spPr>
-          <a:xfrm>
-            <a:off x="1238250" y="4171950"/>
-            <a:ext cx="7772400" cy="647700"/>
-          </a:xfrm>
-          <a:prstGeom prst="rect">
-            <a:avLst/>
-          </a:prstGeom>
-          <a:noFill/>
-        </p:spPr>
-        <p:txBody>
-          <a:bodyPr wrap="square" lIns="0" rIns="0" tIns="0" bIns="0" anchor="ctr">
-            <a:spAutoFit/>
-          </a:bodyPr>
-          <a:lstStyle/>
-          <a:p>
-            <a:pPr algn="l">
-              <a:lnSpc>
-                <a:spcPct val="115000"/>
-              </a:lnSpc>
-            </a:pPr>
-            <a:r>
-              <a:rPr sz="1875" b="1">
-                <a:solidFill>
-                  <a:srgbClr val="0D2B5E"/>
-                </a:solidFill>
-                <a:latin typeface="Pretendard"/>
-                <a:ea typeface="Pretendard"/>
-                <a:cs typeface="Pretendard"/>
-              </a:rPr>
-              <a:t>DESCRIBE TABLE lake.db.orders</a:t>
-            </a:r>
-          </a:p>
-        </p:txBody>
-      </p:sp>
-      <p:sp>
-        <p:nvSpPr>
-          <p:cNvPr id="18" name="Rounded Rectangle 17"/>
-          <p:cNvSpPr/>
-          <p:nvPr/>
-        </p:nvSpPr>
-        <p:spPr>
-          <a:xfrm>
-            <a:off x="9144000" y="4171950"/>
-            <a:ext cx="8001000" cy="647700"/>
-          </a:xfrm>
-          <a:prstGeom prst="roundRect">
-            <a:avLst>
-              <a:gd name="adj" fmla="val 5882"/>
-            </a:avLst>
-          </a:prstGeom>
-          <a:solidFill>
-            <a:srgbClr val="FAFBFD"/>
-          </a:solidFill>
-          <a:ln w="9525">
-            <a:solidFill>
-              <a:srgbClr val="DCE1E8"/>
-            </a:solidFill>
-          </a:ln>
-          <a:effectLst/>
-        </p:spPr>
-        <p:txBody>
-          <a:bodyPr rtlCol="0" anchor="ctr" wrap="square"/>
-          <a:lstStyle/>
-          <a:p>
-            <a:pPr algn="ctr"/>
-          </a:p>
-        </p:txBody>
-      </p:sp>
-      <p:sp>
-        <p:nvSpPr>
-          <p:cNvPr id="19" name="TextBox 18"/>
-          <p:cNvSpPr txBox="1"/>
-          <p:nvPr/>
-        </p:nvSpPr>
-        <p:spPr>
-          <a:xfrm>
-            <a:off x="9239250" y="4171950"/>
-            <a:ext cx="7810500" cy="647700"/>
-          </a:xfrm>
-          <a:prstGeom prst="rect">
-            <a:avLst/>
-          </a:prstGeom>
-          <a:noFill/>
-        </p:spPr>
-        <p:txBody>
-          <a:bodyPr wrap="square" lIns="0" rIns="0" tIns="0" bIns="0" anchor="ctr">
-            <a:spAutoFit/>
-          </a:bodyPr>
-          <a:lstStyle/>
-          <a:p>
-            <a:pPr algn="ctr">
-              <a:lnSpc>
-                <a:spcPct val="115000"/>
-              </a:lnSpc>
-            </a:pPr>
-            <a:r>
-              <a:rPr sz="1875" b="0">
-                <a:solidFill>
-                  <a:srgbClr val="3D3D3D"/>
-                </a:solidFill>
-                <a:latin typeface="Pretendard"/>
-                <a:ea typeface="Pretendard"/>
-                <a:cs typeface="Pretendard"/>
-              </a:rPr>
-              <a:t>id · item · price</a:t>
-            </a:r>
-          </a:p>
-        </p:txBody>
-      </p:sp>
-      <p:sp>
-        <p:nvSpPr>
-          <p:cNvPr id="20" name="Rounded Rectangle 19"/>
-          <p:cNvSpPr/>
-          <p:nvPr/>
-        </p:nvSpPr>
-        <p:spPr>
-          <a:xfrm>
-            <a:off x="1143000" y="4895850"/>
-            <a:ext cx="7962900" cy="647700"/>
-          </a:xfrm>
-          <a:prstGeom prst="roundRect">
-            <a:avLst>
-              <a:gd name="adj" fmla="val 5882"/>
-            </a:avLst>
-          </a:prstGeom>
-          <a:solidFill>
-            <a:srgbClr val="EDF3FD"/>
-          </a:solidFill>
-          <a:ln w="9525">
-            <a:solidFill>
-              <a:srgbClr val="BFD3F5"/>
-            </a:solidFill>
-          </a:ln>
-          <a:effectLst/>
-        </p:spPr>
-        <p:txBody>
-          <a:bodyPr rtlCol="0" anchor="ctr" wrap="square"/>
-          <a:lstStyle/>
-          <a:p>
-            <a:pPr algn="ctr"/>
-          </a:p>
-        </p:txBody>
-      </p:sp>
-      <p:sp>
-        <p:nvSpPr>
-          <p:cNvPr id="21" name="TextBox 20"/>
-          <p:cNvSpPr txBox="1"/>
-          <p:nvPr/>
-        </p:nvSpPr>
-        <p:spPr>
-          <a:xfrm>
-            <a:off x="1238250" y="4895850"/>
-            <a:ext cx="7772400" cy="647700"/>
-          </a:xfrm>
-          <a:prstGeom prst="rect">
-            <a:avLst/>
-          </a:prstGeom>
-          <a:noFill/>
-        </p:spPr>
-        <p:txBody>
-          <a:bodyPr wrap="square" lIns="0" rIns="0" tIns="0" bIns="0" anchor="ctr">
-            <a:spAutoFit/>
-          </a:bodyPr>
-          <a:lstStyle/>
-          <a:p>
-            <a:pPr algn="l">
-              <a:lnSpc>
-                <a:spcPct val="115000"/>
-              </a:lnSpc>
-            </a:pPr>
-            <a:r>
-              <a:rPr sz="1875" b="1">
-                <a:solidFill>
-                  <a:srgbClr val="0D2B5E"/>
-                </a:solidFill>
-                <a:latin typeface="Pretendard"/>
-                <a:ea typeface="Pretendard"/>
-                <a:cs typeface="Pretendard"/>
-              </a:rPr>
-              <a:t>lake.db.orders.snapshots</a:t>
-            </a:r>
-          </a:p>
-        </p:txBody>
-      </p:sp>
-      <p:sp>
-        <p:nvSpPr>
-          <p:cNvPr id="22" name="Rounded Rectangle 21"/>
-          <p:cNvSpPr/>
-          <p:nvPr/>
-        </p:nvSpPr>
-        <p:spPr>
-          <a:xfrm>
-            <a:off x="9144000" y="4895850"/>
-            <a:ext cx="8001000" cy="647700"/>
-          </a:xfrm>
-          <a:prstGeom prst="roundRect">
-            <a:avLst>
-              <a:gd name="adj" fmla="val 5882"/>
-            </a:avLst>
-          </a:prstGeom>
-          <a:solidFill>
-            <a:srgbClr val="FAFBFD"/>
-          </a:solidFill>
-          <a:ln w="9525">
-            <a:solidFill>
-              <a:srgbClr val="DCE1E8"/>
-            </a:solidFill>
-          </a:ln>
-          <a:effectLst/>
-        </p:spPr>
-        <p:txBody>
-          <a:bodyPr rtlCol="0" anchor="ctr" wrap="square"/>
-          <a:lstStyle/>
-          <a:p>
-            <a:pPr algn="ctr"/>
-          </a:p>
-        </p:txBody>
-      </p:sp>
-      <p:sp>
-        <p:nvSpPr>
-          <p:cNvPr id="23" name="TextBox 22"/>
-          <p:cNvSpPr txBox="1"/>
-          <p:nvPr/>
-        </p:nvSpPr>
-        <p:spPr>
-          <a:xfrm>
-            <a:off x="9239250" y="4895850"/>
-            <a:ext cx="7810500" cy="647700"/>
-          </a:xfrm>
-          <a:prstGeom prst="rect">
-            <a:avLst/>
-          </a:prstGeom>
-          <a:noFill/>
-        </p:spPr>
-        <p:txBody>
-          <a:bodyPr wrap="square" lIns="0" rIns="0" tIns="0" bIns="0" anchor="ctr">
-            <a:spAutoFit/>
-          </a:bodyPr>
-          <a:lstStyle/>
-          <a:p>
-            <a:pPr algn="ctr">
-              <a:lnSpc>
-                <a:spcPct val="115000"/>
-              </a:lnSpc>
-            </a:pPr>
-            <a:r>
-              <a:rPr sz="1875" b="0">
-                <a:solidFill>
-                  <a:srgbClr val="3D3D3D"/>
-                </a:solidFill>
-                <a:latin typeface="Pretendard"/>
-                <a:ea typeface="Pretendard"/>
-                <a:cs typeface="Pretendard"/>
-              </a:rPr>
-              <a:t>append 한 건</a:t>
-            </a:r>
-          </a:p>
-        </p:txBody>
-      </p:sp>
-      <p:sp>
-        <p:nvSpPr>
-          <p:cNvPr id="24" name="Rounded Rectangle 23"/>
-          <p:cNvSpPr/>
-          <p:nvPr/>
-        </p:nvSpPr>
-        <p:spPr>
-          <a:xfrm>
-            <a:off x="1143000" y="5619750"/>
-            <a:ext cx="7962900" cy="647700"/>
-          </a:xfrm>
-          <a:prstGeom prst="roundRect">
-            <a:avLst>
-              <a:gd name="adj" fmla="val 5882"/>
-            </a:avLst>
-          </a:prstGeom>
-          <a:solidFill>
-            <a:srgbClr val="EDF3FD"/>
-          </a:solidFill>
-          <a:ln w="9525">
-            <a:solidFill>
-              <a:srgbClr val="BFD3F5"/>
-            </a:solidFill>
-          </a:ln>
-          <a:effectLst/>
-        </p:spPr>
-        <p:txBody>
-          <a:bodyPr rtlCol="0" anchor="ctr" wrap="square"/>
-          <a:lstStyle/>
-          <a:p>
-            <a:pPr algn="ctr"/>
-          </a:p>
-        </p:txBody>
-      </p:sp>
-      <p:sp>
-        <p:nvSpPr>
-          <p:cNvPr id="25" name="TextBox 24"/>
-          <p:cNvSpPr txBox="1"/>
-          <p:nvPr/>
-        </p:nvSpPr>
-        <p:spPr>
-          <a:xfrm>
-            <a:off x="1238250" y="5619750"/>
-            <a:ext cx="7772400" cy="647700"/>
-          </a:xfrm>
-          <a:prstGeom prst="rect">
-            <a:avLst/>
-          </a:prstGeom>
-          <a:noFill/>
-        </p:spPr>
-        <p:txBody>
-          <a:bodyPr wrap="square" lIns="0" rIns="0" tIns="0" bIns="0" anchor="ctr">
-            <a:spAutoFit/>
-          </a:bodyPr>
-          <a:lstStyle/>
-          <a:p>
-            <a:pPr algn="l">
-              <a:lnSpc>
-                <a:spcPct val="115000"/>
-              </a:lnSpc>
-            </a:pPr>
-            <a:r>
-              <a:rPr sz="1875" b="1">
-                <a:solidFill>
-                  <a:srgbClr val="0D2B5E"/>
-                </a:solidFill>
-                <a:latin typeface="Pretendard"/>
-                <a:ea typeface="Pretendard"/>
-                <a:cs typeface="Pretendard"/>
-              </a:rPr>
-              <a:t>lake.db.orders.files</a:t>
-            </a:r>
-          </a:p>
-        </p:txBody>
-      </p:sp>
-      <p:sp>
-        <p:nvSpPr>
-          <p:cNvPr id="26" name="Rounded Rectangle 25"/>
-          <p:cNvSpPr/>
-          <p:nvPr/>
-        </p:nvSpPr>
-        <p:spPr>
-          <a:xfrm>
-            <a:off x="9144000" y="5619750"/>
-            <a:ext cx="8001000" cy="647700"/>
-          </a:xfrm>
-          <a:prstGeom prst="roundRect">
-            <a:avLst>
-              <a:gd name="adj" fmla="val 5882"/>
-            </a:avLst>
-          </a:prstGeom>
-          <a:solidFill>
-            <a:srgbClr val="FAFBFD"/>
-          </a:solidFill>
-          <a:ln w="9525">
-            <a:solidFill>
-              <a:srgbClr val="DCE1E8"/>
-            </a:solidFill>
-          </a:ln>
-          <a:effectLst/>
-        </p:spPr>
-        <p:txBody>
-          <a:bodyPr rtlCol="0" anchor="ctr" wrap="square"/>
-          <a:lstStyle/>
-          <a:p>
-            <a:pPr algn="ctr"/>
-          </a:p>
-        </p:txBody>
-      </p:sp>
-      <p:sp>
-        <p:nvSpPr>
-          <p:cNvPr id="27" name="TextBox 26"/>
-          <p:cNvSpPr txBox="1"/>
-          <p:nvPr/>
-        </p:nvSpPr>
-        <p:spPr>
-          <a:xfrm>
-            <a:off x="9239250" y="5619750"/>
-            <a:ext cx="7810500" cy="647700"/>
-          </a:xfrm>
-          <a:prstGeom prst="rect">
-            <a:avLst/>
-          </a:prstGeom>
-          <a:noFill/>
-        </p:spPr>
-        <p:txBody>
-          <a:bodyPr wrap="square" lIns="0" rIns="0" tIns="0" bIns="0" anchor="ctr">
-            <a:spAutoFit/>
-          </a:bodyPr>
-          <a:lstStyle/>
-          <a:p>
-            <a:pPr algn="ctr">
-              <a:lnSpc>
-                <a:spcPct val="115000"/>
-              </a:lnSpc>
-            </a:pPr>
-            <a:r>
-              <a:rPr sz="1875" b="0">
-                <a:solidFill>
-                  <a:srgbClr val="3D3D3D"/>
-                </a:solidFill>
-                <a:latin typeface="Pretendard"/>
-                <a:ea typeface="Pretendard"/>
-                <a:cs typeface="Pretendard"/>
-              </a:rPr>
-              <a:t>parquet 한 개 · file_path</a:t>
-            </a:r>
-          </a:p>
-        </p:txBody>
-      </p:sp>
-      <p:sp>
-        <p:nvSpPr>
-          <p:cNvPr id="28" name="TextBox 27"/>
+              <a:t>앞의 lake 폴더는 warehouse 값에서 온 것 — 카탈로그 이름이 자동으로 따라온 것이 아님</a:t>
+            </a:r>
+          </a:p>
+        </p:txBody>
+      </p:sp>
+      <p:sp>
+        <p:nvSpPr>
+          <p:cNvPr id="29" name="TextBox 28"/>
           <p:cNvSpPr txBox="1"/>
           <p:nvPr/>
         </p:nvSpPr>
@@ -10918,14 +11489,14 @@
                 <a:ea typeface="Pretendard"/>
                 <a:cs typeface="Pretendard"/>
               </a:rPr>
-              <a:t>file_path 가 s3a://warehouse/db/orders/data/… 로 시작하면 데이터가 MinIO 에 있다는 뜻</a:t>
-            </a:r>
-          </a:p>
-        </p:txBody>
-      </p:sp>
-      <p:sp>
-        <p:nvSpPr>
-          <p:cNvPr id="29" name="Rectangle 28"/>
+              <a:t>hadoop 타입은 폴더 구조가 곧 테이블 목록 — rest 와 달리 별도 서비스가 없다</a:t>
+            </a:r>
+          </a:p>
+        </p:txBody>
+      </p:sp>
+      <p:sp>
+        <p:nvSpPr>
+          <p:cNvPr id="30" name="Rectangle 29"/>
           <p:cNvSpPr/>
           <p:nvPr/>
         </p:nvSpPr>
@@ -10955,7 +11526,7 @@
       </p:sp>
       <p:sp>
         <p:nvSpPr>
-          <p:cNvPr id="30" name="TextBox 29"/>
+          <p:cNvPr id="31" name="TextBox 30"/>
           <p:cNvSpPr txBox="1"/>
           <p:nvPr/>
         </p:nvSpPr>
@@ -10996,7 +11567,7 @@
       </p:sp>
       <p:sp>
         <p:nvSpPr>
-          <p:cNvPr id="31" name="TextBox 30"/>
+          <p:cNvPr id="32" name="TextBox 31"/>
           <p:cNvSpPr txBox="1"/>
           <p:nvPr/>
         </p:nvSpPr>
@@ -11055,7 +11626,7 @@
       <p:grpSpPr/>
       <p:sp>
         <p:nvSpPr>
-          <p:cNvPr id="2" name="Oval 1"/>
+          <p:cNvPr id="2" name="deckgen:decor"/>
           <p:cNvSpPr/>
           <p:nvPr/>
         </p:nvSpPr>
@@ -11085,7 +11656,7 @@
       </p:sp>
       <p:sp>
         <p:nvSpPr>
-          <p:cNvPr id="3" name="Oval 2"/>
+          <p:cNvPr id="3" name="deckgen:decor"/>
           <p:cNvSpPr/>
           <p:nvPr/>
         </p:nvSpPr>
@@ -11115,7 +11686,7 @@
       </p:sp>
       <p:sp>
         <p:nvSpPr>
-          <p:cNvPr id="4" name="Oval 3"/>
+          <p:cNvPr id="4" name="deckgen:decor"/>
           <p:cNvSpPr/>
           <p:nvPr/>
         </p:nvSpPr>
@@ -11396,7 +11967,7 @@
                 <a:ea typeface="Pretendard"/>
                 <a:cs typeface="Pretendard"/>
               </a:rPr>
-              <a:t>INSERT 한 건 더</a:t>
+              <a:t>INSERT (4, 'webcam', 89000) · UPDATE id 1 → 47000</a:t>
             </a:r>
           </a:p>
         </p:txBody>
@@ -11437,7 +12008,7 @@
                 <a:ea typeface="Pretendard"/>
                 <a:cs typeface="Pretendard"/>
               </a:rPr>
-              <a:t>(4, 'webcam', 89000) — snapshots 에 append 가 하나 더</a:t>
+              <a:t>둘 다 DataFrame[] 한 줄 — UPDATE 는 파일을 다시 써서 overwrite</a:t>
             </a:r>
           </a:p>
         </p:txBody>
@@ -11583,7 +12154,7 @@
                 <a:ea typeface="Pretendard"/>
                 <a:cs typeface="Pretendard"/>
               </a:rPr>
-              <a:t>UPDATE id 1 의 price → 47000</a:t>
+              <a:t>snapshots ORDER BY committed_at</a:t>
             </a:r>
           </a:p>
         </p:txBody>
@@ -11624,7 +12195,7 @@
                 <a:ea typeface="Pretendard"/>
                 <a:cs typeface="Pretendard"/>
               </a:rPr>
-              <a:t>overwrite 로 기록 — 파일을 통째로 다시 쓰기 때문(4-2)</a:t>
+              <a:t>append · append · overwrite 세 줄, keyboard 47000.0</a:t>
             </a:r>
           </a:p>
         </p:txBody>
@@ -11770,7 +12341,7 @@
                 <a:ea typeface="Pretendard"/>
                 <a:cs typeface="Pretendard"/>
               </a:rPr>
-              <a:t>snapshots 3행</a:t>
+              <a:t>콘솔 metadata/</a:t>
             </a:r>
           </a:p>
         </p:txBody>
@@ -11811,7 +12382,7 @@
                 <a:ea typeface="Pretendard"/>
                 <a:cs typeface="Pretendard"/>
               </a:rPr>
-              <a:t>append · append · overwrite — committed_at 순으로 정렬</a:t>
+              <a:t>v1~v4.metadata.json · version-hint.text · snap-*.avro · *-m0.avro</a:t>
             </a:r>
           </a:p>
         </p:txBody>
@@ -11998,7 +12569,7 @@
                 <a:ea typeface="Pretendard"/>
                 <a:cs typeface="Pretendard"/>
               </a:rPr>
-              <a:t>3행 · id 1 의 price 45000 — 타임 트래블도 그대로</a:t>
+              <a:t>3행 · keyboard 45000.0 — 타임 트래블도 그대로</a:t>
             </a:r>
           </a:p>
         </p:txBody>
@@ -12073,7 +12644,7 @@
                 <a:ea typeface="Pretendard"/>
                 <a:cs typeface="Pretendard"/>
               </a:rPr>
-              <a:t>operation 값</a:t>
+              <a:t>최신 판 번호</a:t>
             </a:r>
           </a:p>
         </p:txBody>
@@ -12114,7 +12685,7 @@
                 <a:ea typeface="Pretendard"/>
                 <a:cs typeface="Pretendard"/>
               </a:rPr>
-              <a:t>append</a:t>
+              <a:t>version-</a:t>
             </a:r>
           </a:p>
           <a:p>
@@ -12132,7 +12703,7 @@
                 <a:ea typeface="Pretendard"/>
                 <a:cs typeface="Pretendard"/>
               </a:rPr>
-              <a:t>overwrite</a:t>
+              <a:t>hint.text</a:t>
             </a:r>
           </a:p>
         </p:txBody>
@@ -12269,7 +12840,7 @@
       <p:grpSpPr/>
       <p:sp>
         <p:nvSpPr>
-          <p:cNvPr id="2" name="Oval 1"/>
+          <p:cNvPr id="2" name="deckgen:decor"/>
           <p:cNvSpPr/>
           <p:nvPr/>
         </p:nvSpPr>
@@ -12299,7 +12870,7 @@
       </p:sp>
       <p:sp>
         <p:nvSpPr>
-          <p:cNvPr id="3" name="Oval 2"/>
+          <p:cNvPr id="3" name="deckgen:decor"/>
           <p:cNvSpPr/>
           <p:nvPr/>
         </p:nvSpPr>
@@ -12329,7 +12900,7 @@
       </p:sp>
       <p:sp>
         <p:nvSpPr>
-          <p:cNvPr id="4" name="Oval 3"/>
+          <p:cNvPr id="4" name="deckgen:decor"/>
           <p:cNvSpPr/>
           <p:nvPr/>
         </p:nvSpPr>
@@ -12393,7 +12964,7 @@
                 <a:ea typeface="Pretendard"/>
                 <a:cs typeface="Pretendard"/>
               </a:rPr>
-              <a:t>일부러 실패시키기</a:t>
+              <a:t>5·6단계 · 클러스터와 미니 과제</a:t>
             </a:r>
           </a:p>
         </p:txBody>
@@ -12434,7 +13005,7 @@
                 <a:ea typeface="Pretendard"/>
                 <a:cs typeface="Pretendard"/>
               </a:rPr>
-              <a:t>카탈로그 세 줄을 빼고 띄우면 — 무엇이 깨지나</a:t>
+              <a:t>클러스터에서 도는지 확인하고, 더 해 보기</a:t>
             </a:r>
           </a:p>
         </p:txBody>
@@ -12471,59 +13042,203 @@
       </p:sp>
       <p:sp>
         <p:nvSpPr>
-          <p:cNvPr id="8" name="TextBox 7"/>
-          <p:cNvSpPr txBox="1"/>
-          <p:nvPr/>
-        </p:nvSpPr>
-        <p:spPr>
-          <a:xfrm>
-            <a:off x="1143000" y="3067050"/>
-            <a:ext cx="16002000" cy="438150"/>
-          </a:xfrm>
-          <a:prstGeom prst="rect">
-            <a:avLst/>
-          </a:prstGeom>
-          <a:noFill/>
-        </p:spPr>
-        <p:txBody>
-          <a:bodyPr wrap="square" lIns="0" rIns="0" tIns="0" bIns="0" anchor="t">
-            <a:spAutoFit/>
-          </a:bodyPr>
-          <a:lstStyle/>
-          <a:p>
-            <a:pPr algn="l">
-              <a:lnSpc>
-                <a:spcPct val="130000"/>
-              </a:lnSpc>
-            </a:pPr>
-            <a:r>
-              <a:rPr sz="2550" b="1">
-                <a:solidFill>
-                  <a:srgbClr val="3D3D3D"/>
-                </a:solidFill>
-                <a:latin typeface="Pretendard"/>
-                <a:ea typeface="Pretendard"/>
-                <a:cs typeface="Pretendard"/>
-              </a:rPr>
-              <a:t>자주 겪는 오류를 미리 만나 둡니다 — 셸을 나가서 --conf 의 spark.sql.catalog.lake 세 줄을 뺀 채 다시 띄워 보세요</a:t>
-            </a:r>
-          </a:p>
-        </p:txBody>
-      </p:sp>
-      <p:sp>
-        <p:nvSpPr>
-          <p:cNvPr id="9" name="Rounded Rectangle 8"/>
-          <p:cNvSpPr/>
-          <p:nvPr/>
-        </p:nvSpPr>
-        <p:spPr>
-          <a:xfrm>
-            <a:off x="1143000" y="3924300"/>
-            <a:ext cx="3714750" cy="3143250"/>
+          <p:cNvPr id="8" name="Rounded Rectangle 7"/>
+          <p:cNvSpPr/>
+          <p:nvPr/>
+        </p:nvSpPr>
+        <p:spPr>
+          <a:xfrm>
+            <a:off x="1143000" y="3429000"/>
+            <a:ext cx="3714750" cy="2476500"/>
           </a:xfrm>
           <a:prstGeom prst="roundRect">
             <a:avLst>
-              <a:gd name="adj" fmla="val 1515"/>
+              <a:gd name="adj" fmla="val 1923"/>
+            </a:avLst>
+          </a:prstGeom>
+          <a:solidFill>
+            <a:srgbClr val="0D2B5E"/>
+          </a:solidFill>
+          <a:ln w="9525">
+            <a:solidFill>
+              <a:srgbClr val="0D2B5E"/>
+            </a:solidFill>
+          </a:ln>
+          <a:effectLst/>
+        </p:spPr>
+        <p:txBody>
+          <a:bodyPr rtlCol="0" anchor="ctr" wrap="square"/>
+          <a:lstStyle/>
+          <a:p>
+            <a:pPr algn="ctr"/>
+          </a:p>
+        </p:txBody>
+      </p:sp>
+      <p:sp>
+        <p:nvSpPr>
+          <p:cNvPr id="9" name="Rectangle 8"/>
+          <p:cNvSpPr/>
+          <p:nvPr/>
+        </p:nvSpPr>
+        <p:spPr>
+          <a:xfrm>
+            <a:off x="1143000" y="3429000"/>
+            <a:ext cx="3714750" cy="47625"/>
+          </a:xfrm>
+          <a:prstGeom prst="rect">
+            <a:avLst/>
+          </a:prstGeom>
+          <a:solidFill>
+            <a:srgbClr val="1E5BC6"/>
+          </a:solidFill>
+          <a:ln>
+            <a:noFill/>
+          </a:ln>
+          <a:effectLst/>
+        </p:spPr>
+        <p:txBody>
+          <a:bodyPr rtlCol="0" anchor="ctr" wrap="square"/>
+          <a:lstStyle/>
+          <a:p>
+            <a:pPr algn="ctr"/>
+          </a:p>
+        </p:txBody>
+      </p:sp>
+      <p:sp>
+        <p:nvSpPr>
+          <p:cNvPr id="10" name="deckgen:ornament"/>
+          <p:cNvSpPr txBox="1"/>
+          <p:nvPr/>
+        </p:nvSpPr>
+        <p:spPr>
+          <a:xfrm>
+            <a:off x="4000500" y="3638550"/>
+            <a:ext cx="590550" cy="400050"/>
+          </a:xfrm>
+          <a:prstGeom prst="rect">
+            <a:avLst/>
+          </a:prstGeom>
+          <a:noFill/>
+        </p:spPr>
+        <p:txBody>
+          <a:bodyPr wrap="square" lIns="0" rIns="0" tIns="0" bIns="0" anchor="t">
+            <a:spAutoFit/>
+          </a:bodyPr>
+          <a:lstStyle/>
+          <a:p>
+            <a:pPr algn="r">
+              <a:lnSpc>
+                <a:spcPct val="100000"/>
+              </a:lnSpc>
+            </a:pPr>
+            <a:r>
+              <a:rPr sz="2550" b="1">
+                <a:solidFill>
+                  <a:srgbClr val="3B4B7C"/>
+                </a:solidFill>
+                <a:latin typeface="Pretendard"/>
+                <a:ea typeface="Pretendard"/>
+                <a:cs typeface="Pretendard"/>
+              </a:rPr>
+              <a:t>01</a:t>
+            </a:r>
+          </a:p>
+        </p:txBody>
+      </p:sp>
+      <p:sp>
+        <p:nvSpPr>
+          <p:cNvPr id="11" name="TextBox 10"/>
+          <p:cNvSpPr txBox="1"/>
+          <p:nvPr/>
+        </p:nvSpPr>
+        <p:spPr>
+          <a:xfrm>
+            <a:off x="1466850" y="3752850"/>
+            <a:ext cx="3067050" cy="1828800"/>
+          </a:xfrm>
+          <a:prstGeom prst="rect">
+            <a:avLst/>
+          </a:prstGeom>
+          <a:noFill/>
+        </p:spPr>
+        <p:txBody>
+          <a:bodyPr wrap="square" lIns="0" rIns="0" tIns="0" bIns="0" anchor="ctr">
+            <a:spAutoFit/>
+          </a:bodyPr>
+          <a:lstStyle/>
+          <a:p>
+            <a:pPr>
+              <a:lnSpc>
+                <a:spcPct val="115000"/>
+              </a:lnSpc>
+            </a:pPr>
+            <a:r>
+              <a:rPr sz="2700" b="1">
+                <a:solidFill>
+                  <a:srgbClr val="FFFFFF"/>
+                </a:solidFill>
+                <a:latin typeface="Pretendard"/>
+                <a:ea typeface="Pretendard"/>
+                <a:cs typeface="Pretendard"/>
+              </a:rPr>
+              <a:t>5단계 클러스터</a:t>
+            </a:r>
+          </a:p>
+          <a:p>
+            <a:pPr>
+              <a:lnSpc>
+                <a:spcPct val="146000"/>
+              </a:lnSpc>
+              <a:spcBef>
+                <a:spcPts val="1050"/>
+              </a:spcBef>
+            </a:pPr>
+            <a:r>
+              <a:rPr sz="2025" b="0">
+                <a:solidFill>
+                  <a:srgbClr val="D9E2F0"/>
+                </a:solidFill>
+                <a:latin typeface="Pretendard"/>
+                <a:ea typeface="Pretendard"/>
+                <a:cs typeface="Pretendard"/>
+              </a:rPr>
+              <a:t>sparkContext.master</a:t>
+            </a:r>
+          </a:p>
+          <a:p>
+            <a:pPr>
+              <a:lnSpc>
+                <a:spcPct val="146000"/>
+              </a:lnSpc>
+            </a:pPr>
+            <a:r>
+              <a:rPr sz="2025" b="0">
+                <a:solidFill>
+                  <a:srgbClr val="D9E2F0"/>
+                </a:solidFill>
+                <a:latin typeface="Pretendard"/>
+                <a:ea typeface="Pretendard"/>
+                <a:cs typeface="Pretendard"/>
+              </a:rPr>
+              <a:t>spark-master:7077</a:t>
+            </a:r>
+          </a:p>
+        </p:txBody>
+      </p:sp>
+      <p:sp>
+        <p:nvSpPr>
+          <p:cNvPr id="12" name="Rounded Rectangle 11"/>
+          <p:cNvSpPr/>
+          <p:nvPr/>
+        </p:nvSpPr>
+        <p:spPr>
+          <a:xfrm>
+            <a:off x="5238750" y="3429000"/>
+            <a:ext cx="3714750" cy="2476500"/>
+          </a:xfrm>
+          <a:prstGeom prst="roundRect">
+            <a:avLst>
+              <a:gd name="adj" fmla="val 1923"/>
             </a:avLst>
           </a:prstGeom>
           <a:solidFill>
@@ -12546,20 +13261,20 @@
       </p:sp>
       <p:sp>
         <p:nvSpPr>
-          <p:cNvPr id="10" name="Rectangle 9"/>
-          <p:cNvSpPr/>
-          <p:nvPr/>
-        </p:nvSpPr>
-        <p:spPr>
-          <a:xfrm>
-            <a:off x="1143000" y="3924300"/>
-            <a:ext cx="3714750" cy="914400"/>
-          </a:xfrm>
-          <a:prstGeom prst="rect">
-            <a:avLst/>
-          </a:prstGeom>
-          <a:solidFill>
-            <a:srgbClr val="0D2B5E"/>
+          <p:cNvPr id="13" name="Rectangle 12"/>
+          <p:cNvSpPr/>
+          <p:nvPr/>
+        </p:nvSpPr>
+        <p:spPr>
+          <a:xfrm>
+            <a:off x="5238750" y="3429000"/>
+            <a:ext cx="3714750" cy="47625"/>
+          </a:xfrm>
+          <a:prstGeom prst="rect">
+            <a:avLst/>
+          </a:prstGeom>
+          <a:solidFill>
+            <a:srgbClr val="1E5BC6"/>
           </a:solidFill>
           <a:ln>
             <a:noFill/>
@@ -12576,14 +13291,14 @@
       </p:sp>
       <p:sp>
         <p:nvSpPr>
-          <p:cNvPr id="11" name="TextBox 10"/>
-          <p:cNvSpPr txBox="1"/>
-          <p:nvPr/>
-        </p:nvSpPr>
-        <p:spPr>
-          <a:xfrm>
-            <a:off x="1143000" y="4171950"/>
-            <a:ext cx="3714750" cy="419100"/>
+          <p:cNvPr id="14" name="deckgen:ornament"/>
+          <p:cNvSpPr txBox="1"/>
+          <p:nvPr/>
+        </p:nvSpPr>
+        <p:spPr>
+          <a:xfrm>
+            <a:off x="8096250" y="3638550"/>
+            <a:ext cx="590550" cy="400050"/>
           </a:xfrm>
           <a:prstGeom prst="rect">
             <a:avLst/>
@@ -12596,54 +13311,75 @@
           </a:bodyPr>
           <a:lstStyle/>
           <a:p>
-            <a:pPr algn="ctr">
+            <a:pPr algn="r">
               <a:lnSpc>
                 <a:spcPct val="100000"/>
               </a:lnSpc>
             </a:pPr>
             <a:r>
-              <a:rPr sz="2475" b="1">
-                <a:solidFill>
-                  <a:srgbClr val="FFFFFF"/>
-                </a:solidFill>
-                <a:latin typeface="Pretendard"/>
-                <a:ea typeface="Pretendard"/>
-                <a:cs typeface="Pretendard"/>
-              </a:rPr>
-              <a:t>세 줄 빼고 재실행</a:t>
-            </a:r>
-          </a:p>
-        </p:txBody>
-      </p:sp>
-      <p:sp>
-        <p:nvSpPr>
-          <p:cNvPr id="12" name="TextBox 11"/>
-          <p:cNvSpPr txBox="1"/>
-          <p:nvPr/>
-        </p:nvSpPr>
-        <p:spPr>
-          <a:xfrm>
-            <a:off x="1352550" y="5143500"/>
-            <a:ext cx="3295650" cy="1524000"/>
-          </a:xfrm>
-          <a:prstGeom prst="rect">
-            <a:avLst/>
-          </a:prstGeom>
-          <a:noFill/>
-        </p:spPr>
-        <p:txBody>
-          <a:bodyPr wrap="square" lIns="0" rIns="0" tIns="0" bIns="0" anchor="t">
-            <a:spAutoFit/>
-          </a:bodyPr>
-          <a:lstStyle/>
-          <a:p>
-            <a:pPr algn="ctr">
+              <a:rPr sz="2550" b="1">
+                <a:solidFill>
+                  <a:srgbClr val="E4EBF4"/>
+                </a:solidFill>
+                <a:latin typeface="Pretendard"/>
+                <a:ea typeface="Pretendard"/>
+                <a:cs typeface="Pretendard"/>
+              </a:rPr>
+              <a:t>02</a:t>
+            </a:r>
+          </a:p>
+        </p:txBody>
+      </p:sp>
+      <p:sp>
+        <p:nvSpPr>
+          <p:cNvPr id="15" name="TextBox 14"/>
+          <p:cNvSpPr txBox="1"/>
+          <p:nvPr/>
+        </p:nvSpPr>
+        <p:spPr>
+          <a:xfrm>
+            <a:off x="5562600" y="3752850"/>
+            <a:ext cx="3067050" cy="1828800"/>
+          </a:xfrm>
+          <a:prstGeom prst="rect">
+            <a:avLst/>
+          </a:prstGeom>
+          <a:noFill/>
+        </p:spPr>
+        <p:txBody>
+          <a:bodyPr wrap="square" lIns="0" rIns="0" tIns="0" bIns="0" anchor="ctr">
+            <a:spAutoFit/>
+          </a:bodyPr>
+          <a:lstStyle/>
+          <a:p>
+            <a:pPr>
+              <a:lnSpc>
+                <a:spcPct val="115000"/>
+              </a:lnSpc>
+            </a:pPr>
+            <a:r>
+              <a:rPr sz="2700" b="1">
+                <a:solidFill>
+                  <a:srgbClr val="0D2B5E"/>
+                </a:solidFill>
+                <a:latin typeface="Pretendard"/>
+                <a:ea typeface="Pretendard"/>
+                <a:cs typeface="Pretendard"/>
+              </a:rPr>
+              <a:t>파티션 테이블</a:t>
+            </a:r>
+          </a:p>
+          <a:p>
+            <a:pPr>
               <a:lnSpc>
                 <a:spcPct val="146000"/>
               </a:lnSpc>
-            </a:pPr>
-            <a:r>
-              <a:rPr sz="2100" b="0">
+              <a:spcBef>
+                <a:spcPts val="1050"/>
+              </a:spcBef>
+            </a:pPr>
+            <a:r>
+              <a:rPr sz="2025" b="0">
                 <a:solidFill>
                   <a:srgbClr val="3D3D3D"/>
                 </a:solidFill>
@@ -12651,17 +13387,17 @@
                 <a:ea typeface="Pretendard"/>
                 <a:cs typeface="Pretendard"/>
               </a:rPr>
-              <a:t>catalog.lake</a:t>
-            </a:r>
-          </a:p>
-          <a:p>
-            <a:pPr algn="ctr">
+              <a:t>PARTITIONED BY</a:t>
+            </a:r>
+          </a:p>
+          <a:p>
+            <a:pPr>
               <a:lnSpc>
                 <a:spcPct val="146000"/>
               </a:lnSpc>
             </a:pPr>
             <a:r>
-              <a:rPr sz="2100" b="0">
+              <a:rPr sz="2025" b="0">
                 <a:solidFill>
                   <a:srgbClr val="3D3D3D"/>
                 </a:solidFill>
@@ -12669,25 +13405,25 @@
                 <a:ea typeface="Pretendard"/>
                 <a:cs typeface="Pretendard"/>
               </a:rPr>
-              <a:t>type · warehouse</a:t>
-            </a:r>
-          </a:p>
-        </p:txBody>
-      </p:sp>
-      <p:sp>
-        <p:nvSpPr>
-          <p:cNvPr id="13" name="Rounded Rectangle 12"/>
-          <p:cNvSpPr/>
-          <p:nvPr/>
-        </p:nvSpPr>
-        <p:spPr>
-          <a:xfrm>
-            <a:off x="5238750" y="3924300"/>
-            <a:ext cx="3714750" cy="3143250"/>
+              <a:t>(item) 폴더 비교</a:t>
+            </a:r>
+          </a:p>
+        </p:txBody>
+      </p:sp>
+      <p:sp>
+        <p:nvSpPr>
+          <p:cNvPr id="16" name="Rounded Rectangle 15"/>
+          <p:cNvSpPr/>
+          <p:nvPr/>
+        </p:nvSpPr>
+        <p:spPr>
+          <a:xfrm>
+            <a:off x="9334500" y="3429000"/>
+            <a:ext cx="3714750" cy="2476500"/>
           </a:xfrm>
           <a:prstGeom prst="roundRect">
             <a:avLst>
-              <a:gd name="adj" fmla="val 1515"/>
+              <a:gd name="adj" fmla="val 1923"/>
             </a:avLst>
           </a:prstGeom>
           <a:solidFill>
@@ -12710,14 +13446,14 @@
       </p:sp>
       <p:sp>
         <p:nvSpPr>
-          <p:cNvPr id="14" name="Rectangle 13"/>
-          <p:cNvSpPr/>
-          <p:nvPr/>
-        </p:nvSpPr>
-        <p:spPr>
-          <a:xfrm>
-            <a:off x="5238750" y="3924300"/>
-            <a:ext cx="3714750" cy="914400"/>
+          <p:cNvPr id="17" name="Rectangle 16"/>
+          <p:cNvSpPr/>
+          <p:nvPr/>
+        </p:nvSpPr>
+        <p:spPr>
+          <a:xfrm>
+            <a:off x="9334500" y="3429000"/>
+            <a:ext cx="3714750" cy="47625"/>
           </a:xfrm>
           <a:prstGeom prst="rect">
             <a:avLst/>
@@ -12740,14 +13476,14 @@
       </p:sp>
       <p:sp>
         <p:nvSpPr>
-          <p:cNvPr id="15" name="TextBox 14"/>
-          <p:cNvSpPr txBox="1"/>
-          <p:nvPr/>
-        </p:nvSpPr>
-        <p:spPr>
-          <a:xfrm>
-            <a:off x="5238750" y="4171950"/>
-            <a:ext cx="3714750" cy="419100"/>
+          <p:cNvPr id="18" name="deckgen:ornament"/>
+          <p:cNvSpPr txBox="1"/>
+          <p:nvPr/>
+        </p:nvSpPr>
+        <p:spPr>
+          <a:xfrm>
+            <a:off x="12192000" y="3638550"/>
+            <a:ext cx="590550" cy="400050"/>
           </a:xfrm>
           <a:prstGeom prst="rect">
             <a:avLst/>
@@ -12760,54 +13496,75 @@
           </a:bodyPr>
           <a:lstStyle/>
           <a:p>
-            <a:pPr algn="ctr">
+            <a:pPr algn="r">
               <a:lnSpc>
                 <a:spcPct val="100000"/>
               </a:lnSpc>
             </a:pPr>
             <a:r>
-              <a:rPr sz="2475" b="1">
-                <a:solidFill>
-                  <a:srgbClr val="FFFFFF"/>
-                </a:solidFill>
-                <a:latin typeface="Pretendard"/>
-                <a:ea typeface="Pretendard"/>
-                <a:cs typeface="Pretendard"/>
-              </a:rPr>
-              <a:t>SHOW CATALOGS</a:t>
-            </a:r>
-          </a:p>
-        </p:txBody>
-      </p:sp>
-      <p:sp>
-        <p:nvSpPr>
-          <p:cNvPr id="16" name="TextBox 15"/>
-          <p:cNvSpPr txBox="1"/>
-          <p:nvPr/>
-        </p:nvSpPr>
-        <p:spPr>
-          <a:xfrm>
-            <a:off x="5448300" y="5143500"/>
-            <a:ext cx="3295650" cy="1524000"/>
-          </a:xfrm>
-          <a:prstGeom prst="rect">
-            <a:avLst/>
-          </a:prstGeom>
-          <a:noFill/>
-        </p:spPr>
-        <p:txBody>
-          <a:bodyPr wrap="square" lIns="0" rIns="0" tIns="0" bIns="0" anchor="t">
-            <a:spAutoFit/>
-          </a:bodyPr>
-          <a:lstStyle/>
-          <a:p>
-            <a:pPr algn="ctr">
+              <a:rPr sz="2550" b="1">
+                <a:solidFill>
+                  <a:srgbClr val="E4EBF4"/>
+                </a:solidFill>
+                <a:latin typeface="Pretendard"/>
+                <a:ea typeface="Pretendard"/>
+                <a:cs typeface="Pretendard"/>
+              </a:rPr>
+              <a:t>03</a:t>
+            </a:r>
+          </a:p>
+        </p:txBody>
+      </p:sp>
+      <p:sp>
+        <p:nvSpPr>
+          <p:cNvPr id="19" name="TextBox 18"/>
+          <p:cNvSpPr txBox="1"/>
+          <p:nvPr/>
+        </p:nvSpPr>
+        <p:spPr>
+          <a:xfrm>
+            <a:off x="9658350" y="3752850"/>
+            <a:ext cx="3067050" cy="1828800"/>
+          </a:xfrm>
+          <a:prstGeom prst="rect">
+            <a:avLst/>
+          </a:prstGeom>
+          <a:noFill/>
+        </p:spPr>
+        <p:txBody>
+          <a:bodyPr wrap="square" lIns="0" rIns="0" tIns="0" bIns="0" anchor="ctr">
+            <a:spAutoFit/>
+          </a:bodyPr>
+          <a:lstStyle/>
+          <a:p>
+            <a:pPr>
+              <a:lnSpc>
+                <a:spcPct val="115000"/>
+              </a:lnSpc>
+            </a:pPr>
+            <a:r>
+              <a:rPr sz="2700" b="1">
+                <a:solidFill>
+                  <a:srgbClr val="0D2B5E"/>
+                </a:solidFill>
+                <a:latin typeface="Pretendard"/>
+                <a:ea typeface="Pretendard"/>
+                <a:cs typeface="Pretendard"/>
+              </a:rPr>
+              <a:t>events.parquet</a:t>
+            </a:r>
+          </a:p>
+          <a:p>
+            <a:pPr>
               <a:lnSpc>
                 <a:spcPct val="146000"/>
               </a:lnSpc>
-            </a:pPr>
-            <a:r>
-              <a:rPr sz="2100" b="0">
+              <a:spcBef>
+                <a:spcPts val="1050"/>
+              </a:spcBef>
+            </a:pPr>
+            <a:r>
+              <a:rPr sz="2025" b="0">
                 <a:solidFill>
                   <a:srgbClr val="3D3D3D"/>
                 </a:solidFill>
@@ -12815,17 +13572,17 @@
                 <a:ea typeface="Pretendard"/>
                 <a:cs typeface="Pretendard"/>
               </a:rPr>
-              <a:t>lake 가</a:t>
-            </a:r>
-          </a:p>
-          <a:p>
-            <a:pPr algn="ctr">
+              <a:t>콘솔 Upload 뒤</a:t>
+            </a:r>
+          </a:p>
+          <a:p>
+            <a:pPr>
               <a:lnSpc>
                 <a:spcPct val="146000"/>
               </a:lnSpc>
             </a:pPr>
             <a:r>
-              <a:rPr sz="2100" b="0">
+              <a:rPr sz="2025" b="0">
                 <a:solidFill>
                   <a:srgbClr val="3D3D3D"/>
                 </a:solidFill>
@@ -12833,25 +13590,25 @@
                 <a:ea typeface="Pretendard"/>
                 <a:cs typeface="Pretendard"/>
               </a:rPr>
-              <a:t>보이지 않는다</a:t>
-            </a:r>
-          </a:p>
-        </p:txBody>
-      </p:sp>
-      <p:sp>
-        <p:nvSpPr>
-          <p:cNvPr id="17" name="Rounded Rectangle 16"/>
-          <p:cNvSpPr/>
-          <p:nvPr/>
-        </p:nvSpPr>
-        <p:spPr>
-          <a:xfrm>
-            <a:off x="9334500" y="3924300"/>
-            <a:ext cx="3714750" cy="3143250"/>
+              <a:t>Iceberg 로 적재</a:t>
+            </a:r>
+          </a:p>
+        </p:txBody>
+      </p:sp>
+      <p:sp>
+        <p:nvSpPr>
+          <p:cNvPr id="20" name="Rounded Rectangle 19"/>
+          <p:cNvSpPr/>
+          <p:nvPr/>
+        </p:nvSpPr>
+        <p:spPr>
+          <a:xfrm>
+            <a:off x="13430250" y="3429000"/>
+            <a:ext cx="3714750" cy="2476500"/>
           </a:xfrm>
           <a:prstGeom prst="roundRect">
             <a:avLst>
-              <a:gd name="adj" fmla="val 1515"/>
+              <a:gd name="adj" fmla="val 1923"/>
             </a:avLst>
           </a:prstGeom>
           <a:solidFill>
@@ -12874,20 +13631,20 @@
       </p:sp>
       <p:sp>
         <p:nvSpPr>
-          <p:cNvPr id="18" name="Rectangle 17"/>
-          <p:cNvSpPr/>
-          <p:nvPr/>
-        </p:nvSpPr>
-        <p:spPr>
-          <a:xfrm>
-            <a:off x="9334500" y="3924300"/>
-            <a:ext cx="3714750" cy="914400"/>
-          </a:xfrm>
-          <a:prstGeom prst="rect">
-            <a:avLst/>
-          </a:prstGeom>
-          <a:solidFill>
-            <a:srgbClr val="0D2B5E"/>
+          <p:cNvPr id="21" name="Rectangle 20"/>
+          <p:cNvSpPr/>
+          <p:nvPr/>
+        </p:nvSpPr>
+        <p:spPr>
+          <a:xfrm>
+            <a:off x="13430250" y="3429000"/>
+            <a:ext cx="3714750" cy="47625"/>
+          </a:xfrm>
+          <a:prstGeom prst="rect">
+            <a:avLst/>
+          </a:prstGeom>
+          <a:solidFill>
+            <a:srgbClr val="1E5BC6"/>
           </a:solidFill>
           <a:ln>
             <a:noFill/>
@@ -12904,14 +13661,14 @@
       </p:sp>
       <p:sp>
         <p:nvSpPr>
-          <p:cNvPr id="19" name="TextBox 18"/>
-          <p:cNvSpPr txBox="1"/>
-          <p:nvPr/>
-        </p:nvSpPr>
-        <p:spPr>
-          <a:xfrm>
-            <a:off x="9334500" y="4171950"/>
-            <a:ext cx="3714750" cy="419100"/>
+          <p:cNvPr id="22" name="deckgen:ornament"/>
+          <p:cNvSpPr txBox="1"/>
+          <p:nvPr/>
+        </p:nvSpPr>
+        <p:spPr>
+          <a:xfrm>
+            <a:off x="16287750" y="3638550"/>
+            <a:ext cx="590550" cy="400050"/>
           </a:xfrm>
           <a:prstGeom prst="rect">
             <a:avLst/>
@@ -12924,54 +13681,75 @@
           </a:bodyPr>
           <a:lstStyle/>
           <a:p>
-            <a:pPr algn="ctr">
+            <a:pPr algn="r">
               <a:lnSpc>
                 <a:spcPct val="100000"/>
               </a:lnSpc>
             </a:pPr>
             <a:r>
-              <a:rPr sz="2475" b="1">
-                <a:solidFill>
-                  <a:srgbClr val="FFFFFF"/>
-                </a:solidFill>
-                <a:latin typeface="Pretendard"/>
-                <a:ea typeface="Pretendard"/>
-                <a:cs typeface="Pretendard"/>
-              </a:rPr>
-              <a:t>CREATE TABLE lake…</a:t>
-            </a:r>
-          </a:p>
-        </p:txBody>
-      </p:sp>
-      <p:sp>
-        <p:nvSpPr>
-          <p:cNvPr id="20" name="TextBox 19"/>
-          <p:cNvSpPr txBox="1"/>
-          <p:nvPr/>
-        </p:nvSpPr>
-        <p:spPr>
-          <a:xfrm>
-            <a:off x="9544050" y="5143500"/>
-            <a:ext cx="3295650" cy="1524000"/>
-          </a:xfrm>
-          <a:prstGeom prst="rect">
-            <a:avLst/>
-          </a:prstGeom>
-          <a:noFill/>
-        </p:spPr>
-        <p:txBody>
-          <a:bodyPr wrap="square" lIns="0" rIns="0" tIns="0" bIns="0" anchor="t">
-            <a:spAutoFit/>
-          </a:bodyPr>
-          <a:lstStyle/>
-          <a:p>
-            <a:pPr algn="ctr">
+              <a:rPr sz="2550" b="1">
+                <a:solidFill>
+                  <a:srgbClr val="E4EBF4"/>
+                </a:solidFill>
+                <a:latin typeface="Pretendard"/>
+                <a:ea typeface="Pretendard"/>
+                <a:cs typeface="Pretendard"/>
+              </a:rPr>
+              <a:t>04</a:t>
+            </a:r>
+          </a:p>
+        </p:txBody>
+      </p:sp>
+      <p:sp>
+        <p:nvSpPr>
+          <p:cNvPr id="23" name="TextBox 22"/>
+          <p:cNvSpPr txBox="1"/>
+          <p:nvPr/>
+        </p:nvSpPr>
+        <p:spPr>
+          <a:xfrm>
+            <a:off x="13754100" y="3752850"/>
+            <a:ext cx="3067050" cy="1828800"/>
+          </a:xfrm>
+          <a:prstGeom prst="rect">
+            <a:avLst/>
+          </a:prstGeom>
+          <a:noFill/>
+        </p:spPr>
+        <p:txBody>
+          <a:bodyPr wrap="square" lIns="0" rIns="0" tIns="0" bIns="0" anchor="ctr">
+            <a:spAutoFit/>
+          </a:bodyPr>
+          <a:lstStyle/>
+          <a:p>
+            <a:pPr>
+              <a:lnSpc>
+                <a:spcPct val="115000"/>
+              </a:lnSpc>
+            </a:pPr>
+            <a:r>
+              <a:rPr sz="2700" b="1">
+                <a:solidFill>
+                  <a:srgbClr val="0D2B5E"/>
+                </a:solidFill>
+                <a:latin typeface="Pretendard"/>
+                <a:ea typeface="Pretendard"/>
+                <a:cs typeface="Pretendard"/>
+              </a:rPr>
+              <a:t>CTAS 집계</a:t>
+            </a:r>
+          </a:p>
+          <a:p>
+            <a:pPr>
               <a:lnSpc>
                 <a:spcPct val="146000"/>
               </a:lnSpc>
-            </a:pPr>
-            <a:r>
-              <a:rPr sz="2100" b="0">
+              <a:spcBef>
+                <a:spcPts val="1050"/>
+              </a:spcBef>
+            </a:pPr>
+            <a:r>
+              <a:rPr sz="2025" b="0">
                 <a:solidFill>
                   <a:srgbClr val="3D3D3D"/>
                 </a:solidFill>
@@ -12979,17 +13757,17 @@
                 <a:ea typeface="Pretendard"/>
                 <a:cs typeface="Pretendard"/>
               </a:rPr>
-              <a:t>Cannot find</a:t>
-            </a:r>
-          </a:p>
-          <a:p>
-            <a:pPr algn="ctr">
+              <a:t>lake.db.summary</a:t>
+            </a:r>
+          </a:p>
+          <a:p>
+            <a:pPr>
               <a:lnSpc>
                 <a:spcPct val="146000"/>
               </a:lnSpc>
             </a:pPr>
             <a:r>
-              <a:rPr sz="2100" b="0">
+              <a:rPr sz="2025" b="0">
                 <a:solidFill>
                   <a:srgbClr val="3D3D3D"/>
                 </a:solidFill>
@@ -12997,55 +13775,21 @@
                 <a:ea typeface="Pretendard"/>
                 <a:cs typeface="Pretendard"/>
               </a:rPr>
-              <a:t>catalog plugin</a:t>
-            </a:r>
-          </a:p>
-        </p:txBody>
-      </p:sp>
-      <p:sp>
-        <p:nvSpPr>
-          <p:cNvPr id="21" name="Rounded Rectangle 20"/>
-          <p:cNvSpPr/>
-          <p:nvPr/>
-        </p:nvSpPr>
-        <p:spPr>
-          <a:xfrm>
-            <a:off x="13430250" y="3924300"/>
-            <a:ext cx="3714750" cy="3143250"/>
-          </a:xfrm>
-          <a:prstGeom prst="roundRect">
-            <a:avLst>
-              <a:gd name="adj" fmla="val 1515"/>
-            </a:avLst>
-          </a:prstGeom>
-          <a:solidFill>
-            <a:srgbClr val="FAFBFD"/>
-          </a:solidFill>
-          <a:ln w="9525">
-            <a:solidFill>
-              <a:srgbClr val="DCE1E8"/>
-            </a:solidFill>
-          </a:ln>
-          <a:effectLst/>
-        </p:spPr>
-        <p:txBody>
-          <a:bodyPr rtlCol="0" anchor="ctr" wrap="square"/>
-          <a:lstStyle/>
-          <a:p>
-            <a:pPr algn="ctr"/>
-          </a:p>
-        </p:txBody>
-      </p:sp>
-      <p:sp>
-        <p:nvSpPr>
-          <p:cNvPr id="22" name="Rectangle 21"/>
-          <p:cNvSpPr/>
-          <p:nvPr/>
-        </p:nvSpPr>
-        <p:spPr>
-          <a:xfrm>
-            <a:off x="13430250" y="3924300"/>
-            <a:ext cx="3714750" cy="914400"/>
+              <a:t>AS SELECT …</a:t>
+            </a:r>
+          </a:p>
+        </p:txBody>
+      </p:sp>
+      <p:sp>
+        <p:nvSpPr>
+          <p:cNvPr id="24" name="Rectangle 23"/>
+          <p:cNvSpPr/>
+          <p:nvPr/>
+        </p:nvSpPr>
+        <p:spPr>
+          <a:xfrm>
+            <a:off x="1143000" y="6496050"/>
+            <a:ext cx="47625" cy="723900"/>
           </a:xfrm>
           <a:prstGeom prst="rect">
             <a:avLst/>
@@ -13068,14 +13812,14 @@
       </p:sp>
       <p:sp>
         <p:nvSpPr>
-          <p:cNvPr id="23" name="TextBox 22"/>
-          <p:cNvSpPr txBox="1"/>
-          <p:nvPr/>
-        </p:nvSpPr>
-        <p:spPr>
-          <a:xfrm>
-            <a:off x="13430250" y="4171950"/>
-            <a:ext cx="3714750" cy="419100"/>
+          <p:cNvPr id="25" name="TextBox 24"/>
+          <p:cNvSpPr txBox="1"/>
+          <p:nvPr/>
+        </p:nvSpPr>
+        <p:spPr>
+          <a:xfrm>
+            <a:off x="1390650" y="6553200"/>
+            <a:ext cx="15754350" cy="762000"/>
           </a:xfrm>
           <a:prstGeom prst="rect">
             <a:avLst/>
@@ -13088,87 +13832,28 @@
           </a:bodyPr>
           <a:lstStyle/>
           <a:p>
-            <a:pPr algn="ctr">
-              <a:lnSpc>
-                <a:spcPct val="100000"/>
-              </a:lnSpc>
-            </a:pPr>
-            <a:r>
-              <a:rPr sz="2475" b="1">
-                <a:solidFill>
-                  <a:srgbClr val="FFFFFF"/>
-                </a:solidFill>
-                <a:latin typeface="Pretendard"/>
-                <a:ea typeface="Pretendard"/>
-                <a:cs typeface="Pretendard"/>
-              </a:rPr>
-              <a:t>세 줄 복구</a:t>
-            </a:r>
-          </a:p>
-        </p:txBody>
-      </p:sp>
-      <p:sp>
-        <p:nvSpPr>
-          <p:cNvPr id="24" name="TextBox 23"/>
-          <p:cNvSpPr txBox="1"/>
-          <p:nvPr/>
-        </p:nvSpPr>
-        <p:spPr>
-          <a:xfrm>
-            <a:off x="13639800" y="5143500"/>
-            <a:ext cx="3295650" cy="1524000"/>
-          </a:xfrm>
-          <a:prstGeom prst="rect">
-            <a:avLst/>
-          </a:prstGeom>
-          <a:noFill/>
-        </p:spPr>
-        <p:txBody>
-          <a:bodyPr wrap="square" lIns="0" rIns="0" tIns="0" bIns="0" anchor="t">
-            <a:spAutoFit/>
-          </a:bodyPr>
-          <a:lstStyle/>
-          <a:p>
-            <a:pPr algn="ctr">
-              <a:lnSpc>
-                <a:spcPct val="146000"/>
-              </a:lnSpc>
-            </a:pPr>
-            <a:r>
-              <a:rPr sz="2100" b="0">
-                <a:solidFill>
-                  <a:srgbClr val="3D3D3D"/>
-                </a:solidFill>
-                <a:latin typeface="Pretendard"/>
-                <a:ea typeface="Pretendard"/>
-                <a:cs typeface="Pretendard"/>
-              </a:rPr>
-              <a:t>다시 띄워</a:t>
-            </a:r>
-          </a:p>
-          <a:p>
-            <a:pPr algn="ctr">
-              <a:lnSpc>
-                <a:spcPct val="146000"/>
-              </a:lnSpc>
-            </a:pPr>
-            <a:r>
-              <a:rPr sz="2100" b="0">
-                <a:solidFill>
-                  <a:srgbClr val="3D3D3D"/>
-                </a:solidFill>
-                <a:latin typeface="Pretendard"/>
-                <a:ea typeface="Pretendard"/>
-                <a:cs typeface="Pretendard"/>
-              </a:rPr>
-              <a:t>lake 확인</a:t>
-            </a:r>
-          </a:p>
-        </p:txBody>
-      </p:sp>
-      <p:sp>
-        <p:nvSpPr>
-          <p:cNvPr id="25" name="Rectangle 24"/>
+            <a:pPr algn="l">
+              <a:lnSpc>
+                <a:spcPct val="150000"/>
+              </a:lnSpc>
+            </a:pPr>
+            <a:r>
+              <a:rPr sz="2025" b="1">
+                <a:solidFill>
+                  <a:srgbClr val="7D7D7D"/>
+                </a:solidFill>
+                <a:latin typeface="Pretendard"/>
+                <a:ea typeface="Pretendard"/>
+                <a:cs typeface="Pretendard"/>
+              </a:rPr>
+              <a:t>마스터 UI(8080) Running Applications 에 PySparkShell · Cores 4 · RUNNING</a:t>
+            </a:r>
+          </a:p>
+        </p:txBody>
+      </p:sp>
+      <p:sp>
+        <p:nvSpPr>
+          <p:cNvPr id="26" name="Rectangle 25"/>
           <p:cNvSpPr/>
           <p:nvPr/>
         </p:nvSpPr>
@@ -13198,7 +13883,7 @@
       </p:sp>
       <p:sp>
         <p:nvSpPr>
-          <p:cNvPr id="26" name="TextBox 25"/>
+          <p:cNvPr id="27" name="TextBox 26"/>
           <p:cNvSpPr txBox="1"/>
           <p:nvPr/>
         </p:nvSpPr>
@@ -13239,7 +13924,7 @@
       </p:sp>
       <p:sp>
         <p:nvSpPr>
-          <p:cNvPr id="27" name="TextBox 26"/>
+          <p:cNvPr id="28" name="TextBox 27"/>
           <p:cNvSpPr txBox="1"/>
           <p:nvPr/>
         </p:nvSpPr>
@@ -13298,7 +13983,7 @@
       <p:grpSpPr/>
       <p:sp>
         <p:nvSpPr>
-          <p:cNvPr id="2" name="Oval 1"/>
+          <p:cNvPr id="2" name="deckgen:decor"/>
           <p:cNvSpPr/>
           <p:nvPr/>
         </p:nvSpPr>
@@ -13328,7 +14013,7 @@
       </p:sp>
       <p:sp>
         <p:nvSpPr>
-          <p:cNvPr id="3" name="Oval 2"/>
+          <p:cNvPr id="3" name="deckgen:decor"/>
           <p:cNvSpPr/>
           <p:nvPr/>
         </p:nvSpPr>
@@ -13358,7 +14043,7 @@
       </p:sp>
       <p:sp>
         <p:nvSpPr>
-          <p:cNvPr id="4" name="Oval 3"/>
+          <p:cNvPr id="4" name="deckgen:decor"/>
           <p:cNvSpPr/>
           <p:nvPr/>
         </p:nvSpPr>
@@ -13422,7 +14107,7 @@
                 <a:ea typeface="Pretendard"/>
                 <a:cs typeface="Pretendard"/>
               </a:rPr>
-              <a:t>5단계 · 미니 과제</a:t>
+              <a:t>일부러 실패시키기</a:t>
             </a:r>
           </a:p>
         </p:txBody>
@@ -13463,7 +14148,7 @@
                 <a:ea typeface="Pretendard"/>
                 <a:cs typeface="Pretendard"/>
               </a:rPr>
-              <a:t>클러스터에서 돌고 있는지 확인하고, 더 해 보기</a:t>
+              <a:t>메시지로 빠진 것을 찾는다</a:t>
             </a:r>
           </a:p>
         </p:txBody>
@@ -13500,26 +14185,239 @@
       </p:sp>
       <p:sp>
         <p:nvSpPr>
-          <p:cNvPr id="8" name="Rounded Rectangle 7"/>
-          <p:cNvSpPr/>
-          <p:nvPr/>
-        </p:nvSpPr>
-        <p:spPr>
-          <a:xfrm>
-            <a:off x="1143000" y="3429000"/>
-            <a:ext cx="3714750" cy="2476500"/>
+          <p:cNvPr id="8" name="Rectangle 7"/>
+          <p:cNvSpPr/>
+          <p:nvPr/>
+        </p:nvSpPr>
+        <p:spPr>
+          <a:xfrm>
+            <a:off x="1143000" y="2781300"/>
+            <a:ext cx="4762500" cy="590550"/>
+          </a:xfrm>
+          <a:prstGeom prst="rect">
+            <a:avLst/>
+          </a:prstGeom>
+          <a:solidFill>
+            <a:srgbClr val="0D2B5E"/>
+          </a:solidFill>
+          <a:ln>
+            <a:noFill/>
+          </a:ln>
+          <a:effectLst/>
+        </p:spPr>
+        <p:txBody>
+          <a:bodyPr rtlCol="0" anchor="ctr" wrap="square"/>
+          <a:lstStyle/>
+          <a:p>
+            <a:pPr algn="ctr"/>
+          </a:p>
+        </p:txBody>
+      </p:sp>
+      <p:sp>
+        <p:nvSpPr>
+          <p:cNvPr id="9" name="TextBox 8"/>
+          <p:cNvSpPr txBox="1"/>
+          <p:nvPr/>
+        </p:nvSpPr>
+        <p:spPr>
+          <a:xfrm>
+            <a:off x="1143000" y="2781300"/>
+            <a:ext cx="4762500" cy="590550"/>
+          </a:xfrm>
+          <a:prstGeom prst="rect">
+            <a:avLst/>
+          </a:prstGeom>
+          <a:noFill/>
+        </p:spPr>
+        <p:txBody>
+          <a:bodyPr wrap="square" lIns="0" rIns="0" tIns="0" bIns="0" anchor="ctr">
+            <a:spAutoFit/>
+          </a:bodyPr>
+          <a:lstStyle/>
+          <a:p>
+            <a:pPr algn="ctr">
+              <a:lnSpc>
+                <a:spcPct val="100000"/>
+              </a:lnSpc>
+            </a:pPr>
+            <a:r>
+              <a:rPr sz="2025" b="1">
+                <a:solidFill>
+                  <a:srgbClr val="FFFFFF"/>
+                </a:solidFill>
+                <a:latin typeface="Pretendard"/>
+                <a:ea typeface="Pretendard"/>
+                <a:cs typeface="Pretendard"/>
+              </a:rPr>
+              <a:t>상황</a:t>
+            </a:r>
+          </a:p>
+        </p:txBody>
+      </p:sp>
+      <p:sp>
+        <p:nvSpPr>
+          <p:cNvPr id="10" name="Rectangle 9"/>
+          <p:cNvSpPr/>
+          <p:nvPr/>
+        </p:nvSpPr>
+        <p:spPr>
+          <a:xfrm>
+            <a:off x="5943600" y="2781300"/>
+            <a:ext cx="6682740" cy="590550"/>
+          </a:xfrm>
+          <a:prstGeom prst="rect">
+            <a:avLst/>
+          </a:prstGeom>
+          <a:solidFill>
+            <a:srgbClr val="1E5BC6"/>
+          </a:solidFill>
+          <a:ln>
+            <a:noFill/>
+          </a:ln>
+          <a:effectLst/>
+        </p:spPr>
+        <p:txBody>
+          <a:bodyPr rtlCol="0" anchor="ctr" wrap="square"/>
+          <a:lstStyle/>
+          <a:p>
+            <a:pPr algn="ctr"/>
+          </a:p>
+        </p:txBody>
+      </p:sp>
+      <p:sp>
+        <p:nvSpPr>
+          <p:cNvPr id="11" name="TextBox 10"/>
+          <p:cNvSpPr txBox="1"/>
+          <p:nvPr/>
+        </p:nvSpPr>
+        <p:spPr>
+          <a:xfrm>
+            <a:off x="5943600" y="2781300"/>
+            <a:ext cx="6682740" cy="590550"/>
+          </a:xfrm>
+          <a:prstGeom prst="rect">
+            <a:avLst/>
+          </a:prstGeom>
+          <a:noFill/>
+        </p:spPr>
+        <p:txBody>
+          <a:bodyPr wrap="square" lIns="0" rIns="0" tIns="0" bIns="0" anchor="ctr">
+            <a:spAutoFit/>
+          </a:bodyPr>
+          <a:lstStyle/>
+          <a:p>
+            <a:pPr algn="ctr">
+              <a:lnSpc>
+                <a:spcPct val="100000"/>
+              </a:lnSpc>
+            </a:pPr>
+            <a:r>
+              <a:rPr sz="2025" b="1">
+                <a:solidFill>
+                  <a:srgbClr val="FFFFFF"/>
+                </a:solidFill>
+                <a:latin typeface="Pretendard"/>
+                <a:ea typeface="Pretendard"/>
+                <a:cs typeface="Pretendard"/>
+              </a:rPr>
+              <a:t>나는 오류</a:t>
+            </a:r>
+          </a:p>
+        </p:txBody>
+      </p:sp>
+      <p:sp>
+        <p:nvSpPr>
+          <p:cNvPr id="12" name="Rectangle 11"/>
+          <p:cNvSpPr/>
+          <p:nvPr/>
+        </p:nvSpPr>
+        <p:spPr>
+          <a:xfrm>
+            <a:off x="12664440" y="2781300"/>
+            <a:ext cx="4480560" cy="590550"/>
+          </a:xfrm>
+          <a:prstGeom prst="rect">
+            <a:avLst/>
+          </a:prstGeom>
+          <a:solidFill>
+            <a:srgbClr val="1E5BC6"/>
+          </a:solidFill>
+          <a:ln>
+            <a:noFill/>
+          </a:ln>
+          <a:effectLst/>
+        </p:spPr>
+        <p:txBody>
+          <a:bodyPr rtlCol="0" anchor="ctr" wrap="square"/>
+          <a:lstStyle/>
+          <a:p>
+            <a:pPr algn="ctr"/>
+          </a:p>
+        </p:txBody>
+      </p:sp>
+      <p:sp>
+        <p:nvSpPr>
+          <p:cNvPr id="13" name="TextBox 12"/>
+          <p:cNvSpPr txBox="1"/>
+          <p:nvPr/>
+        </p:nvSpPr>
+        <p:spPr>
+          <a:xfrm>
+            <a:off x="12664440" y="2781300"/>
+            <a:ext cx="4480560" cy="590550"/>
+          </a:xfrm>
+          <a:prstGeom prst="rect">
+            <a:avLst/>
+          </a:prstGeom>
+          <a:noFill/>
+        </p:spPr>
+        <p:txBody>
+          <a:bodyPr wrap="square" lIns="0" rIns="0" tIns="0" bIns="0" anchor="ctr">
+            <a:spAutoFit/>
+          </a:bodyPr>
+          <a:lstStyle/>
+          <a:p>
+            <a:pPr algn="ctr">
+              <a:lnSpc>
+                <a:spcPct val="100000"/>
+              </a:lnSpc>
+            </a:pPr>
+            <a:r>
+              <a:rPr sz="2025" b="1">
+                <a:solidFill>
+                  <a:srgbClr val="FFFFFF"/>
+                </a:solidFill>
+                <a:latin typeface="Pretendard"/>
+                <a:ea typeface="Pretendard"/>
+                <a:cs typeface="Pretendard"/>
+              </a:rPr>
+              <a:t>뜻</a:t>
+            </a:r>
+          </a:p>
+        </p:txBody>
+      </p:sp>
+      <p:sp>
+        <p:nvSpPr>
+          <p:cNvPr id="14" name="Rounded Rectangle 13"/>
+          <p:cNvSpPr/>
+          <p:nvPr/>
+        </p:nvSpPr>
+        <p:spPr>
+          <a:xfrm>
+            <a:off x="1143000" y="3448050"/>
+            <a:ext cx="4762500" cy="647700"/>
           </a:xfrm>
           <a:prstGeom prst="roundRect">
             <a:avLst>
-              <a:gd name="adj" fmla="val 1923"/>
+              <a:gd name="adj" fmla="val 5882"/>
             </a:avLst>
           </a:prstGeom>
           <a:solidFill>
-            <a:srgbClr val="0D2B5E"/>
+            <a:srgbClr val="EDF3FD"/>
           </a:solidFill>
           <a:ln w="9525">
             <a:solidFill>
-              <a:srgbClr val="0D2B5E"/>
+              <a:srgbClr val="BFD3F5"/>
             </a:solidFill>
           </a:ln>
           <a:effectLst/>
@@ -13534,85 +14432,14 @@
       </p:sp>
       <p:sp>
         <p:nvSpPr>
-          <p:cNvPr id="9" name="Rectangle 8"/>
-          <p:cNvSpPr/>
-          <p:nvPr/>
-        </p:nvSpPr>
-        <p:spPr>
-          <a:xfrm>
-            <a:off x="1143000" y="3429000"/>
-            <a:ext cx="3714750" cy="47625"/>
-          </a:xfrm>
-          <a:prstGeom prst="rect">
-            <a:avLst/>
-          </a:prstGeom>
-          <a:solidFill>
-            <a:srgbClr val="1E5BC6"/>
-          </a:solidFill>
-          <a:ln>
-            <a:noFill/>
-          </a:ln>
-          <a:effectLst/>
-        </p:spPr>
-        <p:txBody>
-          <a:bodyPr rtlCol="0" anchor="ctr" wrap="square"/>
-          <a:lstStyle/>
-          <a:p>
-            <a:pPr algn="ctr"/>
-          </a:p>
-        </p:txBody>
-      </p:sp>
-      <p:sp>
-        <p:nvSpPr>
-          <p:cNvPr id="10" name="TextBox 9"/>
-          <p:cNvSpPr txBox="1"/>
-          <p:nvPr/>
-        </p:nvSpPr>
-        <p:spPr>
-          <a:xfrm>
-            <a:off x="4000500" y="3638550"/>
-            <a:ext cx="590550" cy="400050"/>
-          </a:xfrm>
-          <a:prstGeom prst="rect">
-            <a:avLst/>
-          </a:prstGeom>
-          <a:noFill/>
-        </p:spPr>
-        <p:txBody>
-          <a:bodyPr wrap="square" lIns="0" rIns="0" tIns="0" bIns="0" anchor="t">
-            <a:spAutoFit/>
-          </a:bodyPr>
-          <a:lstStyle/>
-          <a:p>
-            <a:pPr algn="r">
-              <a:lnSpc>
-                <a:spcPct val="100000"/>
-              </a:lnSpc>
-            </a:pPr>
-            <a:r>
-              <a:rPr sz="2550" b="1">
-                <a:solidFill>
-                  <a:srgbClr val="3B4B7C"/>
-                </a:solidFill>
-                <a:latin typeface="Pretendard"/>
-                <a:ea typeface="Pretendard"/>
-                <a:cs typeface="Pretendard"/>
-              </a:rPr>
-              <a:t>01</a:t>
-            </a:r>
-          </a:p>
-        </p:txBody>
-      </p:sp>
-      <p:sp>
-        <p:nvSpPr>
-          <p:cNvPr id="11" name="TextBox 10"/>
-          <p:cNvSpPr txBox="1"/>
-          <p:nvPr/>
-        </p:nvSpPr>
-        <p:spPr>
-          <a:xfrm>
-            <a:off x="1466850" y="3752850"/>
-            <a:ext cx="3067050" cy="1828800"/>
+          <p:cNvPr id="15" name="TextBox 14"/>
+          <p:cNvSpPr txBox="1"/>
+          <p:nvPr/>
+        </p:nvSpPr>
+        <p:spPr>
+          <a:xfrm>
+            <a:off x="1238250" y="3448050"/>
+            <a:ext cx="4572000" cy="647700"/>
           </a:xfrm>
           <a:prstGeom prst="rect">
             <a:avLst/>
@@ -13625,78 +14452,39 @@
           </a:bodyPr>
           <a:lstStyle/>
           <a:p>
-            <a:pPr>
+            <a:pPr algn="l">
               <a:lnSpc>
                 <a:spcPct val="115000"/>
               </a:lnSpc>
             </a:pPr>
             <a:r>
-              <a:rPr sz="2700" b="1">
-                <a:solidFill>
-                  <a:srgbClr val="FFFFFF"/>
-                </a:solidFill>
-                <a:latin typeface="Pretendard"/>
-                <a:ea typeface="Pretendard"/>
-                <a:cs typeface="Pretendard"/>
-              </a:rPr>
-              <a:t>5단계 클러스터</a:t>
-            </a:r>
-          </a:p>
-          <a:p>
-            <a:pPr>
-              <a:lnSpc>
-                <a:spcPct val="146000"/>
-              </a:lnSpc>
-              <a:spcBef>
-                <a:spcPts val="1050"/>
-              </a:spcBef>
-            </a:pPr>
-            <a:r>
-              <a:rPr sz="2025" b="0">
-                <a:solidFill>
-                  <a:srgbClr val="D9E2F0"/>
-                </a:solidFill>
-                <a:latin typeface="Pretendard"/>
-                <a:ea typeface="Pretendard"/>
-                <a:cs typeface="Pretendard"/>
-              </a:rPr>
-              <a:t>sparkContext.master</a:t>
-            </a:r>
-          </a:p>
-          <a:p>
-            <a:pPr>
-              <a:lnSpc>
-                <a:spcPct val="146000"/>
-              </a:lnSpc>
-            </a:pPr>
-            <a:r>
-              <a:rPr sz="2025" b="0">
-                <a:solidFill>
-                  <a:srgbClr val="D9E2F0"/>
-                </a:solidFill>
-                <a:latin typeface="Pretendard"/>
-                <a:ea typeface="Pretendard"/>
-                <a:cs typeface="Pretendard"/>
-              </a:rPr>
-              <a:t>= spark-master:7077</a:t>
-            </a:r>
-          </a:p>
-        </p:txBody>
-      </p:sp>
-      <p:sp>
-        <p:nvSpPr>
-          <p:cNvPr id="12" name="Rounded Rectangle 11"/>
-          <p:cNvSpPr/>
-          <p:nvPr/>
-        </p:nvSpPr>
-        <p:spPr>
-          <a:xfrm>
-            <a:off x="5238750" y="3429000"/>
-            <a:ext cx="3714750" cy="2476500"/>
+              <a:rPr sz="1875" b="1">
+                <a:solidFill>
+                  <a:srgbClr val="0D2B5E"/>
+                </a:solidFill>
+                <a:latin typeface="Pretendard"/>
+                <a:ea typeface="Pretendard"/>
+                <a:cs typeface="Pretendard"/>
+              </a:rPr>
+              <a:t>빈 lake 에 SHOW NAMESPACES</a:t>
+            </a:r>
+          </a:p>
+        </p:txBody>
+      </p:sp>
+      <p:sp>
+        <p:nvSpPr>
+          <p:cNvPr id="16" name="Rounded Rectangle 15"/>
+          <p:cNvSpPr/>
+          <p:nvPr/>
+        </p:nvSpPr>
+        <p:spPr>
+          <a:xfrm>
+            <a:off x="5943600" y="3448050"/>
+            <a:ext cx="6682740" cy="647700"/>
           </a:xfrm>
           <a:prstGeom prst="roundRect">
             <a:avLst>
-              <a:gd name="adj" fmla="val 1923"/>
+              <a:gd name="adj" fmla="val 5882"/>
             </a:avLst>
           </a:prstGeom>
           <a:solidFill>
@@ -13719,85 +14507,14 @@
       </p:sp>
       <p:sp>
         <p:nvSpPr>
-          <p:cNvPr id="13" name="Rectangle 12"/>
-          <p:cNvSpPr/>
-          <p:nvPr/>
-        </p:nvSpPr>
-        <p:spPr>
-          <a:xfrm>
-            <a:off x="5238750" y="3429000"/>
-            <a:ext cx="3714750" cy="47625"/>
-          </a:xfrm>
-          <a:prstGeom prst="rect">
-            <a:avLst/>
-          </a:prstGeom>
-          <a:solidFill>
-            <a:srgbClr val="1E5BC6"/>
-          </a:solidFill>
-          <a:ln>
-            <a:noFill/>
-          </a:ln>
-          <a:effectLst/>
-        </p:spPr>
-        <p:txBody>
-          <a:bodyPr rtlCol="0" anchor="ctr" wrap="square"/>
-          <a:lstStyle/>
-          <a:p>
-            <a:pPr algn="ctr"/>
-          </a:p>
-        </p:txBody>
-      </p:sp>
-      <p:sp>
-        <p:nvSpPr>
-          <p:cNvPr id="14" name="TextBox 13"/>
-          <p:cNvSpPr txBox="1"/>
-          <p:nvPr/>
-        </p:nvSpPr>
-        <p:spPr>
-          <a:xfrm>
-            <a:off x="8096250" y="3638550"/>
-            <a:ext cx="590550" cy="400050"/>
-          </a:xfrm>
-          <a:prstGeom prst="rect">
-            <a:avLst/>
-          </a:prstGeom>
-          <a:noFill/>
-        </p:spPr>
-        <p:txBody>
-          <a:bodyPr wrap="square" lIns="0" rIns="0" tIns="0" bIns="0" anchor="t">
-            <a:spAutoFit/>
-          </a:bodyPr>
-          <a:lstStyle/>
-          <a:p>
-            <a:pPr algn="r">
-              <a:lnSpc>
-                <a:spcPct val="100000"/>
-              </a:lnSpc>
-            </a:pPr>
-            <a:r>
-              <a:rPr sz="2550" b="1">
-                <a:solidFill>
-                  <a:srgbClr val="E4EBF4"/>
-                </a:solidFill>
-                <a:latin typeface="Pretendard"/>
-                <a:ea typeface="Pretendard"/>
-                <a:cs typeface="Pretendard"/>
-              </a:rPr>
-              <a:t>02</a:t>
-            </a:r>
-          </a:p>
-        </p:txBody>
-      </p:sp>
-      <p:sp>
-        <p:nvSpPr>
-          <p:cNvPr id="15" name="TextBox 14"/>
-          <p:cNvSpPr txBox="1"/>
-          <p:nvPr/>
-        </p:nvSpPr>
-        <p:spPr>
-          <a:xfrm>
-            <a:off x="5562600" y="3752850"/>
-            <a:ext cx="3067050" cy="1828800"/>
+          <p:cNvPr id="17" name="TextBox 16"/>
+          <p:cNvSpPr txBox="1"/>
+          <p:nvPr/>
+        </p:nvSpPr>
+        <p:spPr>
+          <a:xfrm>
+            <a:off x="6038850" y="3448050"/>
+            <a:ext cx="6492240" cy="647700"/>
           </a:xfrm>
           <a:prstGeom prst="rect">
             <a:avLst/>
@@ -13810,34 +14527,13 @@
           </a:bodyPr>
           <a:lstStyle/>
           <a:p>
-            <a:pPr>
+            <a:pPr algn="ctr">
               <a:lnSpc>
                 <a:spcPct val="115000"/>
               </a:lnSpc>
             </a:pPr>
             <a:r>
-              <a:rPr sz="2700" b="1">
-                <a:solidFill>
-                  <a:srgbClr val="0D2B5E"/>
-                </a:solidFill>
-                <a:latin typeface="Pretendard"/>
-                <a:ea typeface="Pretendard"/>
-                <a:cs typeface="Pretendard"/>
-              </a:rPr>
-              <a:t>파티션 테이블</a:t>
-            </a:r>
-          </a:p>
-          <a:p>
-            <a:pPr>
-              <a:lnSpc>
-                <a:spcPct val="146000"/>
-              </a:lnSpc>
-              <a:spcBef>
-                <a:spcPts val="1050"/>
-              </a:spcBef>
-            </a:pPr>
-            <a:r>
-              <a:rPr sz="2025" b="0">
+              <a:rPr sz="1875" b="0">
                 <a:solidFill>
                   <a:srgbClr val="3D3D3D"/>
                 </a:solidFill>
@@ -13845,43 +14541,25 @@
                 <a:ea typeface="Pretendard"/>
                 <a:cs typeface="Pretendard"/>
               </a:rPr>
-              <a:t>PARTITIONED BY</a:t>
-            </a:r>
-          </a:p>
-          <a:p>
-            <a:pPr>
-              <a:lnSpc>
-                <a:spcPct val="146000"/>
-              </a:lnSpc>
-            </a:pPr>
-            <a:r>
-              <a:rPr sz="2025" b="0">
-                <a:solidFill>
-                  <a:srgbClr val="3D3D3D"/>
-                </a:solidFill>
-                <a:latin typeface="Pretendard"/>
-                <a:ea typeface="Pretendard"/>
-                <a:cs typeface="Pretendard"/>
-              </a:rPr>
-              <a:t>(item) 폴더 비교</a:t>
-            </a:r>
-          </a:p>
-        </p:txBody>
-      </p:sp>
-      <p:sp>
-        <p:nvSpPr>
-          <p:cNvPr id="16" name="Rounded Rectangle 15"/>
-          <p:cNvSpPr/>
-          <p:nvPr/>
-        </p:nvSpPr>
-        <p:spPr>
-          <a:xfrm>
-            <a:off x="9334500" y="3429000"/>
-            <a:ext cx="3714750" cy="2476500"/>
+              <a:t>NoSuchNamespaceException</a:t>
+            </a:r>
+          </a:p>
+        </p:txBody>
+      </p:sp>
+      <p:sp>
+        <p:nvSpPr>
+          <p:cNvPr id="18" name="Rounded Rectangle 17"/>
+          <p:cNvSpPr/>
+          <p:nvPr/>
+        </p:nvSpPr>
+        <p:spPr>
+          <a:xfrm>
+            <a:off x="12664440" y="3448050"/>
+            <a:ext cx="4480560" cy="647700"/>
           </a:xfrm>
           <a:prstGeom prst="roundRect">
             <a:avLst>
-              <a:gd name="adj" fmla="val 1923"/>
+              <a:gd name="adj" fmla="val 5882"/>
             </a:avLst>
           </a:prstGeom>
           <a:solidFill>
@@ -13904,85 +14582,14 @@
       </p:sp>
       <p:sp>
         <p:nvSpPr>
-          <p:cNvPr id="17" name="Rectangle 16"/>
-          <p:cNvSpPr/>
-          <p:nvPr/>
-        </p:nvSpPr>
-        <p:spPr>
-          <a:xfrm>
-            <a:off x="9334500" y="3429000"/>
-            <a:ext cx="3714750" cy="47625"/>
-          </a:xfrm>
-          <a:prstGeom prst="rect">
-            <a:avLst/>
-          </a:prstGeom>
-          <a:solidFill>
-            <a:srgbClr val="1E5BC6"/>
-          </a:solidFill>
-          <a:ln>
-            <a:noFill/>
-          </a:ln>
-          <a:effectLst/>
-        </p:spPr>
-        <p:txBody>
-          <a:bodyPr rtlCol="0" anchor="ctr" wrap="square"/>
-          <a:lstStyle/>
-          <a:p>
-            <a:pPr algn="ctr"/>
-          </a:p>
-        </p:txBody>
-      </p:sp>
-      <p:sp>
-        <p:nvSpPr>
-          <p:cNvPr id="18" name="TextBox 17"/>
-          <p:cNvSpPr txBox="1"/>
-          <p:nvPr/>
-        </p:nvSpPr>
-        <p:spPr>
-          <a:xfrm>
-            <a:off x="12192000" y="3638550"/>
-            <a:ext cx="590550" cy="400050"/>
-          </a:xfrm>
-          <a:prstGeom prst="rect">
-            <a:avLst/>
-          </a:prstGeom>
-          <a:noFill/>
-        </p:spPr>
-        <p:txBody>
-          <a:bodyPr wrap="square" lIns="0" rIns="0" tIns="0" bIns="0" anchor="t">
-            <a:spAutoFit/>
-          </a:bodyPr>
-          <a:lstStyle/>
-          <a:p>
-            <a:pPr algn="r">
-              <a:lnSpc>
-                <a:spcPct val="100000"/>
-              </a:lnSpc>
-            </a:pPr>
-            <a:r>
-              <a:rPr sz="2550" b="1">
-                <a:solidFill>
-                  <a:srgbClr val="E4EBF4"/>
-                </a:solidFill>
-                <a:latin typeface="Pretendard"/>
-                <a:ea typeface="Pretendard"/>
-                <a:cs typeface="Pretendard"/>
-              </a:rPr>
-              <a:t>03</a:t>
-            </a:r>
-          </a:p>
-        </p:txBody>
-      </p:sp>
-      <p:sp>
-        <p:nvSpPr>
           <p:cNvPr id="19" name="TextBox 18"/>
           <p:cNvSpPr txBox="1"/>
           <p:nvPr/>
         </p:nvSpPr>
         <p:spPr>
           <a:xfrm>
-            <a:off x="9658350" y="3752850"/>
-            <a:ext cx="3067050" cy="1828800"/>
+            <a:off x="12759690" y="3448050"/>
+            <a:ext cx="4290060" cy="647700"/>
           </a:xfrm>
           <a:prstGeom prst="rect">
             <a:avLst/>
@@ -13995,34 +14602,13 @@
           </a:bodyPr>
           <a:lstStyle/>
           <a:p>
-            <a:pPr>
+            <a:pPr algn="ctr">
               <a:lnSpc>
                 <a:spcPct val="115000"/>
               </a:lnSpc>
             </a:pPr>
             <a:r>
-              <a:rPr sz="2700" b="1">
-                <a:solidFill>
-                  <a:srgbClr val="0D2B5E"/>
-                </a:solidFill>
-                <a:latin typeface="Pretendard"/>
-                <a:ea typeface="Pretendard"/>
-                <a:cs typeface="Pretendard"/>
-              </a:rPr>
-              <a:t>events.parquet</a:t>
-            </a:r>
-          </a:p>
-          <a:p>
-            <a:pPr>
-              <a:lnSpc>
-                <a:spcPct val="146000"/>
-              </a:lnSpc>
-              <a:spcBef>
-                <a:spcPts val="1050"/>
-              </a:spcBef>
-            </a:pPr>
-            <a:r>
-              <a:rPr sz="2025" b="0">
+              <a:rPr sz="1875" b="0">
                 <a:solidFill>
                   <a:srgbClr val="3D3D3D"/>
                 </a:solidFill>
@@ -14030,25 +14616,7 @@
                 <a:ea typeface="Pretendard"/>
                 <a:cs typeface="Pretendard"/>
               </a:rPr>
-              <a:t>3주차 파일 올려</a:t>
-            </a:r>
-          </a:p>
-          <a:p>
-            <a:pPr>
-              <a:lnSpc>
-                <a:spcPct val="146000"/>
-              </a:lnSpc>
-            </a:pPr>
-            <a:r>
-              <a:rPr sz="2025" b="0">
-                <a:solidFill>
-                  <a:srgbClr val="3D3D3D"/>
-                </a:solidFill>
-                <a:latin typeface="Pretendard"/>
-                <a:ea typeface="Pretendard"/>
-                <a:cs typeface="Pretendard"/>
-              </a:rPr>
-              <a:t>Iceberg 로 적재</a:t>
+              <a:t>아직 폴더가 없다</a:t>
             </a:r>
           </a:p>
         </p:txBody>
@@ -14061,12 +14629,87 @@
         </p:nvSpPr>
         <p:spPr>
           <a:xfrm>
-            <a:off x="13430250" y="3429000"/>
-            <a:ext cx="3714750" cy="2476500"/>
+            <a:off x="1143000" y="4171950"/>
+            <a:ext cx="4762500" cy="647700"/>
           </a:xfrm>
           <a:prstGeom prst="roundRect">
             <a:avLst>
-              <a:gd name="adj" fmla="val 1923"/>
+              <a:gd name="adj" fmla="val 5882"/>
+            </a:avLst>
+          </a:prstGeom>
+          <a:solidFill>
+            <a:srgbClr val="EDF3FD"/>
+          </a:solidFill>
+          <a:ln w="9525">
+            <a:solidFill>
+              <a:srgbClr val="BFD3F5"/>
+            </a:solidFill>
+          </a:ln>
+          <a:effectLst/>
+        </p:spPr>
+        <p:txBody>
+          <a:bodyPr rtlCol="0" anchor="ctr" wrap="square"/>
+          <a:lstStyle/>
+          <a:p>
+            <a:pPr algn="ctr"/>
+          </a:p>
+        </p:txBody>
+      </p:sp>
+      <p:sp>
+        <p:nvSpPr>
+          <p:cNvPr id="21" name="TextBox 20"/>
+          <p:cNvSpPr txBox="1"/>
+          <p:nvPr/>
+        </p:nvSpPr>
+        <p:spPr>
+          <a:xfrm>
+            <a:off x="1238250" y="4171950"/>
+            <a:ext cx="4572000" cy="647700"/>
+          </a:xfrm>
+          <a:prstGeom prst="rect">
+            <a:avLst/>
+          </a:prstGeom>
+          <a:noFill/>
+        </p:spPr>
+        <p:txBody>
+          <a:bodyPr wrap="square" lIns="0" rIns="0" tIns="0" bIns="0" anchor="ctr">
+            <a:spAutoFit/>
+          </a:bodyPr>
+          <a:lstStyle/>
+          <a:p>
+            <a:pPr algn="l">
+              <a:lnSpc>
+                <a:spcPct val="115000"/>
+              </a:lnSpc>
+            </a:pPr>
+            <a:r>
+              <a:rPr sz="1875" b="1">
+                <a:solidFill>
+                  <a:srgbClr val="0D2B5E"/>
+                </a:solidFill>
+                <a:latin typeface="Pretendard"/>
+                <a:ea typeface="Pretendard"/>
+                <a:cs typeface="Pretendard"/>
+              </a:rPr>
+              <a:t>catalog.lake 세 줄 없음</a:t>
+            </a:r>
+          </a:p>
+        </p:txBody>
+      </p:sp>
+      <p:sp>
+        <p:nvSpPr>
+          <p:cNvPr id="22" name="Rounded Rectangle 21"/>
+          <p:cNvSpPr/>
+          <p:nvPr/>
+        </p:nvSpPr>
+        <p:spPr>
+          <a:xfrm>
+            <a:off x="5943600" y="4171950"/>
+            <a:ext cx="6682740" cy="647700"/>
+          </a:xfrm>
+          <a:prstGeom prst="roundRect">
+            <a:avLst>
+              <a:gd name="adj" fmla="val 5882"/>
             </a:avLst>
           </a:prstGeom>
           <a:solidFill>
@@ -14089,20 +14732,402 @@
       </p:sp>
       <p:sp>
         <p:nvSpPr>
-          <p:cNvPr id="21" name="Rectangle 20"/>
-          <p:cNvSpPr/>
-          <p:nvPr/>
-        </p:nvSpPr>
-        <p:spPr>
-          <a:xfrm>
-            <a:off x="13430250" y="3429000"/>
-            <a:ext cx="3714750" cy="47625"/>
-          </a:xfrm>
-          <a:prstGeom prst="rect">
-            <a:avLst/>
-          </a:prstGeom>
-          <a:solidFill>
-            <a:srgbClr val="1E5BC6"/>
+          <p:cNvPr id="23" name="TextBox 22"/>
+          <p:cNvSpPr txBox="1"/>
+          <p:nvPr/>
+        </p:nvSpPr>
+        <p:spPr>
+          <a:xfrm>
+            <a:off x="6038850" y="4171950"/>
+            <a:ext cx="6492240" cy="647700"/>
+          </a:xfrm>
+          <a:prstGeom prst="rect">
+            <a:avLst/>
+          </a:prstGeom>
+          <a:noFill/>
+        </p:spPr>
+        <p:txBody>
+          <a:bodyPr wrap="square" lIns="0" rIns="0" tIns="0" bIns="0" anchor="ctr">
+            <a:spAutoFit/>
+          </a:bodyPr>
+          <a:lstStyle/>
+          <a:p>
+            <a:pPr algn="ctr">
+              <a:lnSpc>
+                <a:spcPct val="115000"/>
+              </a:lnSpc>
+            </a:pPr>
+            <a:r>
+              <a:rPr sz="1875" b="0">
+                <a:solidFill>
+                  <a:srgbClr val="3D3D3D"/>
+                </a:solidFill>
+                <a:latin typeface="Pretendard"/>
+                <a:ea typeface="Pretendard"/>
+                <a:cs typeface="Pretendard"/>
+              </a:rPr>
+              <a:t>REQUIRES_SINGLE_PART_NAMESPACE</a:t>
+            </a:r>
+          </a:p>
+        </p:txBody>
+      </p:sp>
+      <p:sp>
+        <p:nvSpPr>
+          <p:cNvPr id="24" name="Rounded Rectangle 23"/>
+          <p:cNvSpPr/>
+          <p:nvPr/>
+        </p:nvSpPr>
+        <p:spPr>
+          <a:xfrm>
+            <a:off x="12664440" y="4171950"/>
+            <a:ext cx="4480560" cy="647700"/>
+          </a:xfrm>
+          <a:prstGeom prst="roundRect">
+            <a:avLst>
+              <a:gd name="adj" fmla="val 5882"/>
+            </a:avLst>
+          </a:prstGeom>
+          <a:solidFill>
+            <a:srgbClr val="FAFBFD"/>
+          </a:solidFill>
+          <a:ln w="9525">
+            <a:solidFill>
+              <a:srgbClr val="DCE1E8"/>
+            </a:solidFill>
+          </a:ln>
+          <a:effectLst/>
+        </p:spPr>
+        <p:txBody>
+          <a:bodyPr rtlCol="0" anchor="ctr" wrap="square"/>
+          <a:lstStyle/>
+          <a:p>
+            <a:pPr algn="ctr"/>
+          </a:p>
+        </p:txBody>
+      </p:sp>
+      <p:sp>
+        <p:nvSpPr>
+          <p:cNvPr id="25" name="TextBox 24"/>
+          <p:cNvSpPr txBox="1"/>
+          <p:nvPr/>
+        </p:nvSpPr>
+        <p:spPr>
+          <a:xfrm>
+            <a:off x="12759690" y="4171950"/>
+            <a:ext cx="4290060" cy="647700"/>
+          </a:xfrm>
+          <a:prstGeom prst="rect">
+            <a:avLst/>
+          </a:prstGeom>
+          <a:noFill/>
+        </p:spPr>
+        <p:txBody>
+          <a:bodyPr wrap="square" lIns="0" rIns="0" tIns="0" bIns="0" anchor="ctr">
+            <a:spAutoFit/>
+          </a:bodyPr>
+          <a:lstStyle/>
+          <a:p>
+            <a:pPr algn="ctr">
+              <a:lnSpc>
+                <a:spcPct val="115000"/>
+              </a:lnSpc>
+            </a:pPr>
+            <a:r>
+              <a:rPr sz="1875" b="0">
+                <a:solidFill>
+                  <a:srgbClr val="3D3D3D"/>
+                </a:solidFill>
+                <a:latin typeface="Pretendard"/>
+                <a:ea typeface="Pretendard"/>
+                <a:cs typeface="Pretendard"/>
+              </a:rPr>
+              <a:t>lake 를 카탈로그로 모름</a:t>
+            </a:r>
+          </a:p>
+        </p:txBody>
+      </p:sp>
+      <p:sp>
+        <p:nvSpPr>
+          <p:cNvPr id="26" name="Rounded Rectangle 25"/>
+          <p:cNvSpPr/>
+          <p:nvPr/>
+        </p:nvSpPr>
+        <p:spPr>
+          <a:xfrm>
+            <a:off x="1143000" y="4895850"/>
+            <a:ext cx="4762500" cy="647700"/>
+          </a:xfrm>
+          <a:prstGeom prst="roundRect">
+            <a:avLst>
+              <a:gd name="adj" fmla="val 5882"/>
+            </a:avLst>
+          </a:prstGeom>
+          <a:solidFill>
+            <a:srgbClr val="EDF3FD"/>
+          </a:solidFill>
+          <a:ln w="9525">
+            <a:solidFill>
+              <a:srgbClr val="BFD3F5"/>
+            </a:solidFill>
+          </a:ln>
+          <a:effectLst/>
+        </p:spPr>
+        <p:txBody>
+          <a:bodyPr rtlCol="0" anchor="ctr" wrap="square"/>
+          <a:lstStyle/>
+          <a:p>
+            <a:pPr algn="ctr"/>
+          </a:p>
+        </p:txBody>
+      </p:sp>
+      <p:sp>
+        <p:nvSpPr>
+          <p:cNvPr id="27" name="TextBox 26"/>
+          <p:cNvSpPr txBox="1"/>
+          <p:nvPr/>
+        </p:nvSpPr>
+        <p:spPr>
+          <a:xfrm>
+            <a:off x="1238250" y="4895850"/>
+            <a:ext cx="4572000" cy="647700"/>
+          </a:xfrm>
+          <a:prstGeom prst="rect">
+            <a:avLst/>
+          </a:prstGeom>
+          <a:noFill/>
+        </p:spPr>
+        <p:txBody>
+          <a:bodyPr wrap="square" lIns="0" rIns="0" tIns="0" bIns="0" anchor="ctr">
+            <a:spAutoFit/>
+          </a:bodyPr>
+          <a:lstStyle/>
+          <a:p>
+            <a:pPr algn="l">
+              <a:lnSpc>
+                <a:spcPct val="115000"/>
+              </a:lnSpc>
+            </a:pPr>
+            <a:r>
+              <a:rPr sz="1875" b="1">
+                <a:solidFill>
+                  <a:srgbClr val="0D2B5E"/>
+                </a:solidFill>
+                <a:latin typeface="Pretendard"/>
+                <a:ea typeface="Pretendard"/>
+                <a:cs typeface="Pretendard"/>
+              </a:rPr>
+              <a:t>iceberg 패키지 없음</a:t>
+            </a:r>
+          </a:p>
+        </p:txBody>
+      </p:sp>
+      <p:sp>
+        <p:nvSpPr>
+          <p:cNvPr id="28" name="Rounded Rectangle 27"/>
+          <p:cNvSpPr/>
+          <p:nvPr/>
+        </p:nvSpPr>
+        <p:spPr>
+          <a:xfrm>
+            <a:off x="5943600" y="4895850"/>
+            <a:ext cx="6682740" cy="647700"/>
+          </a:xfrm>
+          <a:prstGeom prst="roundRect">
+            <a:avLst>
+              <a:gd name="adj" fmla="val 5882"/>
+            </a:avLst>
+          </a:prstGeom>
+          <a:solidFill>
+            <a:srgbClr val="FAFBFD"/>
+          </a:solidFill>
+          <a:ln w="9525">
+            <a:solidFill>
+              <a:srgbClr val="DCE1E8"/>
+            </a:solidFill>
+          </a:ln>
+          <a:effectLst/>
+        </p:spPr>
+        <p:txBody>
+          <a:bodyPr rtlCol="0" anchor="ctr" wrap="square"/>
+          <a:lstStyle/>
+          <a:p>
+            <a:pPr algn="ctr"/>
+          </a:p>
+        </p:txBody>
+      </p:sp>
+      <p:sp>
+        <p:nvSpPr>
+          <p:cNvPr id="29" name="TextBox 28"/>
+          <p:cNvSpPr txBox="1"/>
+          <p:nvPr/>
+        </p:nvSpPr>
+        <p:spPr>
+          <a:xfrm>
+            <a:off x="6038850" y="4895850"/>
+            <a:ext cx="6492240" cy="647700"/>
+          </a:xfrm>
+          <a:prstGeom prst="rect">
+            <a:avLst/>
+          </a:prstGeom>
+          <a:noFill/>
+        </p:spPr>
+        <p:txBody>
+          <a:bodyPr wrap="square" lIns="0" rIns="0" tIns="0" bIns="0" anchor="ctr">
+            <a:spAutoFit/>
+          </a:bodyPr>
+          <a:lstStyle/>
+          <a:p>
+            <a:pPr algn="ctr">
+              <a:lnSpc>
+                <a:spcPct val="115000"/>
+              </a:lnSpc>
+            </a:pPr>
+            <a:r>
+              <a:rPr sz="1875" b="0">
+                <a:solidFill>
+                  <a:srgbClr val="3D3D3D"/>
+                </a:solidFill>
+                <a:latin typeface="Pretendard"/>
+                <a:ea typeface="Pretendard"/>
+                <a:cs typeface="Pretendard"/>
+              </a:rPr>
+              <a:t>Cannot find catalog plugin class</a:t>
+            </a:r>
+          </a:p>
+        </p:txBody>
+      </p:sp>
+      <p:sp>
+        <p:nvSpPr>
+          <p:cNvPr id="30" name="Rounded Rectangle 29"/>
+          <p:cNvSpPr/>
+          <p:nvPr/>
+        </p:nvSpPr>
+        <p:spPr>
+          <a:xfrm>
+            <a:off x="12664440" y="4895850"/>
+            <a:ext cx="4480560" cy="647700"/>
+          </a:xfrm>
+          <a:prstGeom prst="roundRect">
+            <a:avLst>
+              <a:gd name="adj" fmla="val 5882"/>
+            </a:avLst>
+          </a:prstGeom>
+          <a:solidFill>
+            <a:srgbClr val="FAFBFD"/>
+          </a:solidFill>
+          <a:ln w="9525">
+            <a:solidFill>
+              <a:srgbClr val="DCE1E8"/>
+            </a:solidFill>
+          </a:ln>
+          <a:effectLst/>
+        </p:spPr>
+        <p:txBody>
+          <a:bodyPr rtlCol="0" anchor="ctr" wrap="square"/>
+          <a:lstStyle/>
+          <a:p>
+            <a:pPr algn="ctr"/>
+          </a:p>
+        </p:txBody>
+      </p:sp>
+      <p:sp>
+        <p:nvSpPr>
+          <p:cNvPr id="31" name="TextBox 30"/>
+          <p:cNvSpPr txBox="1"/>
+          <p:nvPr/>
+        </p:nvSpPr>
+        <p:spPr>
+          <a:xfrm>
+            <a:off x="12759690" y="4895850"/>
+            <a:ext cx="4290060" cy="647700"/>
+          </a:xfrm>
+          <a:prstGeom prst="rect">
+            <a:avLst/>
+          </a:prstGeom>
+          <a:noFill/>
+        </p:spPr>
+        <p:txBody>
+          <a:bodyPr wrap="square" lIns="0" rIns="0" tIns="0" bIns="0" anchor="ctr">
+            <a:spAutoFit/>
+          </a:bodyPr>
+          <a:lstStyle/>
+          <a:p>
+            <a:pPr algn="ctr">
+              <a:lnSpc>
+                <a:spcPct val="115000"/>
+              </a:lnSpc>
+            </a:pPr>
+            <a:r>
+              <a:rPr sz="1875" b="0">
+                <a:solidFill>
+                  <a:srgbClr val="3D3D3D"/>
+                </a:solidFill>
+                <a:latin typeface="Pretendard"/>
+                <a:ea typeface="Pretendard"/>
+                <a:cs typeface="Pretendard"/>
+              </a:rPr>
+              <a:t>--packages 확인</a:t>
+            </a:r>
+          </a:p>
+        </p:txBody>
+      </p:sp>
+      <p:sp>
+        <p:nvSpPr>
+          <p:cNvPr id="32" name="TextBox 31"/>
+          <p:cNvSpPr txBox="1"/>
+          <p:nvPr/>
+        </p:nvSpPr>
+        <p:spPr>
+          <a:xfrm>
+            <a:off x="1143000" y="7620000"/>
+            <a:ext cx="16002000" cy="342900"/>
+          </a:xfrm>
+          <a:prstGeom prst="rect">
+            <a:avLst/>
+          </a:prstGeom>
+          <a:noFill/>
+        </p:spPr>
+        <p:txBody>
+          <a:bodyPr wrap="square" lIns="0" rIns="0" tIns="0" bIns="0" anchor="t">
+            <a:spAutoFit/>
+          </a:bodyPr>
+          <a:lstStyle/>
+          <a:p>
+            <a:pPr algn="l">
+              <a:lnSpc>
+                <a:spcPct val="100000"/>
+              </a:lnSpc>
+            </a:pPr>
+            <a:r>
+              <a:rPr sz="1875" b="1">
+                <a:solidFill>
+                  <a:srgbClr val="7D7D7D"/>
+                </a:solidFill>
+                <a:latin typeface="Pretendard"/>
+                <a:ea typeface="Pretendard"/>
+                <a:cs typeface="Pretendard"/>
+              </a:rPr>
+              <a:t>첫 줄은 1단계에서 쳐 본 것 — 아래 둘은 lake-pyspark.sh 에서 줄이 빠졌을 때(실측)</a:t>
+            </a:r>
+          </a:p>
+        </p:txBody>
+      </p:sp>
+      <p:sp>
+        <p:nvSpPr>
+          <p:cNvPr id="33" name="Rectangle 32"/>
+          <p:cNvSpPr/>
+          <p:nvPr/>
+        </p:nvSpPr>
+        <p:spPr>
+          <a:xfrm>
+            <a:off x="1143000" y="8058150"/>
+            <a:ext cx="16002000" cy="9525"/>
+          </a:xfrm>
+          <a:prstGeom prst="rect">
+            <a:avLst/>
+          </a:prstGeom>
+          <a:solidFill>
+            <a:srgbClr val="DCE1E8"/>
           </a:solidFill>
           <a:ln>
             <a:noFill/>
@@ -14119,229 +15144,7 @@
       </p:sp>
       <p:sp>
         <p:nvSpPr>
-          <p:cNvPr id="22" name="TextBox 21"/>
-          <p:cNvSpPr txBox="1"/>
-          <p:nvPr/>
-        </p:nvSpPr>
-        <p:spPr>
-          <a:xfrm>
-            <a:off x="16287750" y="3638550"/>
-            <a:ext cx="590550" cy="400050"/>
-          </a:xfrm>
-          <a:prstGeom prst="rect">
-            <a:avLst/>
-          </a:prstGeom>
-          <a:noFill/>
-        </p:spPr>
-        <p:txBody>
-          <a:bodyPr wrap="square" lIns="0" rIns="0" tIns="0" bIns="0" anchor="t">
-            <a:spAutoFit/>
-          </a:bodyPr>
-          <a:lstStyle/>
-          <a:p>
-            <a:pPr algn="r">
-              <a:lnSpc>
-                <a:spcPct val="100000"/>
-              </a:lnSpc>
-            </a:pPr>
-            <a:r>
-              <a:rPr sz="2550" b="1">
-                <a:solidFill>
-                  <a:srgbClr val="E4EBF4"/>
-                </a:solidFill>
-                <a:latin typeface="Pretendard"/>
-                <a:ea typeface="Pretendard"/>
-                <a:cs typeface="Pretendard"/>
-              </a:rPr>
-              <a:t>04</a:t>
-            </a:r>
-          </a:p>
-        </p:txBody>
-      </p:sp>
-      <p:sp>
-        <p:nvSpPr>
-          <p:cNvPr id="23" name="TextBox 22"/>
-          <p:cNvSpPr txBox="1"/>
-          <p:nvPr/>
-        </p:nvSpPr>
-        <p:spPr>
-          <a:xfrm>
-            <a:off x="13754100" y="3752850"/>
-            <a:ext cx="3067050" cy="1828800"/>
-          </a:xfrm>
-          <a:prstGeom prst="rect">
-            <a:avLst/>
-          </a:prstGeom>
-          <a:noFill/>
-        </p:spPr>
-        <p:txBody>
-          <a:bodyPr wrap="square" lIns="0" rIns="0" tIns="0" bIns="0" anchor="ctr">
-            <a:spAutoFit/>
-          </a:bodyPr>
-          <a:lstStyle/>
-          <a:p>
-            <a:pPr>
-              <a:lnSpc>
-                <a:spcPct val="115000"/>
-              </a:lnSpc>
-            </a:pPr>
-            <a:r>
-              <a:rPr sz="2700" b="1">
-                <a:solidFill>
-                  <a:srgbClr val="0D2B5E"/>
-                </a:solidFill>
-                <a:latin typeface="Pretendard"/>
-                <a:ea typeface="Pretendard"/>
-                <a:cs typeface="Pretendard"/>
-              </a:rPr>
-              <a:t>CTAS 집계</a:t>
-            </a:r>
-          </a:p>
-          <a:p>
-            <a:pPr>
-              <a:lnSpc>
-                <a:spcPct val="146000"/>
-              </a:lnSpc>
-              <a:spcBef>
-                <a:spcPts val="1050"/>
-              </a:spcBef>
-            </a:pPr>
-            <a:r>
-              <a:rPr sz="2025" b="0">
-                <a:solidFill>
-                  <a:srgbClr val="3D3D3D"/>
-                </a:solidFill>
-                <a:latin typeface="Pretendard"/>
-                <a:ea typeface="Pretendard"/>
-                <a:cs typeface="Pretendard"/>
-              </a:rPr>
-              <a:t>lake.db.summary</a:t>
-            </a:r>
-          </a:p>
-          <a:p>
-            <a:pPr>
-              <a:lnSpc>
-                <a:spcPct val="146000"/>
-              </a:lnSpc>
-            </a:pPr>
-            <a:r>
-              <a:rPr sz="2025" b="0">
-                <a:solidFill>
-                  <a:srgbClr val="3D3D3D"/>
-                </a:solidFill>
-                <a:latin typeface="Pretendard"/>
-                <a:ea typeface="Pretendard"/>
-                <a:cs typeface="Pretendard"/>
-              </a:rPr>
-              <a:t>AS SELECT …</a:t>
-            </a:r>
-          </a:p>
-        </p:txBody>
-      </p:sp>
-      <p:sp>
-        <p:nvSpPr>
-          <p:cNvPr id="24" name="Rectangle 23"/>
-          <p:cNvSpPr/>
-          <p:nvPr/>
-        </p:nvSpPr>
-        <p:spPr>
-          <a:xfrm>
-            <a:off x="1143000" y="6496050"/>
-            <a:ext cx="47625" cy="723900"/>
-          </a:xfrm>
-          <a:prstGeom prst="rect">
-            <a:avLst/>
-          </a:prstGeom>
-          <a:solidFill>
-            <a:srgbClr val="1E5BC6"/>
-          </a:solidFill>
-          <a:ln>
-            <a:noFill/>
-          </a:ln>
-          <a:effectLst/>
-        </p:spPr>
-        <p:txBody>
-          <a:bodyPr rtlCol="0" anchor="ctr" wrap="square"/>
-          <a:lstStyle/>
-          <a:p>
-            <a:pPr algn="ctr"/>
-          </a:p>
-        </p:txBody>
-      </p:sp>
-      <p:sp>
-        <p:nvSpPr>
-          <p:cNvPr id="25" name="TextBox 24"/>
-          <p:cNvSpPr txBox="1"/>
-          <p:nvPr/>
-        </p:nvSpPr>
-        <p:spPr>
-          <a:xfrm>
-            <a:off x="1390650" y="6553200"/>
-            <a:ext cx="15754350" cy="762000"/>
-          </a:xfrm>
-          <a:prstGeom prst="rect">
-            <a:avLst/>
-          </a:prstGeom>
-          <a:noFill/>
-        </p:spPr>
-        <p:txBody>
-          <a:bodyPr wrap="square" lIns="0" rIns="0" tIns="0" bIns="0" anchor="t">
-            <a:spAutoFit/>
-          </a:bodyPr>
-          <a:lstStyle/>
-          <a:p>
-            <a:pPr algn="l">
-              <a:lnSpc>
-                <a:spcPct val="150000"/>
-              </a:lnSpc>
-            </a:pPr>
-            <a:r>
-              <a:rPr sz="2025" b="1">
-                <a:solidFill>
-                  <a:srgbClr val="7D7D7D"/>
-                </a:solidFill>
-                <a:latin typeface="Pretendard"/>
-                <a:ea typeface="Pretendard"/>
-                <a:cs typeface="Pretendard"/>
-              </a:rPr>
-              <a:t>마스터 UI(8080) Running Applications 에 이 셸이 보인다 — 5-2 클러스터가 오늘 레이크하우스를 다루는 중</a:t>
-            </a:r>
-          </a:p>
-        </p:txBody>
-      </p:sp>
-      <p:sp>
-        <p:nvSpPr>
-          <p:cNvPr id="26" name="Rectangle 25"/>
-          <p:cNvSpPr/>
-          <p:nvPr/>
-        </p:nvSpPr>
-        <p:spPr>
-          <a:xfrm>
-            <a:off x="1143000" y="8058150"/>
-            <a:ext cx="16002000" cy="9525"/>
-          </a:xfrm>
-          <a:prstGeom prst="rect">
-            <a:avLst/>
-          </a:prstGeom>
-          <a:solidFill>
-            <a:srgbClr val="DCE1E8"/>
-          </a:solidFill>
-          <a:ln>
-            <a:noFill/>
-          </a:ln>
-          <a:effectLst/>
-        </p:spPr>
-        <p:txBody>
-          <a:bodyPr rtlCol="0" anchor="ctr" wrap="square"/>
-          <a:lstStyle/>
-          <a:p>
-            <a:pPr algn="ctr"/>
-          </a:p>
-        </p:txBody>
-      </p:sp>
-      <p:sp>
-        <p:nvSpPr>
-          <p:cNvPr id="27" name="TextBox 26"/>
+          <p:cNvPr id="34" name="TextBox 33"/>
           <p:cNvSpPr txBox="1"/>
           <p:nvPr/>
         </p:nvSpPr>
@@ -14382,7 +15185,7 @@
       </p:sp>
       <p:sp>
         <p:nvSpPr>
-          <p:cNvPr id="28" name="TextBox 27"/>
+          <p:cNvPr id="35" name="TextBox 34"/>
           <p:cNvSpPr txBox="1"/>
           <p:nvPr/>
         </p:nvSpPr>
